--- a/提出物一覧/アクセンチュア_中間発表.pptx
+++ b/提出物一覧/アクセンチュア_中間発表.pptx
@@ -20,12 +20,12 @@
     <p:sldId id="736" r:id="rId11"/>
     <p:sldId id="738" r:id="rId12"/>
     <p:sldId id="737" r:id="rId13"/>
-    <p:sldId id="739" r:id="rId14"/>
-    <p:sldId id="740" r:id="rId15"/>
+    <p:sldId id="740" r:id="rId14"/>
+    <p:sldId id="739" r:id="rId15"/>
     <p:sldId id="741" r:id="rId16"/>
     <p:sldId id="742" r:id="rId17"/>
-    <p:sldId id="746" r:id="rId18"/>
-    <p:sldId id="747" r:id="rId19"/>
+    <p:sldId id="751" r:id="rId18"/>
+    <p:sldId id="752" r:id="rId19"/>
     <p:sldId id="743" r:id="rId20"/>
     <p:sldId id="748" r:id="rId21"/>
     <p:sldId id="750" r:id="rId22"/>
@@ -2797,7 +2797,7 @@
           <a:p>
             <a:fld id="{C7F15BE4-A486-474C-B16D-8EC3F0EBB2E4}" type="datetimeFigureOut">
               <a:rPr kumimoji="1" lang="ja-JP" altLang="en-US" smtClean="0"/>
-              <a:t>2026/9/8</a:t>
+              <a:t>2026/9/9</a:t>
             </a:fld>
             <a:endParaRPr kumimoji="1" lang="ja-JP" altLang="en-US"/>
           </a:p>
@@ -3411,7 +3411,7 @@
           <a:p>
             <a:fld id="{22885039-54E1-425C-BA26-26C83A74E520}" type="datetimeFigureOut">
               <a:rPr kumimoji="1" lang="ja-JP" altLang="en-US" smtClean="0"/>
-              <a:t>2026/9/8</a:t>
+              <a:t>2026/9/9</a:t>
             </a:fld>
             <a:endParaRPr kumimoji="1" lang="ja-JP" altLang="en-US"/>
           </a:p>
@@ -3641,7 +3641,7 @@
           <a:p>
             <a:fld id="{22885039-54E1-425C-BA26-26C83A74E520}" type="datetimeFigureOut">
               <a:rPr kumimoji="1" lang="ja-JP" altLang="en-US" smtClean="0"/>
-              <a:t>2026/9/8</a:t>
+              <a:t>2026/9/9</a:t>
             </a:fld>
             <a:endParaRPr kumimoji="1" lang="ja-JP" altLang="en-US"/>
           </a:p>
@@ -3881,7 +3881,7 @@
           <a:p>
             <a:fld id="{22885039-54E1-425C-BA26-26C83A74E520}" type="datetimeFigureOut">
               <a:rPr kumimoji="1" lang="ja-JP" altLang="en-US" smtClean="0"/>
-              <a:t>2026/9/8</a:t>
+              <a:t>2026/9/9</a:t>
             </a:fld>
             <a:endParaRPr kumimoji="1" lang="ja-JP" altLang="en-US"/>
           </a:p>
@@ -4101,7 +4101,7 @@
           <a:p>
             <a:fld id="{22885039-54E1-425C-BA26-26C83A74E520}" type="datetimeFigureOut">
               <a:rPr kumimoji="1" lang="ja-JP" altLang="en-US" smtClean="0"/>
-              <a:t>2026/9/8</a:t>
+              <a:t>2026/9/9</a:t>
             </a:fld>
             <a:endParaRPr kumimoji="1" lang="ja-JP" altLang="en-US"/>
           </a:p>
@@ -4451,7 +4451,7 @@
           <a:p>
             <a:fld id="{22885039-54E1-425C-BA26-26C83A74E520}" type="datetimeFigureOut">
               <a:rPr kumimoji="1" lang="ja-JP" altLang="en-US" smtClean="0"/>
-              <a:t>2026/9/8</a:t>
+              <a:t>2026/9/9</a:t>
             </a:fld>
             <a:endParaRPr kumimoji="1" lang="ja-JP" altLang="en-US"/>
           </a:p>
@@ -4780,7 +4780,7 @@
           <a:p>
             <a:fld id="{22885039-54E1-425C-BA26-26C83A74E520}" type="datetimeFigureOut">
               <a:rPr kumimoji="1" lang="ja-JP" altLang="en-US" smtClean="0"/>
-              <a:t>2026/9/8</a:t>
+              <a:t>2026/9/9</a:t>
             </a:fld>
             <a:endParaRPr kumimoji="1" lang="ja-JP" altLang="en-US"/>
           </a:p>
@@ -5256,7 +5256,7 @@
           <a:p>
             <a:fld id="{22885039-54E1-425C-BA26-26C83A74E520}" type="datetimeFigureOut">
               <a:rPr kumimoji="1" lang="ja-JP" altLang="en-US" smtClean="0"/>
-              <a:t>2026/9/8</a:t>
+              <a:t>2026/9/9</a:t>
             </a:fld>
             <a:endParaRPr kumimoji="1" lang="ja-JP" altLang="en-US"/>
           </a:p>
@@ -5397,7 +5397,7 @@
           <a:p>
             <a:fld id="{22885039-54E1-425C-BA26-26C83A74E520}" type="datetimeFigureOut">
               <a:rPr kumimoji="1" lang="ja-JP" altLang="en-US" smtClean="0"/>
-              <a:t>2026/9/8</a:t>
+              <a:t>2026/9/9</a:t>
             </a:fld>
             <a:endParaRPr kumimoji="1" lang="ja-JP" altLang="en-US"/>
           </a:p>
@@ -5510,7 +5510,7 @@
           <a:p>
             <a:fld id="{22885039-54E1-425C-BA26-26C83A74E520}" type="datetimeFigureOut">
               <a:rPr kumimoji="1" lang="ja-JP" altLang="en-US" smtClean="0"/>
-              <a:t>2026/9/8</a:t>
+              <a:t>2026/9/9</a:t>
             </a:fld>
             <a:endParaRPr kumimoji="1" lang="ja-JP" altLang="en-US"/>
           </a:p>
@@ -5853,7 +5853,7 @@
           <a:p>
             <a:fld id="{22885039-54E1-425C-BA26-26C83A74E520}" type="datetimeFigureOut">
               <a:rPr kumimoji="1" lang="ja-JP" altLang="en-US" smtClean="0"/>
-              <a:t>2026/9/8</a:t>
+              <a:t>2026/9/9</a:t>
             </a:fld>
             <a:endParaRPr kumimoji="1" lang="ja-JP" altLang="en-US"/>
           </a:p>
@@ -6216,7 +6216,7 @@
           <a:p>
             <a:fld id="{22885039-54E1-425C-BA26-26C83A74E520}" type="datetimeFigureOut">
               <a:rPr kumimoji="1" lang="ja-JP" altLang="en-US" smtClean="0"/>
-              <a:t>2026/9/8</a:t>
+              <a:t>2026/9/9</a:t>
             </a:fld>
             <a:endParaRPr kumimoji="1" lang="ja-JP" altLang="en-US"/>
           </a:p>
@@ -6446,7 +6446,7 @@
           <a:p>
             <a:fld id="{22885039-54E1-425C-BA26-26C83A74E520}" type="datetimeFigureOut">
               <a:rPr kumimoji="1" lang="ja-JP" altLang="en-US" smtClean="0"/>
-              <a:t>2026/9/8</a:t>
+              <a:t>2026/9/9</a:t>
             </a:fld>
             <a:endParaRPr kumimoji="1" lang="ja-JP" altLang="en-US"/>
           </a:p>
@@ -6686,7 +6686,7 @@
           <a:p>
             <a:fld id="{22885039-54E1-425C-BA26-26C83A74E520}" type="datetimeFigureOut">
               <a:rPr kumimoji="1" lang="ja-JP" altLang="en-US" smtClean="0"/>
-              <a:t>2026/9/8</a:t>
+              <a:t>2026/9/9</a:t>
             </a:fld>
             <a:endParaRPr kumimoji="1" lang="ja-JP" altLang="en-US"/>
           </a:p>
@@ -10452,7 +10452,7 @@
           <a:p>
             <a:fld id="{22885039-54E1-425C-BA26-26C83A74E520}" type="datetimeFigureOut">
               <a:rPr kumimoji="1" lang="ja-JP" altLang="en-US" smtClean="0"/>
-              <a:t>2026/9/8</a:t>
+              <a:t>2026/9/9</a:t>
             </a:fld>
             <a:endParaRPr kumimoji="1" lang="ja-JP" altLang="en-US"/>
           </a:p>
@@ -11028,7 +11028,7 @@
           <a:p>
             <a:fld id="{22885039-54E1-425C-BA26-26C83A74E520}" type="datetimeFigureOut">
               <a:rPr kumimoji="1" lang="ja-JP" altLang="en-US" smtClean="0"/>
-              <a:t>2026/9/8</a:t>
+              <a:t>2026/9/9</a:t>
             </a:fld>
             <a:endParaRPr kumimoji="1" lang="ja-JP" altLang="en-US"/>
           </a:p>
@@ -11378,7 +11378,7 @@
           <a:p>
             <a:fld id="{22885039-54E1-425C-BA26-26C83A74E520}" type="datetimeFigureOut">
               <a:rPr kumimoji="1" lang="ja-JP" altLang="en-US" smtClean="0"/>
-              <a:t>2026/9/8</a:t>
+              <a:t>2026/9/9</a:t>
             </a:fld>
             <a:endParaRPr kumimoji="1" lang="ja-JP" altLang="en-US"/>
           </a:p>
@@ -11707,7 +11707,7 @@
           <a:p>
             <a:fld id="{22885039-54E1-425C-BA26-26C83A74E520}" type="datetimeFigureOut">
               <a:rPr kumimoji="1" lang="ja-JP" altLang="en-US" smtClean="0"/>
-              <a:t>2026/9/8</a:t>
+              <a:t>2026/9/9</a:t>
             </a:fld>
             <a:endParaRPr kumimoji="1" lang="ja-JP" altLang="en-US"/>
           </a:p>
@@ -12183,7 +12183,7 @@
           <a:p>
             <a:fld id="{22885039-54E1-425C-BA26-26C83A74E520}" type="datetimeFigureOut">
               <a:rPr kumimoji="1" lang="ja-JP" altLang="en-US" smtClean="0"/>
-              <a:t>2026/9/8</a:t>
+              <a:t>2026/9/9</a:t>
             </a:fld>
             <a:endParaRPr kumimoji="1" lang="ja-JP" altLang="en-US"/>
           </a:p>
@@ -12324,7 +12324,7 @@
           <a:p>
             <a:fld id="{22885039-54E1-425C-BA26-26C83A74E520}" type="datetimeFigureOut">
               <a:rPr kumimoji="1" lang="ja-JP" altLang="en-US" smtClean="0"/>
-              <a:t>2026/9/8</a:t>
+              <a:t>2026/9/9</a:t>
             </a:fld>
             <a:endParaRPr kumimoji="1" lang="ja-JP" altLang="en-US"/>
           </a:p>
@@ -12437,7 +12437,7 @@
           <a:p>
             <a:fld id="{22885039-54E1-425C-BA26-26C83A74E520}" type="datetimeFigureOut">
               <a:rPr kumimoji="1" lang="ja-JP" altLang="en-US" smtClean="0"/>
-              <a:t>2026/9/8</a:t>
+              <a:t>2026/9/9</a:t>
             </a:fld>
             <a:endParaRPr kumimoji="1" lang="ja-JP" altLang="en-US"/>
           </a:p>
@@ -12766,7 +12766,7 @@
           <a:p>
             <a:fld id="{22885039-54E1-425C-BA26-26C83A74E520}" type="datetimeFigureOut">
               <a:rPr kumimoji="1" lang="ja-JP" altLang="en-US" smtClean="0"/>
-              <a:t>2026/9/8</a:t>
+              <a:t>2026/9/9</a:t>
             </a:fld>
             <a:endParaRPr kumimoji="1" lang="ja-JP" altLang="en-US"/>
           </a:p>
@@ -13109,7 +13109,7 @@
           <a:p>
             <a:fld id="{22885039-54E1-425C-BA26-26C83A74E520}" type="datetimeFigureOut">
               <a:rPr kumimoji="1" lang="ja-JP" altLang="en-US" smtClean="0"/>
-              <a:t>2026/9/8</a:t>
+              <a:t>2026/9/9</a:t>
             </a:fld>
             <a:endParaRPr kumimoji="1" lang="ja-JP" altLang="en-US"/>
           </a:p>
@@ -13397,7 +13397,7 @@
           <a:p>
             <a:fld id="{22885039-54E1-425C-BA26-26C83A74E520}" type="datetimeFigureOut">
               <a:rPr kumimoji="1" lang="ja-JP" altLang="en-US" smtClean="0"/>
-              <a:t>2026/9/8</a:t>
+              <a:t>2026/9/9</a:t>
             </a:fld>
             <a:endParaRPr kumimoji="1" lang="ja-JP" altLang="en-US"/>
           </a:p>
@@ -13627,7 +13627,7 @@
           <a:p>
             <a:fld id="{22885039-54E1-425C-BA26-26C83A74E520}" type="datetimeFigureOut">
               <a:rPr kumimoji="1" lang="ja-JP" altLang="en-US" smtClean="0"/>
-              <a:t>2026/9/8</a:t>
+              <a:t>2026/9/9</a:t>
             </a:fld>
             <a:endParaRPr kumimoji="1" lang="ja-JP" altLang="en-US"/>
           </a:p>
@@ -13867,7 +13867,7 @@
           <a:p>
             <a:fld id="{22885039-54E1-425C-BA26-26C83A74E520}" type="datetimeFigureOut">
               <a:rPr kumimoji="1" lang="ja-JP" altLang="en-US" smtClean="0"/>
-              <a:t>2026/9/8</a:t>
+              <a:t>2026/9/9</a:t>
             </a:fld>
             <a:endParaRPr kumimoji="1" lang="ja-JP" altLang="en-US"/>
           </a:p>
@@ -17727,7 +17727,7 @@
           <a:p>
             <a:fld id="{22885039-54E1-425C-BA26-26C83A74E520}" type="datetimeFigureOut">
               <a:rPr kumimoji="1" lang="ja-JP" altLang="en-US" smtClean="0"/>
-              <a:t>2026/9/8</a:t>
+              <a:t>2026/9/9</a:t>
             </a:fld>
             <a:endParaRPr kumimoji="1" lang="ja-JP" altLang="en-US"/>
           </a:p>
@@ -18643,7 +18643,7 @@
           <a:p>
             <a:fld id="{22885039-54E1-425C-BA26-26C83A74E520}" type="datetimeFigureOut">
               <a:rPr kumimoji="1" lang="ja-JP" altLang="en-US" smtClean="0"/>
-              <a:t>2026/9/8</a:t>
+              <a:t>2026/9/9</a:t>
             </a:fld>
             <a:endParaRPr kumimoji="1" lang="ja-JP" altLang="en-US"/>
           </a:p>
@@ -18993,7 +18993,7 @@
           <a:p>
             <a:fld id="{22885039-54E1-425C-BA26-26C83A74E520}" type="datetimeFigureOut">
               <a:rPr kumimoji="1" lang="ja-JP" altLang="en-US" smtClean="0"/>
-              <a:t>2026/9/8</a:t>
+              <a:t>2026/9/9</a:t>
             </a:fld>
             <a:endParaRPr kumimoji="1" lang="ja-JP" altLang="en-US"/>
           </a:p>
@@ -19322,7 +19322,7 @@
           <a:p>
             <a:fld id="{22885039-54E1-425C-BA26-26C83A74E520}" type="datetimeFigureOut">
               <a:rPr kumimoji="1" lang="ja-JP" altLang="en-US" smtClean="0"/>
-              <a:t>2026/9/8</a:t>
+              <a:t>2026/9/9</a:t>
             </a:fld>
             <a:endParaRPr kumimoji="1" lang="ja-JP" altLang="en-US"/>
           </a:p>
@@ -19463,7 +19463,7 @@
           <a:p>
             <a:fld id="{22885039-54E1-425C-BA26-26C83A74E520}" type="datetimeFigureOut">
               <a:rPr kumimoji="1" lang="ja-JP" altLang="en-US" smtClean="0"/>
-              <a:t>2026/9/8</a:t>
+              <a:t>2026/9/9</a:t>
             </a:fld>
             <a:endParaRPr kumimoji="1" lang="ja-JP" altLang="en-US"/>
           </a:p>
@@ -19939,7 +19939,7 @@
           <a:p>
             <a:fld id="{22885039-54E1-425C-BA26-26C83A74E520}" type="datetimeFigureOut">
               <a:rPr kumimoji="1" lang="ja-JP" altLang="en-US" smtClean="0"/>
-              <a:t>2026/9/8</a:t>
+              <a:t>2026/9/9</a:t>
             </a:fld>
             <a:endParaRPr kumimoji="1" lang="ja-JP" altLang="en-US"/>
           </a:p>
@@ -20080,7 +20080,7 @@
           <a:p>
             <a:fld id="{22885039-54E1-425C-BA26-26C83A74E520}" type="datetimeFigureOut">
               <a:rPr kumimoji="1" lang="ja-JP" altLang="en-US" smtClean="0"/>
-              <a:t>2026/9/8</a:t>
+              <a:t>2026/9/9</a:t>
             </a:fld>
             <a:endParaRPr kumimoji="1" lang="ja-JP" altLang="en-US"/>
           </a:p>
@@ -20193,7 +20193,7 @@
           <a:p>
             <a:fld id="{22885039-54E1-425C-BA26-26C83A74E520}" type="datetimeFigureOut">
               <a:rPr kumimoji="1" lang="ja-JP" altLang="en-US" smtClean="0"/>
-              <a:t>2026/9/8</a:t>
+              <a:t>2026/9/9</a:t>
             </a:fld>
             <a:endParaRPr kumimoji="1" lang="ja-JP" altLang="en-US"/>
           </a:p>
@@ -20536,7 +20536,7 @@
           <a:p>
             <a:fld id="{22885039-54E1-425C-BA26-26C83A74E520}" type="datetimeFigureOut">
               <a:rPr kumimoji="1" lang="ja-JP" altLang="en-US" smtClean="0"/>
-              <a:t>2026/9/8</a:t>
+              <a:t>2026/9/9</a:t>
             </a:fld>
             <a:endParaRPr kumimoji="1" lang="ja-JP" altLang="en-US"/>
           </a:p>
@@ -20824,7 +20824,7 @@
           <a:p>
             <a:fld id="{22885039-54E1-425C-BA26-26C83A74E520}" type="datetimeFigureOut">
               <a:rPr kumimoji="1" lang="ja-JP" altLang="en-US" smtClean="0"/>
-              <a:t>2026/9/8</a:t>
+              <a:t>2026/9/9</a:t>
             </a:fld>
             <a:endParaRPr kumimoji="1" lang="ja-JP" altLang="en-US"/>
           </a:p>
@@ -21054,7 +21054,7 @@
           <a:p>
             <a:fld id="{22885039-54E1-425C-BA26-26C83A74E520}" type="datetimeFigureOut">
               <a:rPr kumimoji="1" lang="ja-JP" altLang="en-US" smtClean="0"/>
-              <a:t>2026/9/8</a:t>
+              <a:t>2026/9/9</a:t>
             </a:fld>
             <a:endParaRPr kumimoji="1" lang="ja-JP" altLang="en-US"/>
           </a:p>
@@ -21294,7 +21294,7 @@
           <a:p>
             <a:fld id="{22885039-54E1-425C-BA26-26C83A74E520}" type="datetimeFigureOut">
               <a:rPr kumimoji="1" lang="ja-JP" altLang="en-US" smtClean="0"/>
-              <a:t>2026/9/8</a:t>
+              <a:t>2026/9/9</a:t>
             </a:fld>
             <a:endParaRPr kumimoji="1" lang="ja-JP" altLang="en-US"/>
           </a:p>
@@ -23771,7 +23771,7 @@
           <a:p>
             <a:fld id="{22885039-54E1-425C-BA26-26C83A74E520}" type="datetimeFigureOut">
               <a:rPr kumimoji="1" lang="ja-JP" altLang="en-US" smtClean="0"/>
-              <a:t>2026/9/8</a:t>
+              <a:t>2026/9/9</a:t>
             </a:fld>
             <a:endParaRPr kumimoji="1" lang="ja-JP" altLang="en-US"/>
           </a:p>
@@ -25714,7 +25714,7 @@
           <a:p>
             <a:fld id="{22885039-54E1-425C-BA26-26C83A74E520}" type="datetimeFigureOut">
               <a:rPr kumimoji="1" lang="ja-JP" altLang="en-US" smtClean="0"/>
-              <a:t>2026/9/8</a:t>
+              <a:t>2026/9/9</a:t>
             </a:fld>
             <a:endParaRPr kumimoji="1" lang="ja-JP" altLang="en-US"/>
           </a:p>
@@ -26002,7 +26002,7 @@
           <a:p>
             <a:fld id="{22885039-54E1-425C-BA26-26C83A74E520}" type="datetimeFigureOut">
               <a:rPr kumimoji="1" lang="ja-JP" altLang="en-US" smtClean="0"/>
-              <a:t>2026/9/8</a:t>
+              <a:t>2026/9/9</a:t>
             </a:fld>
             <a:endParaRPr kumimoji="1" lang="ja-JP" altLang="en-US"/>
           </a:p>
@@ -26275,7 +26275,7 @@
           <a:p>
             <a:fld id="{22885039-54E1-425C-BA26-26C83A74E520}" type="datetimeFigureOut">
               <a:rPr kumimoji="1" lang="ja-JP" altLang="en-US" smtClean="0"/>
-              <a:t>2026/9/8</a:t>
+              <a:t>2026/9/9</a:t>
             </a:fld>
             <a:endParaRPr kumimoji="1" lang="ja-JP" altLang="en-US"/>
           </a:p>
@@ -26875,7 +26875,7 @@
           <a:p>
             <a:fld id="{22885039-54E1-425C-BA26-26C83A74E520}" type="datetimeFigureOut">
               <a:rPr kumimoji="1" lang="ja-JP" altLang="en-US" smtClean="0"/>
-              <a:t>2026/9/8</a:t>
+              <a:t>2026/9/9</a:t>
             </a:fld>
             <a:endParaRPr kumimoji="1" lang="ja-JP" altLang="en-US"/>
           </a:p>
@@ -27485,7 +27485,7 @@
           <a:p>
             <a:fld id="{22885039-54E1-425C-BA26-26C83A74E520}" type="datetimeFigureOut">
               <a:rPr kumimoji="1" lang="ja-JP" altLang="en-US" smtClean="0"/>
-              <a:t>2026/9/8</a:t>
+              <a:t>2026/9/9</a:t>
             </a:fld>
             <a:endParaRPr kumimoji="1" lang="ja-JP" altLang="en-US"/>
           </a:p>
@@ -28097,7 +28097,7 @@
           <a:p>
             <a:fld id="{22885039-54E1-425C-BA26-26C83A74E520}" type="datetimeFigureOut">
               <a:rPr kumimoji="1" lang="ja-JP" altLang="en-US" smtClean="0"/>
-              <a:t>2026/9/8</a:t>
+              <a:t>2026/9/9</a:t>
             </a:fld>
             <a:endParaRPr kumimoji="1" lang="ja-JP" altLang="en-US"/>
           </a:p>
@@ -28553,147 +28553,77 @@
         </p:nvGrpSpPr>
         <p:grpSpPr>
           <a:xfrm>
-            <a:off x="5107746" y="4363957"/>
-            <a:ext cx="3526788" cy="1425109"/>
-            <a:chOff x="4147736" y="3758370"/>
-            <a:chExt cx="3526788" cy="1425109"/>
+            <a:off x="5107746" y="4645599"/>
+            <a:ext cx="3489718" cy="1143467"/>
+            <a:chOff x="4147736" y="4040012"/>
+            <a:chExt cx="3489718" cy="1143467"/>
           </a:xfrm>
         </p:grpSpPr>
-        <p:grpSp>
-          <p:nvGrpSpPr>
-            <p:cNvPr id="5" name="グループ化 4">
+        <p:sp>
+          <p:nvSpPr>
+            <p:cNvPr id="6" name="テキスト ボックス 5">
               <a:extLst>
                 <a:ext uri="{FF2B5EF4-FFF2-40B4-BE49-F238E27FC236}">
-                  <a16:creationId xmlns:a16="http://schemas.microsoft.com/office/drawing/2014/main" id="{351723C8-6BF6-9A85-D395-C7BC16C4676B}"/>
+                  <a16:creationId xmlns:a16="http://schemas.microsoft.com/office/drawing/2014/main" id="{65779860-AFF5-1EAA-2913-DE7E0A586CB0}"/>
                 </a:ext>
               </a:extLst>
             </p:cNvPr>
-            <p:cNvGrpSpPr/>
+            <p:cNvSpPr txBox="1"/>
             <p:nvPr/>
-          </p:nvGrpSpPr>
-          <p:grpSpPr>
+          </p:nvSpPr>
+          <p:spPr>
             <a:xfrm>
-              <a:off x="4147736" y="3758370"/>
-              <a:ext cx="3526788" cy="789261"/>
-              <a:chOff x="3577596" y="3867590"/>
-              <a:chExt cx="3526788" cy="789261"/>
+              <a:off x="4147736" y="4040012"/>
+              <a:ext cx="3043640" cy="507619"/>
             </a:xfrm>
-          </p:grpSpPr>
-          <p:sp>
-            <p:nvSpPr>
-              <p:cNvPr id="6" name="テキスト ボックス 5">
-                <a:extLst>
-                  <a:ext uri="{FF2B5EF4-FFF2-40B4-BE49-F238E27FC236}">
-                    <a16:creationId xmlns:a16="http://schemas.microsoft.com/office/drawing/2014/main" id="{65779860-AFF5-1EAA-2913-DE7E0A586CB0}"/>
-                  </a:ext>
-                </a:extLst>
-              </p:cNvPr>
-              <p:cNvSpPr txBox="1"/>
-              <p:nvPr/>
-            </p:nvSpPr>
-            <p:spPr>
-              <a:xfrm>
-                <a:off x="3577596" y="4149232"/>
-                <a:ext cx="3043640" cy="507619"/>
-              </a:xfrm>
-              <a:prstGeom prst="rect">
-                <a:avLst/>
-              </a:prstGeom>
+            <a:prstGeom prst="rect">
+              <a:avLst/>
+            </a:prstGeom>
+            <a:noFill/>
+            <a:ln w="25400" cap="flat">
               <a:noFill/>
-              <a:ln w="25400" cap="flat">
-                <a:noFill/>
-                <a:miter lim="400000"/>
-              </a:ln>
-              <a:effectLst/>
-              <a:sp3d/>
-            </p:spPr>
-            <p:style>
-              <a:lnRef idx="0">
-                <a:scrgbClr r="0" g="0" b="0"/>
-              </a:lnRef>
-              <a:fillRef idx="0">
-                <a:scrgbClr r="0" g="0" b="0"/>
-              </a:fillRef>
-              <a:effectRef idx="0">
-                <a:scrgbClr r="0" g="0" b="0"/>
-              </a:effectRef>
-              <a:fontRef idx="none"/>
-            </p:style>
-            <p:txBody>
-              <a:bodyPr rot="0" spcFirstLastPara="1" vertOverflow="overflow" horzOverflow="overflow" vert="horz" wrap="square" lIns="83715" tIns="83715" rIns="83715" bIns="83715" numCol="1" spcCol="38100" rtlCol="0" anchor="ctr">
-                <a:spAutoFit/>
-              </a:bodyPr>
-              <a:lstStyle/>
-              <a:p>
-                <a:pPr marL="0" marR="0" lvl="0" indent="66714" algn="l" defTabSz="438410" rtl="0" eaLnBrk="1" fontAlgn="auto" latinLnBrk="0" hangingPunct="0">
-                  <a:lnSpc>
-                    <a:spcPct val="100000"/>
-                  </a:lnSpc>
-                  <a:spcBef>
-                    <a:spcPts val="0"/>
-                  </a:spcBef>
-                  <a:spcAft>
-                    <a:spcPts val="0"/>
-                  </a:spcAft>
-                  <a:buClrTx/>
-                  <a:buSzTx/>
-                  <a:buFontTx/>
-                  <a:buNone/>
-                  <a:tabLst/>
-                  <a:defRPr/>
-                </a:pPr>
-                <a:r>
-                  <a:rPr kumimoji="1" lang="ja-JP" altLang="en-US" sz="2200" b="1" i="0" u="none" strike="noStrike" kern="1200" cap="none" spc="0" normalizeH="0" baseline="0" noProof="0">
-                    <a:ln>
-                      <a:noFill/>
-                    </a:ln>
-                    <a:solidFill>
-                      <a:srgbClr val="FFC000"/>
-                    </a:solidFill>
-                    <a:effectLst/>
-                    <a:uLnTx/>
-                    <a:uFillTx/>
-                    <a:latin typeface="源ノ角ゴシック JP" panose="020B0500000000000000" pitchFamily="34" charset="-128"/>
-                    <a:ea typeface="源ノ角ゴシック JP" panose="020B0500000000000000" pitchFamily="34" charset="-128"/>
-                    <a:cs typeface="+mn-cs"/>
-                  </a:rPr>
-                  <a:t>関</a:t>
-                </a:r>
-                <a:r>
-                  <a:rPr kumimoji="1" lang="en-US" altLang="ja-JP" sz="2200" b="1" i="0" u="none" strike="noStrike" kern="1200" cap="none" spc="0" normalizeH="0" baseline="0" noProof="0" dirty="0">
-                    <a:ln>
-                      <a:noFill/>
-                    </a:ln>
-                    <a:solidFill>
-                      <a:srgbClr val="FFC000"/>
-                    </a:solidFill>
-                    <a:effectLst/>
-                    <a:uLnTx/>
-                    <a:uFillTx/>
-                    <a:latin typeface="源ノ角ゴシック JP" panose="020B0500000000000000" pitchFamily="34" charset="-128"/>
-                    <a:ea typeface="源ノ角ゴシック JP" panose="020B0500000000000000" pitchFamily="34" charset="-128"/>
-                    <a:cs typeface="+mn-cs"/>
-                  </a:rPr>
-                  <a:t> </a:t>
-                </a:r>
-                <a:r>
-                  <a:rPr kumimoji="1" lang="ja-JP" altLang="en-US" sz="2200" b="1" i="0" u="none" strike="noStrike" kern="1200" cap="none" spc="0" normalizeH="0" baseline="0" noProof="0">
-                    <a:ln>
-                      <a:noFill/>
-                    </a:ln>
-                    <a:solidFill>
-                      <a:srgbClr val="FFC000"/>
-                    </a:solidFill>
-                    <a:effectLst/>
-                    <a:uLnTx/>
-                    <a:uFillTx/>
-                    <a:latin typeface="源ノ角ゴシック JP" panose="020B0500000000000000" pitchFamily="34" charset="-128"/>
-                    <a:ea typeface="源ノ角ゴシック JP" panose="020B0500000000000000" pitchFamily="34" charset="-128"/>
-                    <a:cs typeface="+mn-cs"/>
-                  </a:rPr>
-                  <a:t>碧生</a:t>
-                </a:r>
-                <a:endParaRPr kumimoji="1" lang="en-US" altLang="ja-JP" sz="2200" b="1" i="0" u="none" strike="noStrike" kern="1200" cap="none" spc="0" normalizeH="0" baseline="30000" noProof="0" dirty="0">
+              <a:miter lim="400000"/>
+            </a:ln>
+            <a:effectLst/>
+            <a:sp3d/>
+          </p:spPr>
+          <p:style>
+            <a:lnRef idx="0">
+              <a:scrgbClr r="0" g="0" b="0"/>
+            </a:lnRef>
+            <a:fillRef idx="0">
+              <a:scrgbClr r="0" g="0" b="0"/>
+            </a:fillRef>
+            <a:effectRef idx="0">
+              <a:scrgbClr r="0" g="0" b="0"/>
+            </a:effectRef>
+            <a:fontRef idx="none"/>
+          </p:style>
+          <p:txBody>
+            <a:bodyPr rot="0" spcFirstLastPara="1" vertOverflow="overflow" horzOverflow="overflow" vert="horz" wrap="square" lIns="83715" tIns="83715" rIns="83715" bIns="83715" numCol="1" spcCol="38100" rtlCol="0" anchor="ctr">
+              <a:spAutoFit/>
+            </a:bodyPr>
+            <a:lstStyle/>
+            <a:p>
+              <a:pPr marL="0" marR="0" lvl="0" indent="66714" algn="l" defTabSz="438410" rtl="0" eaLnBrk="1" fontAlgn="auto" latinLnBrk="0" hangingPunct="0">
+                <a:lnSpc>
+                  <a:spcPct val="100000"/>
+                </a:lnSpc>
+                <a:spcBef>
+                  <a:spcPts val="0"/>
+                </a:spcBef>
+                <a:spcAft>
+                  <a:spcPts val="0"/>
+                </a:spcAft>
+                <a:buClrTx/>
+                <a:buSzTx/>
+                <a:buFontTx/>
+                <a:buNone/>
+                <a:tabLst/>
+                <a:defRPr/>
+              </a:pPr>
+              <a:r>
+                <a:rPr kumimoji="1" lang="ja-JP" altLang="en-US" sz="2200" b="1" i="0" u="none" strike="noStrike" kern="1200" cap="none" spc="0" normalizeH="0" baseline="0" noProof="0">
                   <a:ln>
                     <a:noFill/>
                   </a:ln>
@@ -28706,322 +28636,16 @@
                   <a:latin typeface="源ノ角ゴシック JP" panose="020B0500000000000000" pitchFamily="34" charset="-128"/>
                   <a:ea typeface="源ノ角ゴシック JP" panose="020B0500000000000000" pitchFamily="34" charset="-128"/>
                   <a:cs typeface="+mn-cs"/>
-                </a:endParaRPr>
-              </a:p>
-            </p:txBody>
-          </p:sp>
-          <p:sp>
-            <p:nvSpPr>
-              <p:cNvPr id="2" name="字幕 2">
-                <a:extLst>
-                  <a:ext uri="{FF2B5EF4-FFF2-40B4-BE49-F238E27FC236}">
-                    <a16:creationId xmlns:a16="http://schemas.microsoft.com/office/drawing/2014/main" id="{18E09386-4E20-CDE5-B906-7E75061677C2}"/>
-                  </a:ext>
-                </a:extLst>
-              </p:cNvPr>
-              <p:cNvSpPr txBox="1">
-                <a:spLocks/>
-              </p:cNvSpPr>
-              <p:nvPr/>
-            </p:nvSpPr>
-            <p:spPr>
-              <a:xfrm>
-                <a:off x="3634937" y="3867590"/>
-                <a:ext cx="3469447" cy="281642"/>
-              </a:xfrm>
-              <a:prstGeom prst="rect">
-                <a:avLst/>
-              </a:prstGeom>
-            </p:spPr>
-            <p:txBody>
-              <a:bodyPr vert="horz" lIns="91440" tIns="45720" rIns="91440" bIns="45720" rtlCol="0">
-                <a:noAutofit/>
-              </a:bodyPr>
-              <a:lstStyle>
-                <a:lvl1pPr marL="0" indent="0" algn="ctr" defTabSz="685800" rtl="0" eaLnBrk="1" latinLnBrk="0" hangingPunct="1">
-                  <a:lnSpc>
-                    <a:spcPct val="90000"/>
-                  </a:lnSpc>
-                  <a:spcBef>
-                    <a:spcPts val="750"/>
-                  </a:spcBef>
-                  <a:buFont typeface="Arial" panose="020B0604020202020204" pitchFamily="34" charset="0"/>
-                  <a:buNone/>
-                  <a:defRPr kumimoji="1" sz="1800" kern="1200">
-                    <a:solidFill>
-                      <a:schemeClr val="tx1"/>
-                    </a:solidFill>
-                    <a:latin typeface="+mn-lt"/>
-                    <a:ea typeface="+mn-ea"/>
-                    <a:cs typeface="+mn-cs"/>
-                  </a:defRPr>
-                </a:lvl1pPr>
-                <a:lvl2pPr marL="342900" indent="0" algn="ctr" defTabSz="685800" rtl="0" eaLnBrk="1" latinLnBrk="0" hangingPunct="1">
-                  <a:lnSpc>
-                    <a:spcPct val="90000"/>
-                  </a:lnSpc>
-                  <a:spcBef>
-                    <a:spcPts val="375"/>
-                  </a:spcBef>
-                  <a:buFont typeface="Arial" panose="020B0604020202020204" pitchFamily="34" charset="0"/>
-                  <a:buNone/>
-                  <a:defRPr kumimoji="1" sz="1500" kern="1200">
-                    <a:solidFill>
-                      <a:schemeClr val="tx1"/>
-                    </a:solidFill>
-                    <a:latin typeface="+mn-lt"/>
-                    <a:ea typeface="+mn-ea"/>
-                    <a:cs typeface="+mn-cs"/>
-                  </a:defRPr>
-                </a:lvl2pPr>
-                <a:lvl3pPr marL="685800" indent="0" algn="ctr" defTabSz="685800" rtl="0" eaLnBrk="1" latinLnBrk="0" hangingPunct="1">
-                  <a:lnSpc>
-                    <a:spcPct val="90000"/>
-                  </a:lnSpc>
-                  <a:spcBef>
-                    <a:spcPts val="375"/>
-                  </a:spcBef>
-                  <a:buFont typeface="Arial" panose="020B0604020202020204" pitchFamily="34" charset="0"/>
-                  <a:buNone/>
-                  <a:defRPr kumimoji="1" sz="1350" kern="1200">
-                    <a:solidFill>
-                      <a:schemeClr val="tx1"/>
-                    </a:solidFill>
-                    <a:latin typeface="+mn-lt"/>
-                    <a:ea typeface="+mn-ea"/>
-                    <a:cs typeface="+mn-cs"/>
-                  </a:defRPr>
-                </a:lvl3pPr>
-                <a:lvl4pPr marL="1028700" indent="0" algn="ctr" defTabSz="685800" rtl="0" eaLnBrk="1" latinLnBrk="0" hangingPunct="1">
-                  <a:lnSpc>
-                    <a:spcPct val="90000"/>
-                  </a:lnSpc>
-                  <a:spcBef>
-                    <a:spcPts val="375"/>
-                  </a:spcBef>
-                  <a:buFont typeface="Arial" panose="020B0604020202020204" pitchFamily="34" charset="0"/>
-                  <a:buNone/>
-                  <a:defRPr kumimoji="1" sz="1200" kern="1200">
-                    <a:solidFill>
-                      <a:schemeClr val="tx1"/>
-                    </a:solidFill>
-                    <a:latin typeface="+mn-lt"/>
-                    <a:ea typeface="+mn-ea"/>
-                    <a:cs typeface="+mn-cs"/>
-                  </a:defRPr>
-                </a:lvl4pPr>
-                <a:lvl5pPr marL="1371600" indent="0" algn="ctr" defTabSz="685800" rtl="0" eaLnBrk="1" latinLnBrk="0" hangingPunct="1">
-                  <a:lnSpc>
-                    <a:spcPct val="90000"/>
-                  </a:lnSpc>
-                  <a:spcBef>
-                    <a:spcPts val="375"/>
-                  </a:spcBef>
-                  <a:buFont typeface="Arial" panose="020B0604020202020204" pitchFamily="34" charset="0"/>
-                  <a:buNone/>
-                  <a:defRPr kumimoji="1" sz="1200" kern="1200">
-                    <a:solidFill>
-                      <a:schemeClr val="tx1"/>
-                    </a:solidFill>
-                    <a:latin typeface="+mn-lt"/>
-                    <a:ea typeface="+mn-ea"/>
-                    <a:cs typeface="+mn-cs"/>
-                  </a:defRPr>
-                </a:lvl5pPr>
-                <a:lvl6pPr marL="1714500" indent="0" algn="ctr" defTabSz="685800" rtl="0" eaLnBrk="1" latinLnBrk="0" hangingPunct="1">
-                  <a:lnSpc>
-                    <a:spcPct val="90000"/>
-                  </a:lnSpc>
-                  <a:spcBef>
-                    <a:spcPts val="375"/>
-                  </a:spcBef>
-                  <a:buFont typeface="Arial" panose="020B0604020202020204" pitchFamily="34" charset="0"/>
-                  <a:buNone/>
-                  <a:defRPr kumimoji="1" sz="1200" kern="1200">
-                    <a:solidFill>
-                      <a:schemeClr val="tx1"/>
-                    </a:solidFill>
-                    <a:latin typeface="+mn-lt"/>
-                    <a:ea typeface="+mn-ea"/>
-                    <a:cs typeface="+mn-cs"/>
-                  </a:defRPr>
-                </a:lvl6pPr>
-                <a:lvl7pPr marL="2057400" indent="0" algn="ctr" defTabSz="685800" rtl="0" eaLnBrk="1" latinLnBrk="0" hangingPunct="1">
-                  <a:lnSpc>
-                    <a:spcPct val="90000"/>
-                  </a:lnSpc>
-                  <a:spcBef>
-                    <a:spcPts val="375"/>
-                  </a:spcBef>
-                  <a:buFont typeface="Arial" panose="020B0604020202020204" pitchFamily="34" charset="0"/>
-                  <a:buNone/>
-                  <a:defRPr kumimoji="1" sz="1200" kern="1200">
-                    <a:solidFill>
-                      <a:schemeClr val="tx1"/>
-                    </a:solidFill>
-                    <a:latin typeface="+mn-lt"/>
-                    <a:ea typeface="+mn-ea"/>
-                    <a:cs typeface="+mn-cs"/>
-                  </a:defRPr>
-                </a:lvl7pPr>
-                <a:lvl8pPr marL="2400300" indent="0" algn="ctr" defTabSz="685800" rtl="0" eaLnBrk="1" latinLnBrk="0" hangingPunct="1">
-                  <a:lnSpc>
-                    <a:spcPct val="90000"/>
-                  </a:lnSpc>
-                  <a:spcBef>
-                    <a:spcPts val="375"/>
-                  </a:spcBef>
-                  <a:buFont typeface="Arial" panose="020B0604020202020204" pitchFamily="34" charset="0"/>
-                  <a:buNone/>
-                  <a:defRPr kumimoji="1" sz="1200" kern="1200">
-                    <a:solidFill>
-                      <a:schemeClr val="tx1"/>
-                    </a:solidFill>
-                    <a:latin typeface="+mn-lt"/>
-                    <a:ea typeface="+mn-ea"/>
-                    <a:cs typeface="+mn-cs"/>
-                  </a:defRPr>
-                </a:lvl8pPr>
-                <a:lvl9pPr marL="2743200" indent="0" algn="ctr" defTabSz="685800" rtl="0" eaLnBrk="1" latinLnBrk="0" hangingPunct="1">
-                  <a:lnSpc>
-                    <a:spcPct val="90000"/>
-                  </a:lnSpc>
-                  <a:spcBef>
-                    <a:spcPts val="375"/>
-                  </a:spcBef>
-                  <a:buFont typeface="Arial" panose="020B0604020202020204" pitchFamily="34" charset="0"/>
-                  <a:buNone/>
-                  <a:defRPr kumimoji="1" sz="1200" kern="1200">
-                    <a:solidFill>
-                      <a:schemeClr val="tx1"/>
-                    </a:solidFill>
-                    <a:latin typeface="+mn-lt"/>
-                    <a:ea typeface="+mn-ea"/>
-                    <a:cs typeface="+mn-cs"/>
-                  </a:defRPr>
-                </a:lvl9pPr>
-              </a:lstStyle>
-              <a:p>
-                <a:pPr marL="0" marR="0" lvl="0" indent="0" algn="l" defTabSz="685800" rtl="0" eaLnBrk="1" fontAlgn="auto" latinLnBrk="0" hangingPunct="1">
-                  <a:lnSpc>
-                    <a:spcPts val="1400"/>
-                  </a:lnSpc>
-                  <a:spcBef>
-                    <a:spcPts val="750"/>
-                  </a:spcBef>
-                  <a:spcAft>
-                    <a:spcPts val="0"/>
-                  </a:spcAft>
-                  <a:buClrTx/>
-                  <a:buSzTx/>
-                  <a:buFont typeface="Arial" panose="020B0604020202020204" pitchFamily="34" charset="0"/>
-                  <a:buNone/>
-                  <a:tabLst/>
-                  <a:defRPr/>
-                </a:pPr>
-                <a:r>
-                  <a:rPr kumimoji="1" lang="ja-JP" altLang="en-US" sz="1600" b="0" i="0" u="none" strike="noStrike" kern="1200" cap="none" spc="20" normalizeH="0" baseline="0" noProof="0">
-                    <a:ln>
-                      <a:noFill/>
-                    </a:ln>
-                    <a:solidFill>
-                      <a:prstClr val="white">
-                        <a:lumMod val="95000"/>
-                      </a:prstClr>
-                    </a:solidFill>
-                    <a:effectLst/>
-                    <a:uLnTx/>
-                    <a:uFillTx/>
-                    <a:latin typeface="源ノ角ゴシック JP" panose="020B0500000000000000" pitchFamily="34" charset="-128"/>
-                    <a:ea typeface="源ノ角ゴシック JP" panose="020B0500000000000000" pitchFamily="34" charset="-128"/>
-                    <a:cs typeface="+mn-cs"/>
-                  </a:rPr>
-                  <a:t>政策・メディア研究科</a:t>
-                </a:r>
-                <a:r>
-                  <a:rPr kumimoji="1" lang="en-US" altLang="ja-JP" sz="1600" b="0" i="0" u="none" strike="noStrike" kern="1200" cap="none" spc="20" normalizeH="0" baseline="0" noProof="0" dirty="0">
-                    <a:ln>
-                      <a:noFill/>
-                    </a:ln>
-                    <a:solidFill>
-                      <a:prstClr val="white">
-                        <a:lumMod val="95000"/>
-                      </a:prstClr>
-                    </a:solidFill>
-                    <a:effectLst/>
-                    <a:uLnTx/>
-                    <a:uFillTx/>
-                    <a:latin typeface="源ノ角ゴシック JP" panose="020B0500000000000000" pitchFamily="34" charset="-128"/>
-                    <a:ea typeface="源ノ角ゴシック JP" panose="020B0500000000000000" pitchFamily="34" charset="-128"/>
-                    <a:cs typeface="+mn-cs"/>
-                  </a:rPr>
-                  <a:t> </a:t>
-                </a:r>
-                <a:r>
-                  <a:rPr kumimoji="1" lang="ja-JP" altLang="en-US" sz="1600" b="0" i="0" u="none" strike="noStrike" kern="1200" cap="none" spc="20" normalizeH="0" baseline="0" noProof="0">
-                    <a:ln>
-                      <a:noFill/>
-                    </a:ln>
-                    <a:solidFill>
-                      <a:prstClr val="white">
-                        <a:lumMod val="95000"/>
-                      </a:prstClr>
-                    </a:solidFill>
-                    <a:effectLst/>
-                    <a:uLnTx/>
-                    <a:uFillTx/>
-                    <a:latin typeface="源ノ角ゴシック JP" panose="020B0500000000000000" pitchFamily="34" charset="-128"/>
-                    <a:ea typeface="源ノ角ゴシック JP" panose="020B0500000000000000" pitchFamily="34" charset="-128"/>
-                    <a:cs typeface="+mn-cs"/>
-                  </a:rPr>
-                  <a:t>修士課程</a:t>
-                </a:r>
-                <a:r>
-                  <a:rPr kumimoji="1" lang="en-US" altLang="ja-JP" sz="1600" b="0" i="0" u="none" strike="noStrike" kern="1200" cap="none" spc="20" normalizeH="0" baseline="0" noProof="0" dirty="0">
-                    <a:ln>
-                      <a:noFill/>
-                    </a:ln>
-                    <a:solidFill>
-                      <a:prstClr val="white">
-                        <a:lumMod val="95000"/>
-                      </a:prstClr>
-                    </a:solidFill>
-                    <a:effectLst/>
-                    <a:uLnTx/>
-                    <a:uFillTx/>
-                    <a:latin typeface="源ノ角ゴシック JP" panose="020B0500000000000000" pitchFamily="34" charset="-128"/>
-                    <a:ea typeface="源ノ角ゴシック JP" panose="020B0500000000000000" pitchFamily="34" charset="-128"/>
-                    <a:cs typeface="+mn-cs"/>
-                  </a:rPr>
-                  <a:t>1</a:t>
-                </a:r>
-                <a:r>
-                  <a:rPr kumimoji="1" lang="ja-JP" altLang="en-US" sz="1600" b="0" i="0" u="none" strike="noStrike" kern="1200" cap="none" spc="20" normalizeH="0" baseline="0" noProof="0">
-                    <a:ln>
-                      <a:noFill/>
-                    </a:ln>
-                    <a:solidFill>
-                      <a:prstClr val="white">
-                        <a:lumMod val="95000"/>
-                      </a:prstClr>
-                    </a:solidFill>
-                    <a:effectLst/>
-                    <a:uLnTx/>
-                    <a:uFillTx/>
-                    <a:latin typeface="源ノ角ゴシック JP" panose="020B0500000000000000" pitchFamily="34" charset="-128"/>
-                    <a:ea typeface="源ノ角ゴシック JP" panose="020B0500000000000000" pitchFamily="34" charset="-128"/>
-                    <a:cs typeface="+mn-cs"/>
-                  </a:rPr>
-                  <a:t>年</a:t>
-                </a:r>
-                <a:endParaRPr kumimoji="1" lang="en-US" altLang="ja-JP" sz="1600" b="0" i="0" u="none" strike="noStrike" kern="1200" cap="none" spc="20" normalizeH="0" baseline="0" noProof="0" dirty="0">
+                </a:rPr>
+                <a:t>関</a:t>
+              </a:r>
+              <a:r>
+                <a:rPr kumimoji="1" lang="en-US" altLang="ja-JP" sz="2200" b="1" i="0" u="none" strike="noStrike" kern="1200" cap="none" spc="0" normalizeH="0" baseline="0" noProof="0" dirty="0">
                   <a:ln>
                     <a:noFill/>
                   </a:ln>
                   <a:solidFill>
-                    <a:prstClr val="white">
-                      <a:lumMod val="95000"/>
-                    </a:prstClr>
+                    <a:srgbClr val="FFC000"/>
                   </a:solidFill>
                   <a:effectLst/>
                   <a:uLnTx/>
@@ -29029,11 +28653,43 @@
                   <a:latin typeface="源ノ角ゴシック JP" panose="020B0500000000000000" pitchFamily="34" charset="-128"/>
                   <a:ea typeface="源ノ角ゴシック JP" panose="020B0500000000000000" pitchFamily="34" charset="-128"/>
                   <a:cs typeface="+mn-cs"/>
-                </a:endParaRPr>
-              </a:p>
-            </p:txBody>
-          </p:sp>
-        </p:grpSp>
+                </a:rPr>
+                <a:t> </a:t>
+              </a:r>
+              <a:r>
+                <a:rPr kumimoji="1" lang="ja-JP" altLang="en-US" sz="2200" b="1" i="0" u="none" strike="noStrike" kern="1200" cap="none" spc="0" normalizeH="0" baseline="0" noProof="0">
+                  <a:ln>
+                    <a:noFill/>
+                  </a:ln>
+                  <a:solidFill>
+                    <a:srgbClr val="FFC000"/>
+                  </a:solidFill>
+                  <a:effectLst/>
+                  <a:uLnTx/>
+                  <a:uFillTx/>
+                  <a:latin typeface="源ノ角ゴシック JP" panose="020B0500000000000000" pitchFamily="34" charset="-128"/>
+                  <a:ea typeface="源ノ角ゴシック JP" panose="020B0500000000000000" pitchFamily="34" charset="-128"/>
+                  <a:cs typeface="+mn-cs"/>
+                </a:rPr>
+                <a:t>碧生</a:t>
+              </a:r>
+              <a:endParaRPr kumimoji="1" lang="en-US" altLang="ja-JP" sz="2200" b="1" i="0" u="none" strike="noStrike" kern="1200" cap="none" spc="0" normalizeH="0" baseline="30000" noProof="0" dirty="0">
+                <a:ln>
+                  <a:noFill/>
+                </a:ln>
+                <a:solidFill>
+                  <a:srgbClr val="FFC000"/>
+                </a:solidFill>
+                <a:effectLst/>
+                <a:uLnTx/>
+                <a:uFillTx/>
+                <a:latin typeface="源ノ角ゴシック JP" panose="020B0500000000000000" pitchFamily="34" charset="-128"/>
+                <a:ea typeface="源ノ角ゴシック JP" panose="020B0500000000000000" pitchFamily="34" charset="-128"/>
+                <a:cs typeface="+mn-cs"/>
+              </a:endParaRPr>
+            </a:p>
+          </p:txBody>
+        </p:sp>
         <p:sp>
           <p:nvSpPr>
             <p:cNvPr id="7" name="字幕 2">
@@ -29281,6 +28937,174 @@
   <p:cSld>
     <p:spTree>
       <p:nvGrpSpPr>
+        <p:cNvPr id="1" name=""/>
+        <p:cNvGrpSpPr/>
+        <p:nvPr/>
+      </p:nvGrpSpPr>
+      <p:grpSpPr>
+        <a:xfrm>
+          <a:off x="0" y="0"/>
+          <a:ext cx="0" cy="0"/>
+          <a:chOff x="0" y="0"/>
+          <a:chExt cx="0" cy="0"/>
+        </a:xfrm>
+      </p:grpSpPr>
+      <p:pic>
+        <p:nvPicPr>
+          <p:cNvPr id="4" name="図 3">
+            <a:extLst>
+              <a:ext uri="{FF2B5EF4-FFF2-40B4-BE49-F238E27FC236}">
+                <a16:creationId xmlns:a16="http://schemas.microsoft.com/office/drawing/2014/main" id="{0881D93E-3757-4F2B-AF55-F7FDBF70AE93}"/>
+              </a:ext>
+            </a:extLst>
+          </p:cNvPr>
+          <p:cNvPicPr>
+            <a:picLocks noChangeAspect="1"/>
+          </p:cNvPicPr>
+          <p:nvPr/>
+        </p:nvPicPr>
+        <p:blipFill>
+          <a:blip r:embed="rId2"/>
+          <a:srcRect l="3314" t="8333" r="4739" b="8867"/>
+          <a:stretch>
+            <a:fillRect/>
+          </a:stretch>
+        </p:blipFill>
+        <p:spPr>
+          <a:xfrm>
+            <a:off x="1633218" y="3772504"/>
+            <a:ext cx="5877563" cy="1923642"/>
+          </a:xfrm>
+          <a:prstGeom prst="rect">
+            <a:avLst/>
+          </a:prstGeom>
+        </p:spPr>
+      </p:pic>
+      <p:pic>
+        <p:nvPicPr>
+          <p:cNvPr id="2" name="図 1">
+            <a:extLst>
+              <a:ext uri="{FF2B5EF4-FFF2-40B4-BE49-F238E27FC236}">
+                <a16:creationId xmlns:a16="http://schemas.microsoft.com/office/drawing/2014/main" id="{415C3958-EDE6-296A-2F93-48453C942DE7}"/>
+              </a:ext>
+            </a:extLst>
+          </p:cNvPr>
+          <p:cNvPicPr>
+            <a:picLocks noChangeAspect="1"/>
+          </p:cNvPicPr>
+          <p:nvPr/>
+        </p:nvPicPr>
+        <p:blipFill>
+          <a:blip r:embed="rId3"/>
+          <a:srcRect l="3114" t="5700" r="2849" b="7143"/>
+          <a:stretch>
+            <a:fillRect/>
+          </a:stretch>
+        </p:blipFill>
+        <p:spPr>
+          <a:xfrm>
+            <a:off x="1616018" y="1474404"/>
+            <a:ext cx="4215740" cy="1793175"/>
+          </a:xfrm>
+          <a:prstGeom prst="rect">
+            <a:avLst/>
+          </a:prstGeom>
+        </p:spPr>
+      </p:pic>
+      <p:sp>
+        <p:nvSpPr>
+          <p:cNvPr id="3" name="テキスト ボックス 2">
+            <a:extLst>
+              <a:ext uri="{FF2B5EF4-FFF2-40B4-BE49-F238E27FC236}">
+                <a16:creationId xmlns:a16="http://schemas.microsoft.com/office/drawing/2014/main" id="{0CCC257C-F64F-53C7-2FF8-8F1AA2A54B5D}"/>
+              </a:ext>
+            </a:extLst>
+          </p:cNvPr>
+          <p:cNvSpPr txBox="1"/>
+          <p:nvPr/>
+        </p:nvSpPr>
+        <p:spPr>
+          <a:xfrm>
+            <a:off x="269790" y="635799"/>
+            <a:ext cx="3077533" cy="333681"/>
+          </a:xfrm>
+          <a:prstGeom prst="rect">
+            <a:avLst/>
+          </a:prstGeom>
+          <a:noFill/>
+        </p:spPr>
+        <p:txBody>
+          <a:bodyPr wrap="square">
+            <a:spAutoFit/>
+          </a:bodyPr>
+          <a:lstStyle/>
+          <a:p>
+            <a:pPr marL="0" marR="0" lvl="0" indent="0" algn="l" defTabSz="457200" rtl="0" eaLnBrk="1" fontAlgn="auto" latinLnBrk="0" hangingPunct="1">
+              <a:lnSpc>
+                <a:spcPts val="2020"/>
+              </a:lnSpc>
+              <a:spcBef>
+                <a:spcPts val="0"/>
+              </a:spcBef>
+              <a:spcAft>
+                <a:spcPts val="0"/>
+              </a:spcAft>
+              <a:buClrTx/>
+              <a:buSzTx/>
+              <a:buFontTx/>
+              <a:buNone/>
+              <a:tabLst/>
+              <a:defRPr/>
+            </a:pPr>
+            <a:r>
+              <a:rPr kumimoji="1" lang="ja-JP" altLang="en-US" sz="1600" b="1">
+                <a:solidFill>
+                  <a:schemeClr val="bg2">
+                    <a:lumMod val="25000"/>
+                  </a:schemeClr>
+                </a:solidFill>
+                <a:latin typeface="源ノ角ゴシック JP" panose="020B0500000000000000" pitchFamily="34" charset="-128"/>
+                <a:ea typeface="源ノ角ゴシック JP" panose="020B0500000000000000" pitchFamily="34" charset="-128"/>
+              </a:rPr>
+              <a:t>実施量の判定基準</a:t>
+            </a:r>
+            <a:endParaRPr kumimoji="1" lang="en-US" altLang="ja-JP" sz="1600" b="1" i="0" u="none" strike="noStrike" kern="1200" cap="none" spc="0" normalizeH="0" baseline="0" noProof="0" dirty="0">
+              <a:ln>
+                <a:noFill/>
+              </a:ln>
+              <a:solidFill>
+                <a:schemeClr val="bg2">
+                  <a:lumMod val="25000"/>
+                </a:schemeClr>
+              </a:solidFill>
+              <a:effectLst/>
+              <a:uLnTx/>
+              <a:uFillTx/>
+              <a:latin typeface="源ノ角ゴシック JP" panose="020B0500000000000000" pitchFamily="34" charset="-128"/>
+              <a:ea typeface="源ノ角ゴシック JP" panose="020B0500000000000000" pitchFamily="34" charset="-128"/>
+              <a:cs typeface="+mn-cs"/>
+            </a:endParaRPr>
+          </a:p>
+        </p:txBody>
+      </p:sp>
+    </p:spTree>
+    <p:extLst>
+      <p:ext uri="{BB962C8B-B14F-4D97-AF65-F5344CB8AC3E}">
+        <p14:creationId xmlns:p14="http://schemas.microsoft.com/office/powerpoint/2010/main" val="366262587"/>
+      </p:ext>
+    </p:extLst>
+  </p:cSld>
+  <p:clrMapOvr>
+    <a:masterClrMapping/>
+  </p:clrMapOvr>
+</p:sld>
+</file>
+
+<file path=ppt/slides/slide11.xml><?xml version="1.0" encoding="utf-8"?>
+<p:sld xmlns:a="http://schemas.openxmlformats.org/drawingml/2006/main" xmlns:r="http://schemas.openxmlformats.org/officeDocument/2006/relationships" xmlns:p="http://schemas.openxmlformats.org/presentationml/2006/main">
+  <p:cSld>
+    <p:spTree>
+      <p:nvGrpSpPr>
         <p:cNvPr id="1" name="">
           <a:extLst>
             <a:ext uri="{FF2B5EF4-FFF2-40B4-BE49-F238E27FC236}">
@@ -29322,7 +29146,7 @@
         </p:blipFill>
         <p:spPr>
           <a:xfrm>
-            <a:off x="760744" y="1891049"/>
+            <a:off x="877974" y="1996556"/>
             <a:ext cx="5877563" cy="1923642"/>
           </a:xfrm>
           <a:prstGeom prst="rect">
@@ -29332,10 +29156,10 @@
       </p:pic>
       <p:sp>
         <p:nvSpPr>
-          <p:cNvPr id="4" name="テキスト ボックス 3">
+          <p:cNvPr id="3" name="テキスト ボックス 2">
             <a:extLst>
               <a:ext uri="{FF2B5EF4-FFF2-40B4-BE49-F238E27FC236}">
-                <a16:creationId xmlns:a16="http://schemas.microsoft.com/office/drawing/2014/main" id="{059DA1FA-5118-75CA-C357-BD887083E264}"/>
+                <a16:creationId xmlns:a16="http://schemas.microsoft.com/office/drawing/2014/main" id="{C6633AB4-1174-F4C5-8285-C2EDA8FC5B3D}"/>
               </a:ext>
             </a:extLst>
           </p:cNvPr>
@@ -29344,8 +29168,501 @@
         </p:nvSpPr>
         <p:spPr>
           <a:xfrm>
-            <a:off x="89935" y="568886"/>
-            <a:ext cx="8196146" cy="492230"/>
+            <a:off x="652944" y="1376310"/>
+            <a:ext cx="7283821" cy="340221"/>
+          </a:xfrm>
+          <a:prstGeom prst="rect">
+            <a:avLst/>
+          </a:prstGeom>
+          <a:noFill/>
+        </p:spPr>
+        <p:txBody>
+          <a:bodyPr wrap="square">
+            <a:spAutoFit/>
+          </a:bodyPr>
+          <a:lstStyle/>
+          <a:p>
+            <a:pPr marL="0" marR="0" lvl="0" indent="0" algn="l" defTabSz="457200" rtl="0" eaLnBrk="1" fontAlgn="auto" latinLnBrk="0" hangingPunct="1">
+              <a:lnSpc>
+                <a:spcPts val="2080"/>
+              </a:lnSpc>
+              <a:spcBef>
+                <a:spcPts val="0"/>
+              </a:spcBef>
+              <a:spcAft>
+                <a:spcPts val="0"/>
+              </a:spcAft>
+              <a:buClrTx/>
+              <a:buSzTx/>
+              <a:buFontTx/>
+              <a:buNone/>
+              <a:tabLst/>
+              <a:defRPr/>
+            </a:pPr>
+            <a:r>
+              <a:rPr kumimoji="1" lang="ja-JP" altLang="en-US" sz="1500">
+                <a:solidFill>
+                  <a:srgbClr val="DCD8DC">
+                    <a:lumMod val="25000"/>
+                  </a:srgbClr>
+                </a:solidFill>
+                <a:latin typeface="源ノ角ゴシック JP" panose="020B0500000000000000" pitchFamily="34" charset="-128"/>
+                <a:ea typeface="源ノ角ゴシック JP" panose="020B0500000000000000" pitchFamily="34" charset="-128"/>
+              </a:rPr>
+              <a:t>「対応」に該当する商品数に基づき、実施量を（</a:t>
+            </a:r>
+            <a:r>
+              <a:rPr kumimoji="1" lang="en-US" altLang="ja-JP" sz="1500" dirty="0">
+                <a:solidFill>
+                  <a:srgbClr val="DCD8DC">
+                    <a:lumMod val="25000"/>
+                  </a:srgbClr>
+                </a:solidFill>
+                <a:latin typeface="源ノ角ゴシック JP" panose="020B0500000000000000" pitchFamily="34" charset="-128"/>
+                <a:ea typeface="源ノ角ゴシック JP" panose="020B0500000000000000" pitchFamily="34" charset="-128"/>
+              </a:rPr>
+              <a:t> </a:t>
+            </a:r>
+            <a:r>
+              <a:rPr kumimoji="1" lang="ja-JP" altLang="en-US" sz="1500">
+                <a:solidFill>
+                  <a:srgbClr val="DCD8DC">
+                    <a:lumMod val="25000"/>
+                  </a:srgbClr>
+                </a:solidFill>
+                <a:latin typeface="源ノ角ゴシック JP" panose="020B0500000000000000" pitchFamily="34" charset="-128"/>
+                <a:ea typeface="源ノ角ゴシック JP" panose="020B0500000000000000" pitchFamily="34" charset="-128"/>
+              </a:rPr>
+              <a:t>十分</a:t>
+            </a:r>
+            <a:r>
+              <a:rPr kumimoji="1" lang="en-US" altLang="ja-JP" sz="1500" dirty="0">
+                <a:solidFill>
+                  <a:srgbClr val="DCD8DC">
+                    <a:lumMod val="25000"/>
+                  </a:srgbClr>
+                </a:solidFill>
+                <a:latin typeface="源ノ角ゴシック JP" panose="020B0500000000000000" pitchFamily="34" charset="-128"/>
+                <a:ea typeface="源ノ角ゴシック JP" panose="020B0500000000000000" pitchFamily="34" charset="-128"/>
+              </a:rPr>
+              <a:t> / </a:t>
+            </a:r>
+            <a:r>
+              <a:rPr kumimoji="1" lang="ja-JP" altLang="en-US" sz="1500">
+                <a:solidFill>
+                  <a:srgbClr val="DCD8DC">
+                    <a:lumMod val="25000"/>
+                  </a:srgbClr>
+                </a:solidFill>
+                <a:latin typeface="源ノ角ゴシック JP" panose="020B0500000000000000" pitchFamily="34" charset="-128"/>
+                <a:ea typeface="源ノ角ゴシック JP" panose="020B0500000000000000" pitchFamily="34" charset="-128"/>
+              </a:rPr>
+              <a:t>中程度</a:t>
+            </a:r>
+            <a:r>
+              <a:rPr kumimoji="1" lang="en-US" altLang="ja-JP" sz="1500" dirty="0">
+                <a:solidFill>
+                  <a:srgbClr val="DCD8DC">
+                    <a:lumMod val="25000"/>
+                  </a:srgbClr>
+                </a:solidFill>
+                <a:latin typeface="源ノ角ゴシック JP" panose="020B0500000000000000" pitchFamily="34" charset="-128"/>
+                <a:ea typeface="源ノ角ゴシック JP" panose="020B0500000000000000" pitchFamily="34" charset="-128"/>
+              </a:rPr>
+              <a:t> / </a:t>
+            </a:r>
+            <a:r>
+              <a:rPr kumimoji="1" lang="ja-JP" altLang="en-US" sz="1500">
+                <a:solidFill>
+                  <a:srgbClr val="DCD8DC">
+                    <a:lumMod val="25000"/>
+                  </a:srgbClr>
+                </a:solidFill>
+                <a:latin typeface="源ノ角ゴシック JP" panose="020B0500000000000000" pitchFamily="34" charset="-128"/>
+                <a:ea typeface="源ノ角ゴシック JP" panose="020B0500000000000000" pitchFamily="34" charset="-128"/>
+              </a:rPr>
+              <a:t>不足</a:t>
+            </a:r>
+            <a:r>
+              <a:rPr kumimoji="1" lang="en-US" altLang="ja-JP" sz="1500" dirty="0">
+                <a:solidFill>
+                  <a:srgbClr val="DCD8DC">
+                    <a:lumMod val="25000"/>
+                  </a:srgbClr>
+                </a:solidFill>
+                <a:latin typeface="源ノ角ゴシック JP" panose="020B0500000000000000" pitchFamily="34" charset="-128"/>
+                <a:ea typeface="源ノ角ゴシック JP" panose="020B0500000000000000" pitchFamily="34" charset="-128"/>
+              </a:rPr>
+              <a:t> </a:t>
+            </a:r>
+            <a:r>
+              <a:rPr kumimoji="1" lang="ja-JP" altLang="en-US" sz="1500">
+                <a:solidFill>
+                  <a:srgbClr val="DCD8DC">
+                    <a:lumMod val="25000"/>
+                  </a:srgbClr>
+                </a:solidFill>
+                <a:latin typeface="源ノ角ゴシック JP" panose="020B0500000000000000" pitchFamily="34" charset="-128"/>
+                <a:ea typeface="源ノ角ゴシック JP" panose="020B0500000000000000" pitchFamily="34" charset="-128"/>
+              </a:rPr>
+              <a:t>）で評価した</a:t>
+            </a:r>
+            <a:endParaRPr kumimoji="1" lang="en-US" altLang="ja-JP" sz="1500" b="0" i="0" strike="noStrike" kern="1200" cap="none" spc="0" normalizeH="0" baseline="0" noProof="0" dirty="0">
+              <a:ln>
+                <a:noFill/>
+              </a:ln>
+              <a:solidFill>
+                <a:srgbClr val="DCD8DC">
+                  <a:lumMod val="25000"/>
+                </a:srgbClr>
+              </a:solidFill>
+              <a:effectLst/>
+              <a:uLnTx/>
+              <a:uFillTx/>
+              <a:latin typeface="源ノ角ゴシック JP" panose="020B0500000000000000" pitchFamily="34" charset="-128"/>
+              <a:ea typeface="源ノ角ゴシック JP" panose="020B0500000000000000" pitchFamily="34" charset="-128"/>
+              <a:cs typeface="+mn-cs"/>
+            </a:endParaRPr>
+          </a:p>
+        </p:txBody>
+      </p:sp>
+      <p:sp>
+        <p:nvSpPr>
+          <p:cNvPr id="5" name="テキスト ボックス 4">
+            <a:extLst>
+              <a:ext uri="{FF2B5EF4-FFF2-40B4-BE49-F238E27FC236}">
+                <a16:creationId xmlns:a16="http://schemas.microsoft.com/office/drawing/2014/main" id="{861570A8-B260-8BD5-448E-0D38D16D4DF8}"/>
+              </a:ext>
+            </a:extLst>
+          </p:cNvPr>
+          <p:cNvSpPr txBox="1"/>
+          <p:nvPr/>
+        </p:nvSpPr>
+        <p:spPr>
+          <a:xfrm>
+            <a:off x="887134" y="4870967"/>
+            <a:ext cx="7369731" cy="657488"/>
+          </a:xfrm>
+          <a:prstGeom prst="rect">
+            <a:avLst/>
+          </a:prstGeom>
+          <a:noFill/>
+        </p:spPr>
+        <p:txBody>
+          <a:bodyPr wrap="square">
+            <a:spAutoFit/>
+          </a:bodyPr>
+          <a:lstStyle/>
+          <a:p>
+            <a:pPr marL="0" marR="0" lvl="0" indent="0" algn="l" defTabSz="457200" rtl="0" eaLnBrk="1" fontAlgn="auto" latinLnBrk="0" hangingPunct="1">
+              <a:lnSpc>
+                <a:spcPts val="2280"/>
+              </a:lnSpc>
+              <a:spcBef>
+                <a:spcPts val="0"/>
+              </a:spcBef>
+              <a:spcAft>
+                <a:spcPts val="0"/>
+              </a:spcAft>
+              <a:buClrTx/>
+              <a:buSzTx/>
+              <a:buFontTx/>
+              <a:buNone/>
+              <a:tabLst/>
+              <a:defRPr/>
+            </a:pPr>
+            <a:r>
+              <a:rPr kumimoji="1" lang="ja-JP" altLang="en-US" sz="1600" i="0" u="none" strike="noStrike" kern="1200" cap="none" spc="0" normalizeH="0" baseline="0" noProof="0">
+                <a:ln>
+                  <a:noFill/>
+                </a:ln>
+                <a:solidFill>
+                  <a:schemeClr val="tx1">
+                    <a:lumMod val="75000"/>
+                    <a:lumOff val="25000"/>
+                  </a:schemeClr>
+                </a:solidFill>
+                <a:effectLst/>
+                <a:uLnTx/>
+                <a:uFillTx/>
+                <a:latin typeface="源ノ角ゴシック JP" panose="020B0500000000000000" pitchFamily="34" charset="-128"/>
+                <a:ea typeface="源ノ角ゴシック JP" panose="020B0500000000000000" pitchFamily="34" charset="-128"/>
+                <a:cs typeface="+mn-cs"/>
+              </a:rPr>
+              <a:t>３つの健康ニーズの中で、特に</a:t>
+            </a:r>
+            <a:r>
+              <a:rPr kumimoji="1" lang="ja-JP" altLang="en-US" sz="1600" b="1" i="0" u="none" strike="noStrike" kern="1200" cap="none" spc="0" normalizeH="0" baseline="0" noProof="0">
+                <a:ln>
+                  <a:noFill/>
+                </a:ln>
+                <a:solidFill>
+                  <a:schemeClr val="tx1">
+                    <a:lumMod val="75000"/>
+                    <a:lumOff val="25000"/>
+                  </a:schemeClr>
+                </a:solidFill>
+                <a:effectLst/>
+                <a:uLnTx/>
+                <a:uFillTx/>
+                <a:latin typeface="源ノ角ゴシック JP" panose="020B0500000000000000" pitchFamily="34" charset="-128"/>
+                <a:ea typeface="源ノ角ゴシック JP" panose="020B0500000000000000" pitchFamily="34" charset="-128"/>
+                <a:cs typeface="+mn-cs"/>
+              </a:rPr>
+              <a:t>「脂質を減らしたい」ニーズ</a:t>
+            </a:r>
+            <a:r>
+              <a:rPr kumimoji="1" lang="ja-JP" altLang="en-US" sz="1600" i="0" u="none" strike="noStrike" kern="1200" cap="none" spc="0" normalizeH="0" baseline="0" noProof="0">
+                <a:ln>
+                  <a:noFill/>
+                </a:ln>
+                <a:solidFill>
+                  <a:schemeClr val="tx1">
+                    <a:lumMod val="75000"/>
+                    <a:lumOff val="25000"/>
+                  </a:schemeClr>
+                </a:solidFill>
+                <a:effectLst/>
+                <a:uLnTx/>
+                <a:uFillTx/>
+                <a:latin typeface="源ノ角ゴシック JP" panose="020B0500000000000000" pitchFamily="34" charset="-128"/>
+                <a:ea typeface="源ノ角ゴシック JP" panose="020B0500000000000000" pitchFamily="34" charset="-128"/>
+                <a:cs typeface="+mn-cs"/>
+              </a:rPr>
+              <a:t>を解決する</a:t>
+            </a:r>
+            <a:r>
+              <a:rPr kumimoji="1" lang="ja-JP" altLang="en-US" sz="1600">
+                <a:solidFill>
+                  <a:schemeClr val="tx1">
+                    <a:lumMod val="75000"/>
+                    <a:lumOff val="25000"/>
+                  </a:schemeClr>
+                </a:solidFill>
+                <a:latin typeface="源ノ角ゴシック JP" panose="020B0500000000000000" pitchFamily="34" charset="-128"/>
+                <a:ea typeface="源ノ角ゴシック JP" panose="020B0500000000000000" pitchFamily="34" charset="-128"/>
+              </a:rPr>
+              <a:t>ための</a:t>
+            </a:r>
+            <a:r>
+              <a:rPr kumimoji="1" lang="ja-JP" altLang="en-US" sz="1600" i="0" u="none" strike="noStrike" kern="1200" cap="none" spc="0" normalizeH="0" baseline="0" noProof="0">
+                <a:ln>
+                  <a:noFill/>
+                </a:ln>
+                <a:solidFill>
+                  <a:schemeClr val="tx1">
+                    <a:lumMod val="75000"/>
+                    <a:lumOff val="25000"/>
+                  </a:schemeClr>
+                </a:solidFill>
+                <a:effectLst/>
+                <a:uLnTx/>
+                <a:uFillTx/>
+                <a:latin typeface="源ノ角ゴシック JP" panose="020B0500000000000000" pitchFamily="34" charset="-128"/>
+                <a:ea typeface="源ノ角ゴシック JP" panose="020B0500000000000000" pitchFamily="34" charset="-128"/>
+                <a:cs typeface="+mn-cs"/>
+              </a:rPr>
+              <a:t>「対応」が不十分である</a:t>
+            </a:r>
+            <a:endParaRPr kumimoji="1" lang="en-US" altLang="ja-JP" sz="1600" i="0" strike="noStrike" kern="1200" cap="none" spc="0" normalizeH="0" baseline="0" noProof="0" dirty="0">
+              <a:ln>
+                <a:noFill/>
+              </a:ln>
+              <a:solidFill>
+                <a:schemeClr val="tx1">
+                  <a:lumMod val="75000"/>
+                  <a:lumOff val="25000"/>
+                </a:schemeClr>
+              </a:solidFill>
+              <a:effectLst/>
+              <a:uLnTx/>
+              <a:uFillTx/>
+              <a:latin typeface="源ノ角ゴシック JP" panose="020B0500000000000000" pitchFamily="34" charset="-128"/>
+              <a:ea typeface="源ノ角ゴシック JP" panose="020B0500000000000000" pitchFamily="34" charset="-128"/>
+              <a:cs typeface="+mn-cs"/>
+            </a:endParaRPr>
+          </a:p>
+        </p:txBody>
+      </p:sp>
+      <p:sp>
+        <p:nvSpPr>
+          <p:cNvPr id="6" name="テキスト ボックス 5">
+            <a:extLst>
+              <a:ext uri="{FF2B5EF4-FFF2-40B4-BE49-F238E27FC236}">
+                <a16:creationId xmlns:a16="http://schemas.microsoft.com/office/drawing/2014/main" id="{77B15BCF-CB38-D2FD-102C-89E523C8CD2E}"/>
+              </a:ext>
+            </a:extLst>
+          </p:cNvPr>
+          <p:cNvSpPr txBox="1"/>
+          <p:nvPr/>
+        </p:nvSpPr>
+        <p:spPr>
+          <a:xfrm>
+            <a:off x="924866" y="5679825"/>
+            <a:ext cx="7499935" cy="362472"/>
+          </a:xfrm>
+          <a:prstGeom prst="rect">
+            <a:avLst/>
+          </a:prstGeom>
+          <a:noFill/>
+        </p:spPr>
+        <p:txBody>
+          <a:bodyPr wrap="square">
+            <a:spAutoFit/>
+          </a:bodyPr>
+          <a:lstStyle/>
+          <a:p>
+            <a:pPr marL="0" marR="0" lvl="0" indent="0" algn="l" defTabSz="457200" rtl="0" eaLnBrk="1" fontAlgn="auto" latinLnBrk="0" hangingPunct="1">
+              <a:lnSpc>
+                <a:spcPts val="2280"/>
+              </a:lnSpc>
+              <a:spcBef>
+                <a:spcPts val="0"/>
+              </a:spcBef>
+              <a:spcAft>
+                <a:spcPts val="0"/>
+              </a:spcAft>
+              <a:buClrTx/>
+              <a:buSzTx/>
+              <a:buFontTx/>
+              <a:buNone/>
+              <a:tabLst/>
+              <a:defRPr/>
+            </a:pPr>
+            <a:r>
+              <a:rPr kumimoji="1" lang="ja-JP" altLang="en-US" sz="1600">
+                <a:solidFill>
+                  <a:schemeClr val="tx1">
+                    <a:lumMod val="75000"/>
+                    <a:lumOff val="25000"/>
+                  </a:schemeClr>
+                </a:solidFill>
+                <a:latin typeface="源ノ角ゴシック JP" panose="020B0500000000000000" pitchFamily="34" charset="-128"/>
+                <a:ea typeface="源ノ角ゴシック JP" panose="020B0500000000000000" pitchFamily="34" charset="-128"/>
+              </a:rPr>
+              <a:t>→ 一方で、こうした傾向は、他社においても同様である</a:t>
+            </a:r>
+            <a:endParaRPr kumimoji="1" lang="en-US" altLang="ja-JP" sz="1600" i="0" strike="noStrike" kern="1200" cap="none" spc="0" normalizeH="0" baseline="0" noProof="0" dirty="0">
+              <a:ln>
+                <a:noFill/>
+              </a:ln>
+              <a:solidFill>
+                <a:schemeClr val="tx1">
+                  <a:lumMod val="75000"/>
+                  <a:lumOff val="25000"/>
+                </a:schemeClr>
+              </a:solidFill>
+              <a:effectLst/>
+              <a:uLnTx/>
+              <a:uFillTx/>
+              <a:latin typeface="源ノ角ゴシック JP" panose="020B0500000000000000" pitchFamily="34" charset="-128"/>
+              <a:ea typeface="源ノ角ゴシック JP" panose="020B0500000000000000" pitchFamily="34" charset="-128"/>
+              <a:cs typeface="+mn-cs"/>
+            </a:endParaRPr>
+          </a:p>
+        </p:txBody>
+      </p:sp>
+      <p:sp>
+        <p:nvSpPr>
+          <p:cNvPr id="7" name="テキスト ボックス 6">
+            <a:extLst>
+              <a:ext uri="{FF2B5EF4-FFF2-40B4-BE49-F238E27FC236}">
+                <a16:creationId xmlns:a16="http://schemas.microsoft.com/office/drawing/2014/main" id="{B1676A2F-D9F8-25C1-FC60-06D404A19149}"/>
+              </a:ext>
+            </a:extLst>
+          </p:cNvPr>
+          <p:cNvSpPr txBox="1"/>
+          <p:nvPr/>
+        </p:nvSpPr>
+        <p:spPr>
+          <a:xfrm>
+            <a:off x="760744" y="4357062"/>
+            <a:ext cx="2445594" cy="362535"/>
+          </a:xfrm>
+          <a:prstGeom prst="rect">
+            <a:avLst/>
+          </a:prstGeom>
+          <a:noFill/>
+        </p:spPr>
+        <p:txBody>
+          <a:bodyPr wrap="square">
+            <a:spAutoFit/>
+          </a:bodyPr>
+          <a:lstStyle/>
+          <a:p>
+            <a:pPr marL="0" marR="0" lvl="0" indent="0" algn="l" defTabSz="457200" rtl="0" eaLnBrk="1" fontAlgn="auto" latinLnBrk="0" hangingPunct="1">
+              <a:lnSpc>
+                <a:spcPts val="2280"/>
+              </a:lnSpc>
+              <a:spcBef>
+                <a:spcPts val="0"/>
+              </a:spcBef>
+              <a:spcAft>
+                <a:spcPts val="0"/>
+              </a:spcAft>
+              <a:buClrTx/>
+              <a:buSzTx/>
+              <a:buFontTx/>
+              <a:buNone/>
+              <a:tabLst/>
+              <a:defRPr/>
+            </a:pPr>
+            <a:r>
+              <a:rPr kumimoji="1" lang="ja-JP" altLang="en-US" sz="1600" i="0" u="none" strike="noStrike" kern="1200" cap="none" spc="0" normalizeH="0" baseline="0" noProof="0">
+                <a:ln>
+                  <a:noFill/>
+                </a:ln>
+                <a:solidFill>
+                  <a:schemeClr val="tx1">
+                    <a:lumMod val="75000"/>
+                    <a:lumOff val="25000"/>
+                  </a:schemeClr>
+                </a:solidFill>
+                <a:effectLst/>
+                <a:uLnTx/>
+                <a:uFillTx/>
+                <a:latin typeface="源ノ角ゴシック JP" panose="020B0500000000000000" pitchFamily="34" charset="-128"/>
+                <a:ea typeface="源ノ角ゴシック JP" panose="020B0500000000000000" pitchFamily="34" charset="-128"/>
+                <a:cs typeface="+mn-cs"/>
+              </a:rPr>
+              <a:t>セブンイレブンにおいて</a:t>
+            </a:r>
+            <a:endParaRPr kumimoji="1" lang="en-US" altLang="ja-JP" sz="1600" i="0" strike="noStrike" kern="1200" cap="none" spc="0" normalizeH="0" baseline="0" noProof="0" dirty="0">
+              <a:ln>
+                <a:noFill/>
+              </a:ln>
+              <a:solidFill>
+                <a:schemeClr val="tx1">
+                  <a:lumMod val="75000"/>
+                  <a:lumOff val="25000"/>
+                </a:schemeClr>
+              </a:solidFill>
+              <a:effectLst/>
+              <a:uLnTx/>
+              <a:uFillTx/>
+              <a:latin typeface="源ノ角ゴシック JP" panose="020B0500000000000000" pitchFamily="34" charset="-128"/>
+              <a:ea typeface="源ノ角ゴシック JP" panose="020B0500000000000000" pitchFamily="34" charset="-128"/>
+              <a:cs typeface="+mn-cs"/>
+            </a:endParaRPr>
+          </a:p>
+        </p:txBody>
+      </p:sp>
+      <p:sp>
+        <p:nvSpPr>
+          <p:cNvPr id="2" name="テキスト ボックス 1">
+            <a:extLst>
+              <a:ext uri="{FF2B5EF4-FFF2-40B4-BE49-F238E27FC236}">
+                <a16:creationId xmlns:a16="http://schemas.microsoft.com/office/drawing/2014/main" id="{DEFC31B3-E03F-43AD-60BD-49478F32A3B0}"/>
+              </a:ext>
+            </a:extLst>
+          </p:cNvPr>
+          <p:cNvSpPr txBox="1"/>
+          <p:nvPr/>
+        </p:nvSpPr>
+        <p:spPr>
+          <a:xfrm>
+            <a:off x="195442" y="604666"/>
+            <a:ext cx="8493995" cy="476842"/>
           </a:xfrm>
           <a:prstGeom prst="rect">
             <a:avLst/>
@@ -29408,7 +29725,7 @@
                 <a:ea typeface="源ノ角ゴシック JP" panose="020B0500000000000000" pitchFamily="34" charset="-128"/>
                 <a:cs typeface="+mn-cs"/>
               </a:rPr>
-              <a:t>「対応」の実施量を評価する</a:t>
+              <a:t>セブンイレブンでは、脂質への「対応」が不十分である</a:t>
             </a:r>
             <a:endParaRPr kumimoji="0" lang="en-US" altLang="ja-JP" sz="2000" b="1" i="0" u="none" strike="noStrike" kern="1200" cap="none" spc="50" normalizeH="0" baseline="0" noProof="0" dirty="0">
               <a:ln>
@@ -29427,731 +29744,10 @@
           </a:p>
         </p:txBody>
       </p:sp>
-      <p:sp>
-        <p:nvSpPr>
-          <p:cNvPr id="3" name="テキスト ボックス 2">
-            <a:extLst>
-              <a:ext uri="{FF2B5EF4-FFF2-40B4-BE49-F238E27FC236}">
-                <a16:creationId xmlns:a16="http://schemas.microsoft.com/office/drawing/2014/main" id="{C6633AB4-1174-F4C5-8285-C2EDA8FC5B3D}"/>
-              </a:ext>
-            </a:extLst>
-          </p:cNvPr>
-          <p:cNvSpPr txBox="1"/>
-          <p:nvPr/>
-        </p:nvSpPr>
-        <p:spPr>
-          <a:xfrm>
-            <a:off x="652944" y="1305972"/>
-            <a:ext cx="7283821" cy="340221"/>
-          </a:xfrm>
-          <a:prstGeom prst="rect">
-            <a:avLst/>
-          </a:prstGeom>
-          <a:noFill/>
-        </p:spPr>
-        <p:txBody>
-          <a:bodyPr wrap="square">
-            <a:spAutoFit/>
-          </a:bodyPr>
-          <a:lstStyle/>
-          <a:p>
-            <a:pPr marL="0" marR="0" lvl="0" indent="0" algn="l" defTabSz="457200" rtl="0" eaLnBrk="1" fontAlgn="auto" latinLnBrk="0" hangingPunct="1">
-              <a:lnSpc>
-                <a:spcPts val="2080"/>
-              </a:lnSpc>
-              <a:spcBef>
-                <a:spcPts val="0"/>
-              </a:spcBef>
-              <a:spcAft>
-                <a:spcPts val="0"/>
-              </a:spcAft>
-              <a:buClrTx/>
-              <a:buSzTx/>
-              <a:buFontTx/>
-              <a:buNone/>
-              <a:tabLst/>
-              <a:defRPr/>
-            </a:pPr>
-            <a:r>
-              <a:rPr kumimoji="1" lang="ja-JP" altLang="en-US" sz="1500">
-                <a:solidFill>
-                  <a:srgbClr val="DCD8DC">
-                    <a:lumMod val="25000"/>
-                  </a:srgbClr>
-                </a:solidFill>
-                <a:latin typeface="源ノ角ゴシック JP" panose="020B0500000000000000" pitchFamily="34" charset="-128"/>
-                <a:ea typeface="源ノ角ゴシック JP" panose="020B0500000000000000" pitchFamily="34" charset="-128"/>
-              </a:rPr>
-              <a:t>「対応」に該当する商品数に基づき、実施量を（</a:t>
-            </a:r>
-            <a:r>
-              <a:rPr kumimoji="1" lang="en-US" altLang="ja-JP" sz="1500" dirty="0">
-                <a:solidFill>
-                  <a:srgbClr val="DCD8DC">
-                    <a:lumMod val="25000"/>
-                  </a:srgbClr>
-                </a:solidFill>
-                <a:latin typeface="源ノ角ゴシック JP" panose="020B0500000000000000" pitchFamily="34" charset="-128"/>
-                <a:ea typeface="源ノ角ゴシック JP" panose="020B0500000000000000" pitchFamily="34" charset="-128"/>
-              </a:rPr>
-              <a:t> </a:t>
-            </a:r>
-            <a:r>
-              <a:rPr kumimoji="1" lang="ja-JP" altLang="en-US" sz="1500">
-                <a:solidFill>
-                  <a:srgbClr val="DCD8DC">
-                    <a:lumMod val="25000"/>
-                  </a:srgbClr>
-                </a:solidFill>
-                <a:latin typeface="源ノ角ゴシック JP" panose="020B0500000000000000" pitchFamily="34" charset="-128"/>
-                <a:ea typeface="源ノ角ゴシック JP" panose="020B0500000000000000" pitchFamily="34" charset="-128"/>
-              </a:rPr>
-              <a:t>十分</a:t>
-            </a:r>
-            <a:r>
-              <a:rPr kumimoji="1" lang="en-US" altLang="ja-JP" sz="1500" dirty="0">
-                <a:solidFill>
-                  <a:srgbClr val="DCD8DC">
-                    <a:lumMod val="25000"/>
-                  </a:srgbClr>
-                </a:solidFill>
-                <a:latin typeface="源ノ角ゴシック JP" panose="020B0500000000000000" pitchFamily="34" charset="-128"/>
-                <a:ea typeface="源ノ角ゴシック JP" panose="020B0500000000000000" pitchFamily="34" charset="-128"/>
-              </a:rPr>
-              <a:t> / </a:t>
-            </a:r>
-            <a:r>
-              <a:rPr kumimoji="1" lang="ja-JP" altLang="en-US" sz="1500">
-                <a:solidFill>
-                  <a:srgbClr val="DCD8DC">
-                    <a:lumMod val="25000"/>
-                  </a:srgbClr>
-                </a:solidFill>
-                <a:latin typeface="源ノ角ゴシック JP" panose="020B0500000000000000" pitchFamily="34" charset="-128"/>
-                <a:ea typeface="源ノ角ゴシック JP" panose="020B0500000000000000" pitchFamily="34" charset="-128"/>
-              </a:rPr>
-              <a:t>中程度</a:t>
-            </a:r>
-            <a:r>
-              <a:rPr kumimoji="1" lang="en-US" altLang="ja-JP" sz="1500" dirty="0">
-                <a:solidFill>
-                  <a:srgbClr val="DCD8DC">
-                    <a:lumMod val="25000"/>
-                  </a:srgbClr>
-                </a:solidFill>
-                <a:latin typeface="源ノ角ゴシック JP" panose="020B0500000000000000" pitchFamily="34" charset="-128"/>
-                <a:ea typeface="源ノ角ゴシック JP" panose="020B0500000000000000" pitchFamily="34" charset="-128"/>
-              </a:rPr>
-              <a:t> / </a:t>
-            </a:r>
-            <a:r>
-              <a:rPr kumimoji="1" lang="ja-JP" altLang="en-US" sz="1500">
-                <a:solidFill>
-                  <a:srgbClr val="DCD8DC">
-                    <a:lumMod val="25000"/>
-                  </a:srgbClr>
-                </a:solidFill>
-                <a:latin typeface="源ノ角ゴシック JP" panose="020B0500000000000000" pitchFamily="34" charset="-128"/>
-                <a:ea typeface="源ノ角ゴシック JP" panose="020B0500000000000000" pitchFamily="34" charset="-128"/>
-              </a:rPr>
-              <a:t>不足</a:t>
-            </a:r>
-            <a:r>
-              <a:rPr kumimoji="1" lang="en-US" altLang="ja-JP" sz="1500" dirty="0">
-                <a:solidFill>
-                  <a:srgbClr val="DCD8DC">
-                    <a:lumMod val="25000"/>
-                  </a:srgbClr>
-                </a:solidFill>
-                <a:latin typeface="源ノ角ゴシック JP" panose="020B0500000000000000" pitchFamily="34" charset="-128"/>
-                <a:ea typeface="源ノ角ゴシック JP" panose="020B0500000000000000" pitchFamily="34" charset="-128"/>
-              </a:rPr>
-              <a:t> </a:t>
-            </a:r>
-            <a:r>
-              <a:rPr kumimoji="1" lang="ja-JP" altLang="en-US" sz="1500">
-                <a:solidFill>
-                  <a:srgbClr val="DCD8DC">
-                    <a:lumMod val="25000"/>
-                  </a:srgbClr>
-                </a:solidFill>
-                <a:latin typeface="源ノ角ゴシック JP" panose="020B0500000000000000" pitchFamily="34" charset="-128"/>
-                <a:ea typeface="源ノ角ゴシック JP" panose="020B0500000000000000" pitchFamily="34" charset="-128"/>
-              </a:rPr>
-              <a:t>）で評価した</a:t>
-            </a:r>
-            <a:endParaRPr kumimoji="1" lang="en-US" altLang="ja-JP" sz="1500" b="0" i="0" strike="noStrike" kern="1200" cap="none" spc="0" normalizeH="0" baseline="0" noProof="0" dirty="0">
-              <a:ln>
-                <a:noFill/>
-              </a:ln>
-              <a:solidFill>
-                <a:srgbClr val="DCD8DC">
-                  <a:lumMod val="25000"/>
-                </a:srgbClr>
-              </a:solidFill>
-              <a:effectLst/>
-              <a:uLnTx/>
-              <a:uFillTx/>
-              <a:latin typeface="源ノ角ゴシック JP" panose="020B0500000000000000" pitchFamily="34" charset="-128"/>
-              <a:ea typeface="源ノ角ゴシック JP" panose="020B0500000000000000" pitchFamily="34" charset="-128"/>
-              <a:cs typeface="+mn-cs"/>
-            </a:endParaRPr>
-          </a:p>
-        </p:txBody>
-      </p:sp>
-      <p:sp>
-        <p:nvSpPr>
-          <p:cNvPr id="5" name="テキスト ボックス 4">
-            <a:extLst>
-              <a:ext uri="{FF2B5EF4-FFF2-40B4-BE49-F238E27FC236}">
-                <a16:creationId xmlns:a16="http://schemas.microsoft.com/office/drawing/2014/main" id="{861570A8-B260-8BD5-448E-0D38D16D4DF8}"/>
-              </a:ext>
-            </a:extLst>
-          </p:cNvPr>
-          <p:cNvSpPr txBox="1"/>
-          <p:nvPr/>
-        </p:nvSpPr>
-        <p:spPr>
-          <a:xfrm>
-            <a:off x="652945" y="4778315"/>
-            <a:ext cx="7838107" cy="657488"/>
-          </a:xfrm>
-          <a:prstGeom prst="rect">
-            <a:avLst/>
-          </a:prstGeom>
-          <a:noFill/>
-        </p:spPr>
-        <p:txBody>
-          <a:bodyPr wrap="square">
-            <a:spAutoFit/>
-          </a:bodyPr>
-          <a:lstStyle/>
-          <a:p>
-            <a:pPr marL="0" marR="0" lvl="0" indent="0" algn="l" defTabSz="457200" rtl="0" eaLnBrk="1" fontAlgn="auto" latinLnBrk="0" hangingPunct="1">
-              <a:lnSpc>
-                <a:spcPts val="2280"/>
-              </a:lnSpc>
-              <a:spcBef>
-                <a:spcPts val="0"/>
-              </a:spcBef>
-              <a:spcAft>
-                <a:spcPts val="0"/>
-              </a:spcAft>
-              <a:buClrTx/>
-              <a:buSzTx/>
-              <a:buFontTx/>
-              <a:buNone/>
-              <a:tabLst/>
-              <a:defRPr/>
-            </a:pPr>
-            <a:r>
-              <a:rPr kumimoji="1" lang="ja-JP" altLang="en-US" sz="1600" i="0" u="none" strike="noStrike" kern="1200" cap="none" spc="0" normalizeH="0" baseline="0" noProof="0">
-                <a:ln>
-                  <a:noFill/>
-                </a:ln>
-                <a:solidFill>
-                  <a:schemeClr val="tx1">
-                    <a:lumMod val="75000"/>
-                    <a:lumOff val="25000"/>
-                  </a:schemeClr>
-                </a:solidFill>
-                <a:effectLst/>
-                <a:uLnTx/>
-                <a:uFillTx/>
-                <a:latin typeface="源ノ角ゴシック JP" panose="020B0500000000000000" pitchFamily="34" charset="-128"/>
-                <a:ea typeface="源ノ角ゴシック JP" panose="020B0500000000000000" pitchFamily="34" charset="-128"/>
-                <a:cs typeface="+mn-cs"/>
-              </a:rPr>
-              <a:t>・３つの健康ニーズの中では、特に</a:t>
-            </a:r>
-            <a:r>
-              <a:rPr kumimoji="1" lang="ja-JP" altLang="en-US" sz="1600" b="1" i="0" u="none" strike="noStrike" kern="1200" cap="none" spc="0" normalizeH="0" baseline="0" noProof="0">
-                <a:ln>
-                  <a:noFill/>
-                </a:ln>
-                <a:solidFill>
-                  <a:schemeClr val="tx1">
-                    <a:lumMod val="75000"/>
-                    <a:lumOff val="25000"/>
-                  </a:schemeClr>
-                </a:solidFill>
-                <a:effectLst/>
-                <a:uLnTx/>
-                <a:uFillTx/>
-                <a:latin typeface="源ノ角ゴシック JP" panose="020B0500000000000000" pitchFamily="34" charset="-128"/>
-                <a:ea typeface="源ノ角ゴシック JP" panose="020B0500000000000000" pitchFamily="34" charset="-128"/>
-                <a:cs typeface="+mn-cs"/>
-              </a:rPr>
-              <a:t>「脂質を減らしたい」ニーズ</a:t>
-            </a:r>
-            <a:r>
-              <a:rPr kumimoji="1" lang="ja-JP" altLang="en-US" sz="1600" i="0" u="none" strike="noStrike" kern="1200" cap="none" spc="0" normalizeH="0" baseline="0" noProof="0">
-                <a:ln>
-                  <a:noFill/>
-                </a:ln>
-                <a:solidFill>
-                  <a:schemeClr val="tx1">
-                    <a:lumMod val="75000"/>
-                    <a:lumOff val="25000"/>
-                  </a:schemeClr>
-                </a:solidFill>
-                <a:effectLst/>
-                <a:uLnTx/>
-                <a:uFillTx/>
-                <a:latin typeface="源ノ角ゴシック JP" panose="020B0500000000000000" pitchFamily="34" charset="-128"/>
-                <a:ea typeface="源ノ角ゴシック JP" panose="020B0500000000000000" pitchFamily="34" charset="-128"/>
-                <a:cs typeface="+mn-cs"/>
-              </a:rPr>
-              <a:t>を解決する</a:t>
-            </a:r>
-            <a:r>
-              <a:rPr kumimoji="1" lang="ja-JP" altLang="en-US" sz="1600">
-                <a:solidFill>
-                  <a:schemeClr val="tx1">
-                    <a:lumMod val="75000"/>
-                    <a:lumOff val="25000"/>
-                  </a:schemeClr>
-                </a:solidFill>
-                <a:latin typeface="源ノ角ゴシック JP" panose="020B0500000000000000" pitchFamily="34" charset="-128"/>
-                <a:ea typeface="源ノ角ゴシック JP" panose="020B0500000000000000" pitchFamily="34" charset="-128"/>
-              </a:rPr>
-              <a:t>ための</a:t>
-            </a:r>
-            <a:r>
-              <a:rPr kumimoji="1" lang="ja-JP" altLang="en-US" sz="1600" i="0" u="none" strike="noStrike" kern="1200" cap="none" spc="0" normalizeH="0" baseline="0" noProof="0">
-                <a:ln>
-                  <a:noFill/>
-                </a:ln>
-                <a:solidFill>
-                  <a:schemeClr val="tx1">
-                    <a:lumMod val="75000"/>
-                    <a:lumOff val="25000"/>
-                  </a:schemeClr>
-                </a:solidFill>
-                <a:effectLst/>
-                <a:uLnTx/>
-                <a:uFillTx/>
-                <a:latin typeface="源ノ角ゴシック JP" panose="020B0500000000000000" pitchFamily="34" charset="-128"/>
-                <a:ea typeface="源ノ角ゴシック JP" panose="020B0500000000000000" pitchFamily="34" charset="-128"/>
-                <a:cs typeface="+mn-cs"/>
-              </a:rPr>
-              <a:t>「対応」が不十分である</a:t>
-            </a:r>
-            <a:endParaRPr kumimoji="1" lang="en-US" altLang="ja-JP" sz="1600" i="0" strike="noStrike" kern="1200" cap="none" spc="0" normalizeH="0" baseline="0" noProof="0" dirty="0">
-              <a:ln>
-                <a:noFill/>
-              </a:ln>
-              <a:solidFill>
-                <a:schemeClr val="tx1">
-                  <a:lumMod val="75000"/>
-                  <a:lumOff val="25000"/>
-                </a:schemeClr>
-              </a:solidFill>
-              <a:effectLst/>
-              <a:uLnTx/>
-              <a:uFillTx/>
-              <a:latin typeface="源ノ角ゴシック JP" panose="020B0500000000000000" pitchFamily="34" charset="-128"/>
-              <a:ea typeface="源ノ角ゴシック JP" panose="020B0500000000000000" pitchFamily="34" charset="-128"/>
-              <a:cs typeface="+mn-cs"/>
-            </a:endParaRPr>
-          </a:p>
-        </p:txBody>
-      </p:sp>
-      <p:sp>
-        <p:nvSpPr>
-          <p:cNvPr id="6" name="テキスト ボックス 5">
-            <a:extLst>
-              <a:ext uri="{FF2B5EF4-FFF2-40B4-BE49-F238E27FC236}">
-                <a16:creationId xmlns:a16="http://schemas.microsoft.com/office/drawing/2014/main" id="{77B15BCF-CB38-D2FD-102C-89E523C8CD2E}"/>
-              </a:ext>
-            </a:extLst>
-          </p:cNvPr>
-          <p:cNvSpPr txBox="1"/>
-          <p:nvPr/>
-        </p:nvSpPr>
-        <p:spPr>
-          <a:xfrm>
-            <a:off x="652944" y="5588305"/>
-            <a:ext cx="7838107" cy="657424"/>
-          </a:xfrm>
-          <a:prstGeom prst="rect">
-            <a:avLst/>
-          </a:prstGeom>
-          <a:noFill/>
-        </p:spPr>
-        <p:txBody>
-          <a:bodyPr wrap="square">
-            <a:spAutoFit/>
-          </a:bodyPr>
-          <a:lstStyle/>
-          <a:p>
-            <a:pPr marL="0" marR="0" lvl="0" indent="0" algn="l" defTabSz="457200" rtl="0" eaLnBrk="1" fontAlgn="auto" latinLnBrk="0" hangingPunct="1">
-              <a:lnSpc>
-                <a:spcPts val="2280"/>
-              </a:lnSpc>
-              <a:spcBef>
-                <a:spcPts val="0"/>
-              </a:spcBef>
-              <a:spcAft>
-                <a:spcPts val="0"/>
-              </a:spcAft>
-              <a:buClrTx/>
-              <a:buSzTx/>
-              <a:buFontTx/>
-              <a:buNone/>
-              <a:tabLst/>
-              <a:defRPr/>
-            </a:pPr>
-            <a:r>
-              <a:rPr kumimoji="1" lang="ja-JP" altLang="en-US" sz="1600" i="0" u="none" strike="noStrike" kern="1200" cap="none" spc="0" normalizeH="0" baseline="0" noProof="0">
-                <a:ln>
-                  <a:noFill/>
-                </a:ln>
-                <a:solidFill>
-                  <a:schemeClr val="tx1">
-                    <a:lumMod val="75000"/>
-                    <a:lumOff val="25000"/>
-                  </a:schemeClr>
-                </a:solidFill>
-                <a:effectLst/>
-                <a:uLnTx/>
-                <a:uFillTx/>
-                <a:latin typeface="源ノ角ゴシック JP" panose="020B0500000000000000" pitchFamily="34" charset="-128"/>
-                <a:ea typeface="源ノ角ゴシック JP" panose="020B0500000000000000" pitchFamily="34" charset="-128"/>
-                <a:cs typeface="+mn-cs"/>
-              </a:rPr>
-              <a:t>・コンビニ間では、</a:t>
-            </a:r>
-            <a:r>
-              <a:rPr kumimoji="1" lang="ja-JP" altLang="en-US" sz="1600" b="1" i="0" u="none" strike="noStrike" kern="1200" cap="none" spc="0" normalizeH="0" baseline="0" noProof="0">
-                <a:ln>
-                  <a:noFill/>
-                </a:ln>
-                <a:solidFill>
-                  <a:schemeClr val="tx1">
-                    <a:lumMod val="75000"/>
-                    <a:lumOff val="25000"/>
-                  </a:schemeClr>
-                </a:solidFill>
-                <a:effectLst/>
-                <a:uLnTx/>
-                <a:uFillTx/>
-                <a:latin typeface="源ノ角ゴシック JP" panose="020B0500000000000000" pitchFamily="34" charset="-128"/>
-                <a:ea typeface="源ノ角ゴシック JP" panose="020B0500000000000000" pitchFamily="34" charset="-128"/>
-                <a:cs typeface="+mn-cs"/>
-              </a:rPr>
-              <a:t>特に</a:t>
-            </a:r>
-            <a:r>
-              <a:rPr kumimoji="1" lang="ja-JP" altLang="en-US" sz="1600" b="1" i="0" strike="noStrike" kern="1200" cap="none" spc="0" normalizeH="0" baseline="0" noProof="0">
-                <a:ln>
-                  <a:noFill/>
-                </a:ln>
-                <a:solidFill>
-                  <a:schemeClr val="tx1">
-                    <a:lumMod val="75000"/>
-                    <a:lumOff val="25000"/>
-                  </a:schemeClr>
-                </a:solidFill>
-                <a:effectLst/>
-                <a:uLnTx/>
-                <a:uFillTx/>
-                <a:latin typeface="源ノ角ゴシック JP" panose="020B0500000000000000" pitchFamily="34" charset="-128"/>
-                <a:ea typeface="源ノ角ゴシック JP" panose="020B0500000000000000" pitchFamily="34" charset="-128"/>
-                <a:cs typeface="+mn-cs"/>
-              </a:rPr>
-              <a:t>ファミリーマートと比較して</a:t>
-            </a:r>
-            <a:r>
-              <a:rPr kumimoji="1" lang="ja-JP" altLang="en-US" sz="1600" i="0" u="none" strike="noStrike" kern="1200" cap="none" spc="0" normalizeH="0" baseline="0" noProof="0">
-                <a:ln>
-                  <a:noFill/>
-                </a:ln>
-                <a:solidFill>
-                  <a:schemeClr val="tx1">
-                    <a:lumMod val="75000"/>
-                    <a:lumOff val="25000"/>
-                  </a:schemeClr>
-                </a:solidFill>
-                <a:effectLst/>
-                <a:uLnTx/>
-                <a:uFillTx/>
-                <a:latin typeface="源ノ角ゴシック JP" panose="020B0500000000000000" pitchFamily="34" charset="-128"/>
-                <a:ea typeface="源ノ角ゴシック JP" panose="020B0500000000000000" pitchFamily="34" charset="-128"/>
-                <a:cs typeface="+mn-cs"/>
-              </a:rPr>
-              <a:t>、各ニーズを解決するための</a:t>
-            </a:r>
-            <a:endParaRPr kumimoji="1" lang="en-US" altLang="ja-JP" sz="1600" i="0" u="none" strike="noStrike" kern="1200" cap="none" spc="0" normalizeH="0" baseline="0" noProof="0" dirty="0">
-              <a:ln>
-                <a:noFill/>
-              </a:ln>
-              <a:solidFill>
-                <a:schemeClr val="tx1">
-                  <a:lumMod val="75000"/>
-                  <a:lumOff val="25000"/>
-                </a:schemeClr>
-              </a:solidFill>
-              <a:effectLst/>
-              <a:uLnTx/>
-              <a:uFillTx/>
-              <a:latin typeface="源ノ角ゴシック JP" panose="020B0500000000000000" pitchFamily="34" charset="-128"/>
-              <a:ea typeface="源ノ角ゴシック JP" panose="020B0500000000000000" pitchFamily="34" charset="-128"/>
-              <a:cs typeface="+mn-cs"/>
-            </a:endParaRPr>
-          </a:p>
-          <a:p>
-            <a:pPr marL="0" marR="0" lvl="0" indent="0" algn="l" defTabSz="457200" rtl="0" eaLnBrk="1" fontAlgn="auto" latinLnBrk="0" hangingPunct="1">
-              <a:lnSpc>
-                <a:spcPts val="2280"/>
-              </a:lnSpc>
-              <a:spcBef>
-                <a:spcPts val="0"/>
-              </a:spcBef>
-              <a:spcAft>
-                <a:spcPts val="0"/>
-              </a:spcAft>
-              <a:buClrTx/>
-              <a:buSzTx/>
-              <a:buFontTx/>
-              <a:buNone/>
-              <a:tabLst/>
-              <a:defRPr/>
-            </a:pPr>
-            <a:r>
-              <a:rPr kumimoji="1" lang="en-US" altLang="ja-JP" sz="1600" noProof="0" dirty="0">
-                <a:solidFill>
-                  <a:schemeClr val="tx1">
-                    <a:lumMod val="75000"/>
-                    <a:lumOff val="25000"/>
-                  </a:schemeClr>
-                </a:solidFill>
-                <a:latin typeface="源ノ角ゴシック JP" panose="020B0500000000000000" pitchFamily="34" charset="-128"/>
-                <a:ea typeface="源ノ角ゴシック JP" panose="020B0500000000000000" pitchFamily="34" charset="-128"/>
-              </a:rPr>
-              <a:t>  </a:t>
-            </a:r>
-            <a:r>
-              <a:rPr kumimoji="1" lang="ja-JP" altLang="en-US" sz="1600" i="0" u="none" strike="noStrike" kern="1200" cap="none" spc="0" normalizeH="0" baseline="0" noProof="0">
-                <a:ln>
-                  <a:noFill/>
-                </a:ln>
-                <a:solidFill>
-                  <a:schemeClr val="tx1">
-                    <a:lumMod val="75000"/>
-                    <a:lumOff val="25000"/>
-                  </a:schemeClr>
-                </a:solidFill>
-                <a:effectLst/>
-                <a:uLnTx/>
-                <a:uFillTx/>
-                <a:latin typeface="源ノ角ゴシック JP" panose="020B0500000000000000" pitchFamily="34" charset="-128"/>
-                <a:ea typeface="源ノ角ゴシック JP" panose="020B0500000000000000" pitchFamily="34" charset="-128"/>
-                <a:cs typeface="+mn-cs"/>
-              </a:rPr>
-              <a:t>「対応」の実施量が少ない</a:t>
-            </a:r>
-            <a:endParaRPr kumimoji="1" lang="en-US" altLang="ja-JP" sz="1600" i="0" strike="noStrike" kern="1200" cap="none" spc="0" normalizeH="0" baseline="0" noProof="0" dirty="0">
-              <a:ln>
-                <a:noFill/>
-              </a:ln>
-              <a:solidFill>
-                <a:schemeClr val="tx1">
-                  <a:lumMod val="75000"/>
-                  <a:lumOff val="25000"/>
-                </a:schemeClr>
-              </a:solidFill>
-              <a:effectLst/>
-              <a:uLnTx/>
-              <a:uFillTx/>
-              <a:latin typeface="源ノ角ゴシック JP" panose="020B0500000000000000" pitchFamily="34" charset="-128"/>
-              <a:ea typeface="源ノ角ゴシック JP" panose="020B0500000000000000" pitchFamily="34" charset="-128"/>
-              <a:cs typeface="+mn-cs"/>
-            </a:endParaRPr>
-          </a:p>
-        </p:txBody>
-      </p:sp>
-      <p:sp>
-        <p:nvSpPr>
-          <p:cNvPr id="7" name="テキスト ボックス 6">
-            <a:extLst>
-              <a:ext uri="{FF2B5EF4-FFF2-40B4-BE49-F238E27FC236}">
-                <a16:creationId xmlns:a16="http://schemas.microsoft.com/office/drawing/2014/main" id="{B1676A2F-D9F8-25C1-FC60-06D404A19149}"/>
-              </a:ext>
-            </a:extLst>
-          </p:cNvPr>
-          <p:cNvSpPr txBox="1"/>
-          <p:nvPr/>
-        </p:nvSpPr>
-        <p:spPr>
-          <a:xfrm>
-            <a:off x="652945" y="4263278"/>
-            <a:ext cx="2445594" cy="362535"/>
-          </a:xfrm>
-          <a:prstGeom prst="rect">
-            <a:avLst/>
-          </a:prstGeom>
-          <a:noFill/>
-        </p:spPr>
-        <p:txBody>
-          <a:bodyPr wrap="square">
-            <a:spAutoFit/>
-          </a:bodyPr>
-          <a:lstStyle/>
-          <a:p>
-            <a:pPr marL="0" marR="0" lvl="0" indent="0" algn="l" defTabSz="457200" rtl="0" eaLnBrk="1" fontAlgn="auto" latinLnBrk="0" hangingPunct="1">
-              <a:lnSpc>
-                <a:spcPts val="2280"/>
-              </a:lnSpc>
-              <a:spcBef>
-                <a:spcPts val="0"/>
-              </a:spcBef>
-              <a:spcAft>
-                <a:spcPts val="0"/>
-              </a:spcAft>
-              <a:buClrTx/>
-              <a:buSzTx/>
-              <a:buFontTx/>
-              <a:buNone/>
-              <a:tabLst/>
-              <a:defRPr/>
-            </a:pPr>
-            <a:r>
-              <a:rPr kumimoji="1" lang="ja-JP" altLang="en-US" sz="1600" i="0" u="none" strike="noStrike" kern="1200" cap="none" spc="0" normalizeH="0" baseline="0" noProof="0">
-                <a:ln>
-                  <a:noFill/>
-                </a:ln>
-                <a:solidFill>
-                  <a:schemeClr val="tx1">
-                    <a:lumMod val="75000"/>
-                    <a:lumOff val="25000"/>
-                  </a:schemeClr>
-                </a:solidFill>
-                <a:effectLst/>
-                <a:uLnTx/>
-                <a:uFillTx/>
-                <a:latin typeface="源ノ角ゴシック JP" panose="020B0500000000000000" pitchFamily="34" charset="-128"/>
-                <a:ea typeface="源ノ角ゴシック JP" panose="020B0500000000000000" pitchFamily="34" charset="-128"/>
-                <a:cs typeface="+mn-cs"/>
-              </a:rPr>
-              <a:t>セブンイレブンにおいて</a:t>
-            </a:r>
-            <a:endParaRPr kumimoji="1" lang="en-US" altLang="ja-JP" sz="1600" i="0" strike="noStrike" kern="1200" cap="none" spc="0" normalizeH="0" baseline="0" noProof="0" dirty="0">
-              <a:ln>
-                <a:noFill/>
-              </a:ln>
-              <a:solidFill>
-                <a:schemeClr val="tx1">
-                  <a:lumMod val="75000"/>
-                  <a:lumOff val="25000"/>
-                </a:schemeClr>
-              </a:solidFill>
-              <a:effectLst/>
-              <a:uLnTx/>
-              <a:uFillTx/>
-              <a:latin typeface="源ノ角ゴシック JP" panose="020B0500000000000000" pitchFamily="34" charset="-128"/>
-              <a:ea typeface="源ノ角ゴシック JP" panose="020B0500000000000000" pitchFamily="34" charset="-128"/>
-              <a:cs typeface="+mn-cs"/>
-            </a:endParaRPr>
-          </a:p>
-        </p:txBody>
-      </p:sp>
     </p:spTree>
     <p:extLst>
       <p:ext uri="{BB962C8B-B14F-4D97-AF65-F5344CB8AC3E}">
         <p14:creationId xmlns:p14="http://schemas.microsoft.com/office/powerpoint/2010/main" val="3415732514"/>
-      </p:ext>
-    </p:extLst>
-  </p:cSld>
-  <p:clrMapOvr>
-    <a:masterClrMapping/>
-  </p:clrMapOvr>
-</p:sld>
-</file>
-
-<file path=ppt/slides/slide11.xml><?xml version="1.0" encoding="utf-8"?>
-<p:sld xmlns:a="http://schemas.openxmlformats.org/drawingml/2006/main" xmlns:r="http://schemas.openxmlformats.org/officeDocument/2006/relationships" xmlns:p="http://schemas.openxmlformats.org/presentationml/2006/main">
-  <p:cSld>
-    <p:spTree>
-      <p:nvGrpSpPr>
-        <p:cNvPr id="1" name=""/>
-        <p:cNvGrpSpPr/>
-        <p:nvPr/>
-      </p:nvGrpSpPr>
-      <p:grpSpPr>
-        <a:xfrm>
-          <a:off x="0" y="0"/>
-          <a:ext cx="0" cy="0"/>
-          <a:chOff x="0" y="0"/>
-          <a:chExt cx="0" cy="0"/>
-        </a:xfrm>
-      </p:grpSpPr>
-      <p:pic>
-        <p:nvPicPr>
-          <p:cNvPr id="4" name="図 3">
-            <a:extLst>
-              <a:ext uri="{FF2B5EF4-FFF2-40B4-BE49-F238E27FC236}">
-                <a16:creationId xmlns:a16="http://schemas.microsoft.com/office/drawing/2014/main" id="{0881D93E-3757-4F2B-AF55-F7FDBF70AE93}"/>
-              </a:ext>
-            </a:extLst>
-          </p:cNvPr>
-          <p:cNvPicPr>
-            <a:picLocks noChangeAspect="1"/>
-          </p:cNvPicPr>
-          <p:nvPr/>
-        </p:nvPicPr>
-        <p:blipFill>
-          <a:blip r:embed="rId2"/>
-          <a:srcRect l="3314" t="8333" r="4739" b="8867"/>
-          <a:stretch>
-            <a:fillRect/>
-          </a:stretch>
-        </p:blipFill>
-        <p:spPr>
-          <a:xfrm>
-            <a:off x="1633218" y="3455980"/>
-            <a:ext cx="5877563" cy="1923642"/>
-          </a:xfrm>
-          <a:prstGeom prst="rect">
-            <a:avLst/>
-          </a:prstGeom>
-        </p:spPr>
-      </p:pic>
-      <p:pic>
-        <p:nvPicPr>
-          <p:cNvPr id="2" name="図 1">
-            <a:extLst>
-              <a:ext uri="{FF2B5EF4-FFF2-40B4-BE49-F238E27FC236}">
-                <a16:creationId xmlns:a16="http://schemas.microsoft.com/office/drawing/2014/main" id="{415C3958-EDE6-296A-2F93-48453C942DE7}"/>
-              </a:ext>
-            </a:extLst>
-          </p:cNvPr>
-          <p:cNvPicPr>
-            <a:picLocks noChangeAspect="1"/>
-          </p:cNvPicPr>
-          <p:nvPr/>
-        </p:nvPicPr>
-        <p:blipFill>
-          <a:blip r:embed="rId3"/>
-          <a:srcRect l="3114" t="5700" r="2849" b="7143"/>
-          <a:stretch>
-            <a:fillRect/>
-          </a:stretch>
-        </p:blipFill>
-        <p:spPr>
-          <a:xfrm>
-            <a:off x="1633218" y="1166653"/>
-            <a:ext cx="4215740" cy="1793175"/>
-          </a:xfrm>
-          <a:prstGeom prst="rect">
-            <a:avLst/>
-          </a:prstGeom>
-        </p:spPr>
-      </p:pic>
-    </p:spTree>
-    <p:extLst>
-      <p:ext uri="{BB962C8B-B14F-4D97-AF65-F5344CB8AC3E}">
-        <p14:creationId xmlns:p14="http://schemas.microsoft.com/office/powerpoint/2010/main" val="366262587"/>
       </p:ext>
     </p:extLst>
   </p:cSld>
@@ -30209,103 +29805,6 @@
           </a:prstGeom>
         </p:spPr>
       </p:pic>
-      <p:sp>
-        <p:nvSpPr>
-          <p:cNvPr id="2" name="テキスト ボックス 1">
-            <a:extLst>
-              <a:ext uri="{FF2B5EF4-FFF2-40B4-BE49-F238E27FC236}">
-                <a16:creationId xmlns:a16="http://schemas.microsoft.com/office/drawing/2014/main" id="{A5EFC18F-AD1A-7D80-6029-9F615D5E7A1D}"/>
-              </a:ext>
-            </a:extLst>
-          </p:cNvPr>
-          <p:cNvSpPr txBox="1"/>
-          <p:nvPr/>
-        </p:nvSpPr>
-        <p:spPr>
-          <a:xfrm>
-            <a:off x="89935" y="568886"/>
-            <a:ext cx="8196146" cy="492230"/>
-          </a:xfrm>
-          <a:prstGeom prst="rect">
-            <a:avLst/>
-          </a:prstGeom>
-          <a:noFill/>
-          <a:ln w="25400" cap="flat">
-            <a:noFill/>
-            <a:miter lim="400000"/>
-          </a:ln>
-          <a:effectLst/>
-          <a:sp3d/>
-        </p:spPr>
-        <p:style>
-          <a:lnRef idx="0">
-            <a:scrgbClr r="0" g="0" b="0"/>
-          </a:lnRef>
-          <a:fillRef idx="0">
-            <a:scrgbClr r="0" g="0" b="0"/>
-          </a:fillRef>
-          <a:effectRef idx="0">
-            <a:scrgbClr r="0" g="0" b="0"/>
-          </a:effectRef>
-          <a:fontRef idx="none"/>
-        </p:style>
-        <p:txBody>
-          <a:bodyPr rot="0" spcFirstLastPara="1" vertOverflow="overflow" horzOverflow="overflow" vert="horz" wrap="square" lIns="83715" tIns="83715" rIns="83715" bIns="83715" numCol="1" spcCol="38100" rtlCol="0" anchor="ctr">
-            <a:spAutoFit/>
-          </a:bodyPr>
-          <a:lstStyle/>
-          <a:p>
-            <a:pPr marL="0" marR="0" lvl="0" indent="66714" algn="l" defTabSz="438410" rtl="0" eaLnBrk="1" fontAlgn="auto" latinLnBrk="0" hangingPunct="0">
-              <a:lnSpc>
-                <a:spcPct val="100000"/>
-              </a:lnSpc>
-              <a:spcBef>
-                <a:spcPts val="0"/>
-              </a:spcBef>
-              <a:spcAft>
-                <a:spcPts val="0"/>
-              </a:spcAft>
-              <a:buClrTx/>
-              <a:buSzTx/>
-              <a:buFontTx/>
-              <a:buNone/>
-              <a:tabLst/>
-              <a:defRPr/>
-            </a:pPr>
-            <a:r>
-              <a:rPr kumimoji="0" lang="ja-JP" altLang="en-US" sz="2000" b="1" i="0" u="none" strike="noStrike" kern="1200" cap="none" spc="50" normalizeH="0" baseline="0" noProof="0">
-                <a:ln>
-                  <a:noFill/>
-                </a:ln>
-                <a:solidFill>
-                  <a:srgbClr val="42557A"/>
-                </a:solidFill>
-                <a:effectLst/>
-                <a:uLnTx/>
-                <a:uFillTx/>
-                <a:latin typeface="源ノ角ゴシック JP" panose="020B0500000000000000" pitchFamily="34" charset="-128"/>
-                <a:ea typeface="源ノ角ゴシック JP" panose="020B0500000000000000" pitchFamily="34" charset="-128"/>
-                <a:cs typeface="+mn-cs"/>
-              </a:rPr>
-              <a:t>「対応」の適切さを評価する</a:t>
-            </a:r>
-            <a:endParaRPr kumimoji="0" lang="en-US" altLang="ja-JP" sz="2000" b="1" i="0" u="none" strike="noStrike" kern="1200" cap="none" spc="50" normalizeH="0" baseline="0" noProof="0" dirty="0">
-              <a:ln>
-                <a:noFill/>
-              </a:ln>
-              <a:solidFill>
-                <a:srgbClr val="42557A"/>
-              </a:solidFill>
-              <a:effectLst/>
-              <a:uLnTx/>
-              <a:uFillTx/>
-              <a:latin typeface="源ノ角ゴシック JP" panose="020B0500000000000000" pitchFamily="34" charset="-128"/>
-              <a:ea typeface="源ノ角ゴシック JP" panose="020B0500000000000000" pitchFamily="34" charset="-128"/>
-              <a:cs typeface="+mn-cs"/>
-            </a:endParaRPr>
-          </a:p>
-        </p:txBody>
-      </p:sp>
       <p:sp>
         <p:nvSpPr>
           <p:cNvPr id="4" name="テキスト ボックス 3">
@@ -32067,6 +31566,103 @@
           </a:prstGeom>
         </p:spPr>
       </p:pic>
+      <p:sp>
+        <p:nvSpPr>
+          <p:cNvPr id="3" name="テキスト ボックス 2">
+            <a:extLst>
+              <a:ext uri="{FF2B5EF4-FFF2-40B4-BE49-F238E27FC236}">
+                <a16:creationId xmlns:a16="http://schemas.microsoft.com/office/drawing/2014/main" id="{EAE8C089-4922-9E1F-6B02-9AFC2C383CE0}"/>
+              </a:ext>
+            </a:extLst>
+          </p:cNvPr>
+          <p:cNvSpPr txBox="1"/>
+          <p:nvPr/>
+        </p:nvSpPr>
+        <p:spPr>
+          <a:xfrm>
+            <a:off x="54766" y="604666"/>
+            <a:ext cx="8493995" cy="476842"/>
+          </a:xfrm>
+          <a:prstGeom prst="rect">
+            <a:avLst/>
+          </a:prstGeom>
+          <a:noFill/>
+          <a:ln w="25400" cap="flat">
+            <a:noFill/>
+            <a:miter lim="400000"/>
+          </a:ln>
+          <a:effectLst/>
+          <a:sp3d/>
+        </p:spPr>
+        <p:style>
+          <a:lnRef idx="0">
+            <a:scrgbClr r="0" g="0" b="0"/>
+          </a:lnRef>
+          <a:fillRef idx="0">
+            <a:scrgbClr r="0" g="0" b="0"/>
+          </a:fillRef>
+          <a:effectRef idx="0">
+            <a:scrgbClr r="0" g="0" b="0"/>
+          </a:effectRef>
+          <a:fontRef idx="none"/>
+        </p:style>
+        <p:txBody>
+          <a:bodyPr rot="0" spcFirstLastPara="1" vertOverflow="overflow" horzOverflow="overflow" vert="horz" wrap="square" lIns="83715" tIns="83715" rIns="83715" bIns="83715" numCol="1" spcCol="38100" rtlCol="0" anchor="ctr">
+            <a:spAutoFit/>
+          </a:bodyPr>
+          <a:lstStyle/>
+          <a:p>
+            <a:pPr marL="0" marR="0" lvl="0" indent="66714" algn="l" defTabSz="438410" rtl="0" eaLnBrk="1" fontAlgn="auto" latinLnBrk="0" hangingPunct="0">
+              <a:lnSpc>
+                <a:spcPct val="100000"/>
+              </a:lnSpc>
+              <a:spcBef>
+                <a:spcPts val="0"/>
+              </a:spcBef>
+              <a:spcAft>
+                <a:spcPts val="0"/>
+              </a:spcAft>
+              <a:buClrTx/>
+              <a:buSzTx/>
+              <a:buFontTx/>
+              <a:buNone/>
+              <a:tabLst/>
+              <a:defRPr/>
+            </a:pPr>
+            <a:r>
+              <a:rPr kumimoji="0" lang="ja-JP" altLang="en-US" sz="2000" b="1" i="0" u="none" strike="noStrike" kern="1200" cap="none" spc="50" normalizeH="0" baseline="0" noProof="0">
+                <a:ln>
+                  <a:noFill/>
+                </a:ln>
+                <a:solidFill>
+                  <a:srgbClr val="42557A"/>
+                </a:solidFill>
+                <a:effectLst/>
+                <a:uLnTx/>
+                <a:uFillTx/>
+                <a:latin typeface="源ノ角ゴシック JP" panose="020B0500000000000000" pitchFamily="34" charset="-128"/>
+                <a:ea typeface="源ノ角ゴシック JP" panose="020B0500000000000000" pitchFamily="34" charset="-128"/>
+                <a:cs typeface="+mn-cs"/>
+              </a:rPr>
+              <a:t>「対応」に該当する商品の「平均購買指数」を算出する</a:t>
+            </a:r>
+            <a:endParaRPr kumimoji="0" lang="en-US" altLang="ja-JP" sz="2000" b="1" i="0" u="none" strike="noStrike" kern="1200" cap="none" spc="50" normalizeH="0" baseline="0" noProof="0" dirty="0">
+              <a:ln>
+                <a:noFill/>
+              </a:ln>
+              <a:solidFill>
+                <a:srgbClr val="42557A"/>
+              </a:solidFill>
+              <a:effectLst/>
+              <a:uLnTx/>
+              <a:uFillTx/>
+              <a:latin typeface="源ノ角ゴシック JP" panose="020B0500000000000000" pitchFamily="34" charset="-128"/>
+              <a:ea typeface="源ノ角ゴシック JP" panose="020B0500000000000000" pitchFamily="34" charset="-128"/>
+              <a:cs typeface="+mn-cs"/>
+            </a:endParaRPr>
+          </a:p>
+        </p:txBody>
+      </p:sp>
     </p:spTree>
     <p:extLst>
       <p:ext uri="{BB962C8B-B14F-4D97-AF65-F5344CB8AC3E}">
@@ -32097,103 +31693,6 @@
           <a:chExt cx="0" cy="0"/>
         </a:xfrm>
       </p:grpSpPr>
-      <p:sp>
-        <p:nvSpPr>
-          <p:cNvPr id="2" name="テキスト ボックス 1">
-            <a:extLst>
-              <a:ext uri="{FF2B5EF4-FFF2-40B4-BE49-F238E27FC236}">
-                <a16:creationId xmlns:a16="http://schemas.microsoft.com/office/drawing/2014/main" id="{C61762D2-78AB-C3AE-91DE-BDE5045E3CF4}"/>
-              </a:ext>
-            </a:extLst>
-          </p:cNvPr>
-          <p:cNvSpPr txBox="1"/>
-          <p:nvPr/>
-        </p:nvSpPr>
-        <p:spPr>
-          <a:xfrm>
-            <a:off x="89935" y="568886"/>
-            <a:ext cx="8196146" cy="492230"/>
-          </a:xfrm>
-          <a:prstGeom prst="rect">
-            <a:avLst/>
-          </a:prstGeom>
-          <a:noFill/>
-          <a:ln w="25400" cap="flat">
-            <a:noFill/>
-            <a:miter lim="400000"/>
-          </a:ln>
-          <a:effectLst/>
-          <a:sp3d/>
-        </p:spPr>
-        <p:style>
-          <a:lnRef idx="0">
-            <a:scrgbClr r="0" g="0" b="0"/>
-          </a:lnRef>
-          <a:fillRef idx="0">
-            <a:scrgbClr r="0" g="0" b="0"/>
-          </a:fillRef>
-          <a:effectRef idx="0">
-            <a:scrgbClr r="0" g="0" b="0"/>
-          </a:effectRef>
-          <a:fontRef idx="none"/>
-        </p:style>
-        <p:txBody>
-          <a:bodyPr rot="0" spcFirstLastPara="1" vertOverflow="overflow" horzOverflow="overflow" vert="horz" wrap="square" lIns="83715" tIns="83715" rIns="83715" bIns="83715" numCol="1" spcCol="38100" rtlCol="0" anchor="ctr">
-            <a:spAutoFit/>
-          </a:bodyPr>
-          <a:lstStyle/>
-          <a:p>
-            <a:pPr marL="0" marR="0" lvl="0" indent="66714" algn="l" defTabSz="438410" rtl="0" eaLnBrk="1" fontAlgn="auto" latinLnBrk="0" hangingPunct="0">
-              <a:lnSpc>
-                <a:spcPct val="100000"/>
-              </a:lnSpc>
-              <a:spcBef>
-                <a:spcPts val="0"/>
-              </a:spcBef>
-              <a:spcAft>
-                <a:spcPts val="0"/>
-              </a:spcAft>
-              <a:buClrTx/>
-              <a:buSzTx/>
-              <a:buFontTx/>
-              <a:buNone/>
-              <a:tabLst/>
-              <a:defRPr/>
-            </a:pPr>
-            <a:r>
-              <a:rPr kumimoji="0" lang="ja-JP" altLang="en-US" sz="2000" b="1" i="0" u="none" strike="noStrike" kern="1200" cap="none" spc="50" normalizeH="0" baseline="0" noProof="0">
-                <a:ln>
-                  <a:noFill/>
-                </a:ln>
-                <a:solidFill>
-                  <a:srgbClr val="42557A"/>
-                </a:solidFill>
-                <a:effectLst/>
-                <a:uLnTx/>
-                <a:uFillTx/>
-                <a:latin typeface="源ノ角ゴシック JP" panose="020B0500000000000000" pitchFamily="34" charset="-128"/>
-                <a:ea typeface="源ノ角ゴシック JP" panose="020B0500000000000000" pitchFamily="34" charset="-128"/>
-                <a:cs typeface="+mn-cs"/>
-              </a:rPr>
-              <a:t>「対応」の適切さを評価する</a:t>
-            </a:r>
-            <a:endParaRPr kumimoji="0" lang="en-US" altLang="ja-JP" sz="2000" b="1" i="0" u="none" strike="noStrike" kern="1200" cap="none" spc="50" normalizeH="0" baseline="0" noProof="0" dirty="0">
-              <a:ln>
-                <a:noFill/>
-              </a:ln>
-              <a:solidFill>
-                <a:srgbClr val="42557A"/>
-              </a:solidFill>
-              <a:effectLst/>
-              <a:uLnTx/>
-              <a:uFillTx/>
-              <a:latin typeface="源ノ角ゴシック JP" panose="020B0500000000000000" pitchFamily="34" charset="-128"/>
-              <a:ea typeface="源ノ角ゴシック JP" panose="020B0500000000000000" pitchFamily="34" charset="-128"/>
-              <a:cs typeface="+mn-cs"/>
-            </a:endParaRPr>
-          </a:p>
-        </p:txBody>
-      </p:sp>
       <p:grpSp>
         <p:nvGrpSpPr>
           <p:cNvPr id="12" name="グループ化 11">
@@ -32208,7 +31707,7 @@
         </p:nvGrpSpPr>
         <p:grpSpPr>
           <a:xfrm>
-            <a:off x="344129" y="1729435"/>
+            <a:off x="344127" y="1789444"/>
             <a:ext cx="8455741" cy="889596"/>
             <a:chOff x="344129" y="1394797"/>
             <a:chExt cx="8455741" cy="889596"/>
@@ -32329,7 +31828,7 @@
         </p:nvGrpSpPr>
         <p:grpSpPr>
           <a:xfrm>
-            <a:off x="344129" y="2961609"/>
+            <a:off x="344127" y="2884763"/>
             <a:ext cx="8455741" cy="868586"/>
             <a:chOff x="344129" y="2668254"/>
             <a:chExt cx="8455741" cy="868586"/>
@@ -32450,7 +31949,7 @@
         </p:nvGrpSpPr>
         <p:grpSpPr>
           <a:xfrm>
-            <a:off x="344129" y="4172773"/>
+            <a:off x="344127" y="3959072"/>
             <a:ext cx="8455741" cy="909869"/>
             <a:chOff x="344129" y="3919911"/>
             <a:chExt cx="8455741" cy="909869"/>
@@ -32571,8 +32070,8 @@
         </p:nvSpPr>
         <p:spPr>
           <a:xfrm>
-            <a:off x="800399" y="5457095"/>
-            <a:ext cx="7543200" cy="705386"/>
+            <a:off x="705706" y="5202622"/>
+            <a:ext cx="7732582" cy="705386"/>
           </a:xfrm>
           <a:prstGeom prst="rect">
             <a:avLst/>
@@ -32603,7 +32102,7 @@
               <a:defRPr/>
             </a:pPr>
             <a:r>
-              <a:rPr kumimoji="1" lang="ja-JP" altLang="en-US" sz="1700" i="0" u="none" strike="noStrike" kern="1200" cap="none" spc="0" normalizeH="0" baseline="0" noProof="0">
+              <a:rPr kumimoji="1" lang="ja-JP" altLang="en-US" sz="1600" i="0" u="none" strike="noStrike" kern="1200" cap="none" spc="0" normalizeH="0" baseline="0" noProof="0">
                 <a:ln>
                   <a:noFill/>
                 </a:ln>
@@ -32620,10 +32119,10 @@
                 <a:ea typeface="源ノ角ゴシック JP" panose="020B0500000000000000" pitchFamily="34" charset="-128"/>
                 <a:cs typeface="+mn-cs"/>
               </a:rPr>
-              <a:t>セブンイレブンは、他社と比較して、</a:t>
-            </a:r>
-            <a:r>
-              <a:rPr kumimoji="1" lang="ja-JP" altLang="en-US" sz="1700" b="1" i="0" u="none" strike="noStrike" kern="1200" cap="none" spc="0" normalizeH="0" baseline="0" noProof="0">
+              <a:t>セブンイレブンでは、多くの属性において、</a:t>
+            </a:r>
+            <a:r>
+              <a:rPr kumimoji="1" lang="ja-JP" altLang="en-US" sz="1600" b="1" i="0" u="none" strike="noStrike" kern="1200" cap="none" spc="0" normalizeH="0" baseline="0" noProof="0">
                 <a:ln>
                   <a:noFill/>
                 </a:ln>
@@ -32643,7 +32142,7 @@
               <a:t>「栄養バランスを調整したい」ニーズ</a:t>
             </a:r>
             <a:r>
-              <a:rPr kumimoji="1" lang="ja-JP" altLang="en-US" sz="1700" i="0" u="none" strike="noStrike" kern="1200" cap="none" spc="0" normalizeH="0" baseline="0" noProof="0">
+              <a:rPr kumimoji="1" lang="ja-JP" altLang="en-US" sz="1600" i="0" u="none" strike="noStrike" kern="1200" cap="none" spc="0" normalizeH="0" baseline="0" noProof="0">
                 <a:ln>
                   <a:noFill/>
                 </a:ln>
@@ -32663,7 +32162,7 @@
               <a:t>を解決する</a:t>
             </a:r>
             <a:r>
-              <a:rPr kumimoji="1" lang="ja-JP" altLang="en-US" sz="1700">
+              <a:rPr kumimoji="1" lang="ja-JP" altLang="en-US" sz="1600">
                 <a:solidFill>
                   <a:schemeClr val="tx1">
                     <a:lumMod val="75000"/>
@@ -32676,7 +32175,7 @@
               <a:t>ための</a:t>
             </a:r>
             <a:r>
-              <a:rPr kumimoji="1" lang="ja-JP" altLang="en-US" sz="1700" i="0" u="none" strike="noStrike" kern="1200" cap="none" spc="0" normalizeH="0" baseline="0" noProof="0">
+              <a:rPr kumimoji="1" lang="ja-JP" altLang="en-US" sz="1600" i="0" u="none" strike="noStrike" kern="1200" cap="none" spc="0" normalizeH="0" baseline="0" noProof="0">
                 <a:ln>
                   <a:noFill/>
                 </a:ln>
@@ -32695,7 +32194,7 @@
               </a:rPr>
               <a:t>「対応」が適切ではない</a:t>
             </a:r>
-            <a:endParaRPr kumimoji="1" lang="en-US" altLang="ja-JP" sz="1700" i="0" strike="noStrike" kern="1200" cap="none" spc="0" normalizeH="0" baseline="0" noProof="0" dirty="0">
+            <a:endParaRPr kumimoji="1" lang="en-US" altLang="ja-JP" sz="1600" i="0" strike="noStrike" kern="1200" cap="none" spc="0" normalizeH="0" baseline="0" noProof="0" dirty="0">
               <a:ln>
                 <a:noFill/>
               </a:ln>
@@ -32729,7 +32228,7 @@
         </p:nvSpPr>
         <p:spPr>
           <a:xfrm>
-            <a:off x="344129" y="1126271"/>
+            <a:off x="344129" y="1337285"/>
             <a:ext cx="8632807" cy="340221"/>
           </a:xfrm>
           <a:prstGeom prst="rect">
@@ -32900,48 +32399,12 @@
           </a:p>
         </p:txBody>
       </p:sp>
-    </p:spTree>
-    <p:extLst>
-      <p:ext uri="{BB962C8B-B14F-4D97-AF65-F5344CB8AC3E}">
-        <p14:creationId xmlns:p14="http://schemas.microsoft.com/office/powerpoint/2010/main" val="4136891514"/>
-      </p:ext>
-    </p:extLst>
-  </p:cSld>
-  <p:clrMapOvr>
-    <a:masterClrMapping/>
-  </p:clrMapOvr>
-</p:sld>
-</file>
-
-<file path=ppt/slides/slide14.xml><?xml version="1.0" encoding="utf-8"?>
-<p:sld xmlns:a="http://schemas.openxmlformats.org/drawingml/2006/main" xmlns:r="http://schemas.openxmlformats.org/officeDocument/2006/relationships" xmlns:p="http://schemas.openxmlformats.org/presentationml/2006/main">
-  <p:cSld>
-    <p:spTree>
-      <p:nvGrpSpPr>
-        <p:cNvPr id="1" name="">
-          <a:extLst>
-            <a:ext uri="{FF2B5EF4-FFF2-40B4-BE49-F238E27FC236}">
-              <a16:creationId xmlns:a16="http://schemas.microsoft.com/office/drawing/2014/main" id="{F0C99C6E-F7A2-7657-710F-D95F44CBCA2D}"/>
-            </a:ext>
-          </a:extLst>
-        </p:cNvPr>
-        <p:cNvGrpSpPr/>
-        <p:nvPr/>
-      </p:nvGrpSpPr>
-      <p:grpSpPr>
-        <a:xfrm>
-          <a:off x="0" y="0"/>
-          <a:ext cx="0" cy="0"/>
-          <a:chOff x="0" y="0"/>
-          <a:chExt cx="0" cy="0"/>
-        </a:xfrm>
-      </p:grpSpPr>
       <p:sp>
         <p:nvSpPr>
-          <p:cNvPr id="2" name="テキスト ボックス 1">
+          <p:cNvPr id="3" name="テキスト ボックス 2">
             <a:extLst>
               <a:ext uri="{FF2B5EF4-FFF2-40B4-BE49-F238E27FC236}">
-                <a16:creationId xmlns:a16="http://schemas.microsoft.com/office/drawing/2014/main" id="{B3427D4D-4E73-2067-96EB-164EE726EC96}"/>
+                <a16:creationId xmlns:a16="http://schemas.microsoft.com/office/drawing/2014/main" id="{B4BA5768-8615-90A4-E6DE-A064394A6984}"/>
               </a:ext>
             </a:extLst>
           </p:cNvPr>
@@ -32950,8 +32413,8 @@
         </p:nvSpPr>
         <p:spPr>
           <a:xfrm>
-            <a:off x="89935" y="568886"/>
-            <a:ext cx="8196146" cy="492230"/>
+            <a:off x="195442" y="437954"/>
+            <a:ext cx="8148157" cy="810266"/>
           </a:xfrm>
           <a:prstGeom prst="rect">
             <a:avLst/>
@@ -32982,9 +32445,95 @@
           </a:bodyPr>
           <a:lstStyle/>
           <a:p>
-            <a:pPr marL="0" marR="0" lvl="0" indent="66714" algn="l" defTabSz="438410" rtl="0" eaLnBrk="1" fontAlgn="auto" latinLnBrk="0" hangingPunct="0">
+            <a:pPr lvl="0" indent="66714" defTabSz="438410" hangingPunct="0">
               <a:lnSpc>
-                <a:spcPct val="100000"/>
+                <a:spcPts val="2460"/>
+              </a:lnSpc>
+              <a:defRPr/>
+            </a:pPr>
+            <a:r>
+              <a:rPr lang="ja-JP" altLang="en-US" b="1" spc="50">
+                <a:solidFill>
+                  <a:srgbClr val="42557A"/>
+                </a:solidFill>
+                <a:latin typeface="源ノ角ゴシック JP" panose="020B0500000000000000" pitchFamily="34" charset="-128"/>
+                <a:ea typeface="源ノ角ゴシック JP" panose="020B0500000000000000" pitchFamily="34" charset="-128"/>
+              </a:rPr>
+              <a:t>セブンイレブンでは、多くの属性において、栄養バランスへの「対応」の</a:t>
+            </a:r>
+            <a:endParaRPr lang="en-US" altLang="ja-JP" b="1" spc="50" dirty="0">
+              <a:solidFill>
+                <a:srgbClr val="42557A"/>
+              </a:solidFill>
+              <a:latin typeface="源ノ角ゴシック JP" panose="020B0500000000000000" pitchFamily="34" charset="-128"/>
+              <a:ea typeface="源ノ角ゴシック JP" panose="020B0500000000000000" pitchFamily="34" charset="-128"/>
+            </a:endParaRPr>
+          </a:p>
+          <a:p>
+            <a:pPr lvl="0" indent="66714" defTabSz="438410" hangingPunct="0">
+              <a:lnSpc>
+                <a:spcPts val="2460"/>
+              </a:lnSpc>
+              <a:defRPr/>
+            </a:pPr>
+            <a:r>
+              <a:rPr lang="ja-JP" altLang="en-US" b="1" spc="50">
+                <a:solidFill>
+                  <a:srgbClr val="42557A"/>
+                </a:solidFill>
+                <a:latin typeface="源ノ角ゴシック JP" panose="020B0500000000000000" pitchFamily="34" charset="-128"/>
+                <a:ea typeface="源ノ角ゴシック JP" panose="020B0500000000000000" pitchFamily="34" charset="-128"/>
+              </a:rPr>
+              <a:t>適切さが低い</a:t>
+            </a:r>
+            <a:endParaRPr kumimoji="0" lang="en-US" altLang="ja-JP" b="1" i="0" u="none" strike="noStrike" kern="1200" cap="none" spc="50" normalizeH="0" baseline="0" noProof="0" dirty="0">
+              <a:ln>
+                <a:noFill/>
+              </a:ln>
+              <a:solidFill>
+                <a:srgbClr val="42557A"/>
+              </a:solidFill>
+              <a:effectLst/>
+              <a:uLnTx/>
+              <a:uFillTx/>
+              <a:latin typeface="源ノ角ゴシック JP" panose="020B0500000000000000" pitchFamily="34" charset="-128"/>
+              <a:ea typeface="源ノ角ゴシック JP" panose="020B0500000000000000" pitchFamily="34" charset="-128"/>
+              <a:cs typeface="+mn-cs"/>
+            </a:endParaRPr>
+          </a:p>
+        </p:txBody>
+      </p:sp>
+      <p:sp>
+        <p:nvSpPr>
+          <p:cNvPr id="16" name="テキスト ボックス 15">
+            <a:extLst>
+              <a:ext uri="{FF2B5EF4-FFF2-40B4-BE49-F238E27FC236}">
+                <a16:creationId xmlns:a16="http://schemas.microsoft.com/office/drawing/2014/main" id="{7993DD5A-5F20-42EB-5987-2CBEBC0B7369}"/>
+              </a:ext>
+            </a:extLst>
+          </p:cNvPr>
+          <p:cNvSpPr txBox="1"/>
+          <p:nvPr/>
+        </p:nvSpPr>
+        <p:spPr>
+          <a:xfrm>
+            <a:off x="719759" y="5997572"/>
+            <a:ext cx="7377658" cy="362472"/>
+          </a:xfrm>
+          <a:prstGeom prst="rect">
+            <a:avLst/>
+          </a:prstGeom>
+          <a:noFill/>
+        </p:spPr>
+        <p:txBody>
+          <a:bodyPr wrap="square">
+            <a:spAutoFit/>
+          </a:bodyPr>
+          <a:lstStyle/>
+          <a:p>
+            <a:pPr marL="0" marR="0" lvl="0" indent="0" algn="l" defTabSz="457200" rtl="0" eaLnBrk="1" fontAlgn="auto" latinLnBrk="0" hangingPunct="1">
+              <a:lnSpc>
+                <a:spcPts val="2280"/>
               </a:lnSpc>
               <a:spcBef>
                 <a:spcPts val="0"/>
@@ -33000,28 +32549,21 @@
               <a:defRPr/>
             </a:pPr>
             <a:r>
-              <a:rPr kumimoji="0" lang="ja-JP" altLang="en-US" sz="2000" b="1" i="0" u="none" strike="noStrike" kern="1200" cap="none" spc="50" normalizeH="0" baseline="0" noProof="0">
-                <a:ln>
-                  <a:noFill/>
-                </a:ln>
-                <a:solidFill>
-                  <a:srgbClr val="42557A"/>
-                </a:solidFill>
-                <a:effectLst/>
-                <a:uLnTx/>
-                <a:uFillTx/>
+              <a:rPr kumimoji="1" lang="ja-JP" altLang="en-US" sz="1600">
+                <a:solidFill>
+                  <a:srgbClr val="C00000"/>
+                </a:solidFill>
                 <a:latin typeface="源ノ角ゴシック JP" panose="020B0500000000000000" pitchFamily="34" charset="-128"/>
                 <a:ea typeface="源ノ角ゴシック JP" panose="020B0500000000000000" pitchFamily="34" charset="-128"/>
-                <a:cs typeface="+mn-cs"/>
               </a:rPr>
-              <a:t>「対応」の適切さを評価する</a:t>
-            </a:r>
-            <a:endParaRPr kumimoji="0" lang="en-US" altLang="ja-JP" sz="2000" b="1" i="0" u="none" strike="noStrike" kern="1200" cap="none" spc="50" normalizeH="0" baseline="0" noProof="0" dirty="0">
+              <a:t>→ 他社では、適切さが高いため、この点は重視すべきである</a:t>
+            </a:r>
+            <a:endParaRPr kumimoji="1" lang="en-US" altLang="ja-JP" sz="1600" i="0" strike="noStrike" kern="1200" cap="none" spc="0" normalizeH="0" baseline="0" noProof="0" dirty="0">
               <a:ln>
                 <a:noFill/>
               </a:ln>
               <a:solidFill>
-                <a:srgbClr val="42557A"/>
+                <a:srgbClr val="C00000"/>
               </a:solidFill>
               <a:effectLst/>
               <a:uLnTx/>
@@ -33033,375 +32575,141 @@
           </a:p>
         </p:txBody>
       </p:sp>
-      <p:grpSp>
-        <p:nvGrpSpPr>
-          <p:cNvPr id="20" name="グループ化 19">
+    </p:spTree>
+    <p:extLst>
+      <p:ext uri="{BB962C8B-B14F-4D97-AF65-F5344CB8AC3E}">
+        <p14:creationId xmlns:p14="http://schemas.microsoft.com/office/powerpoint/2010/main" val="4136891514"/>
+      </p:ext>
+    </p:extLst>
+  </p:cSld>
+  <p:clrMapOvr>
+    <a:masterClrMapping/>
+  </p:clrMapOvr>
+</p:sld>
+</file>
+
+<file path=ppt/slides/slide14.xml><?xml version="1.0" encoding="utf-8"?>
+<p:sld xmlns:a="http://schemas.openxmlformats.org/drawingml/2006/main" xmlns:r="http://schemas.openxmlformats.org/officeDocument/2006/relationships" xmlns:p="http://schemas.openxmlformats.org/presentationml/2006/main">
+  <p:cSld>
+    <p:spTree>
+      <p:nvGrpSpPr>
+        <p:cNvPr id="1" name="">
+          <a:extLst>
+            <a:ext uri="{FF2B5EF4-FFF2-40B4-BE49-F238E27FC236}">
+              <a16:creationId xmlns:a16="http://schemas.microsoft.com/office/drawing/2014/main" id="{7BE75F70-5DC5-A143-0865-53DEB1E87C7B}"/>
+            </a:ext>
+          </a:extLst>
+        </p:cNvPr>
+        <p:cNvGrpSpPr/>
+        <p:nvPr/>
+      </p:nvGrpSpPr>
+      <p:grpSpPr>
+        <a:xfrm>
+          <a:off x="0" y="0"/>
+          <a:ext cx="0" cy="0"/>
+          <a:chOff x="0" y="0"/>
+          <a:chExt cx="0" cy="0"/>
+        </a:xfrm>
+      </p:grpSpPr>
+      <p:pic>
+        <p:nvPicPr>
+          <p:cNvPr id="17" name="図 16">
             <a:extLst>
               <a:ext uri="{FF2B5EF4-FFF2-40B4-BE49-F238E27FC236}">
-                <a16:creationId xmlns:a16="http://schemas.microsoft.com/office/drawing/2014/main" id="{0F75CB39-252F-0AC9-571F-2EE93C266022}"/>
+                <a16:creationId xmlns:a16="http://schemas.microsoft.com/office/drawing/2014/main" id="{9695CA6E-2BBD-6D76-47ED-C3F0BF7BA463}"/>
               </a:ext>
             </a:extLst>
           </p:cNvPr>
-          <p:cNvGrpSpPr/>
+          <p:cNvPicPr>
+            <a:picLocks noChangeAspect="1"/>
+          </p:cNvPicPr>
           <p:nvPr/>
-        </p:nvGrpSpPr>
-        <p:grpSpPr>
+        </p:nvPicPr>
+        <p:blipFill>
+          <a:blip r:embed="rId2"/>
+          <a:srcRect l="1615" t="12003" r="1473" b="10675"/>
+          <a:stretch>
+            <a:fillRect/>
+          </a:stretch>
+        </p:blipFill>
+        <p:spPr>
           <a:xfrm>
-            <a:off x="344128" y="1729435"/>
-            <a:ext cx="8455741" cy="903008"/>
-            <a:chOff x="344128" y="1729435"/>
-            <a:chExt cx="8455741" cy="903008"/>
+            <a:off x="344126" y="4292753"/>
+            <a:ext cx="8455741" cy="549364"/>
           </a:xfrm>
-        </p:grpSpPr>
-        <p:pic>
-          <p:nvPicPr>
-            <p:cNvPr id="3" name="図 2">
-              <a:extLst>
-                <a:ext uri="{FF2B5EF4-FFF2-40B4-BE49-F238E27FC236}">
-                  <a16:creationId xmlns:a16="http://schemas.microsoft.com/office/drawing/2014/main" id="{A71EDCE7-1010-F29F-9D85-CB946D6B8369}"/>
-                </a:ext>
-              </a:extLst>
-            </p:cNvPr>
-            <p:cNvPicPr>
-              <a:picLocks noChangeAspect="1"/>
-            </p:cNvPicPr>
-            <p:nvPr/>
-          </p:nvPicPr>
-          <p:blipFill>
-            <a:blip r:embed="rId2"/>
-            <a:srcRect l="1615" t="12003" r="1473" b="10675"/>
-            <a:stretch>
-              <a:fillRect/>
-            </a:stretch>
-          </p:blipFill>
-          <p:spPr>
-            <a:xfrm>
-              <a:off x="344128" y="2083079"/>
-              <a:ext cx="8455741" cy="549364"/>
-            </a:xfrm>
-            <a:prstGeom prst="rect">
-              <a:avLst/>
-            </a:prstGeom>
-          </p:spPr>
-        </p:pic>
-        <p:sp>
-          <p:nvSpPr>
-            <p:cNvPr id="7" name="テキスト ボックス 6">
-              <a:extLst>
-                <a:ext uri="{FF2B5EF4-FFF2-40B4-BE49-F238E27FC236}">
-                  <a16:creationId xmlns:a16="http://schemas.microsoft.com/office/drawing/2014/main" id="{6D9ACFB5-FBF1-D22D-ACE6-F72EA0E2820E}"/>
-                </a:ext>
-              </a:extLst>
-            </p:cNvPr>
-            <p:cNvSpPr txBox="1"/>
-            <p:nvPr/>
-          </p:nvSpPr>
-          <p:spPr>
-            <a:xfrm>
-              <a:off x="344129" y="1729435"/>
-              <a:ext cx="1632688" cy="333681"/>
-            </a:xfrm>
-            <a:prstGeom prst="rect">
-              <a:avLst/>
-            </a:prstGeom>
-            <a:noFill/>
-          </p:spPr>
-          <p:txBody>
-            <a:bodyPr wrap="square">
-              <a:spAutoFit/>
-            </a:bodyPr>
-            <a:lstStyle/>
-            <a:p>
-              <a:pPr marL="0" marR="0" lvl="0" indent="0" algn="l" defTabSz="457200" rtl="0" eaLnBrk="1" fontAlgn="auto" latinLnBrk="0" hangingPunct="1">
-                <a:lnSpc>
-                  <a:spcPts val="2020"/>
-                </a:lnSpc>
-                <a:spcBef>
-                  <a:spcPts val="0"/>
-                </a:spcBef>
-                <a:spcAft>
-                  <a:spcPts val="0"/>
-                </a:spcAft>
-                <a:buClrTx/>
-                <a:buSzTx/>
-                <a:buFontTx/>
-                <a:buNone/>
-                <a:tabLst/>
-                <a:defRPr/>
-              </a:pPr>
-              <a:r>
-                <a:rPr kumimoji="1" lang="ja-JP" altLang="en-US" sz="1400" b="1">
-                  <a:solidFill>
-                    <a:schemeClr val="bg2">
-                      <a:lumMod val="25000"/>
-                    </a:schemeClr>
-                  </a:solidFill>
-                  <a:latin typeface="源ノ角ゴシック JP" panose="020B0500000000000000" pitchFamily="34" charset="-128"/>
-                  <a:ea typeface="源ノ角ゴシック JP" panose="020B0500000000000000" pitchFamily="34" charset="-128"/>
-                </a:rPr>
-                <a:t>セブンイレブン</a:t>
-              </a:r>
-              <a:endParaRPr kumimoji="1" lang="en-US" altLang="ja-JP" sz="1400" b="1" dirty="0">
-                <a:solidFill>
-                  <a:schemeClr val="bg2">
-                    <a:lumMod val="25000"/>
-                  </a:schemeClr>
-                </a:solidFill>
-                <a:latin typeface="源ノ角ゴシック JP" panose="020B0500000000000000" pitchFamily="34" charset="-128"/>
-                <a:ea typeface="源ノ角ゴシック JP" panose="020B0500000000000000" pitchFamily="34" charset="-128"/>
-              </a:endParaRPr>
-            </a:p>
-          </p:txBody>
-        </p:sp>
-      </p:grpSp>
-      <p:grpSp>
-        <p:nvGrpSpPr>
-          <p:cNvPr id="19" name="グループ化 18">
+          <a:prstGeom prst="rect">
+            <a:avLst/>
+          </a:prstGeom>
+        </p:spPr>
+      </p:pic>
+      <p:pic>
+        <p:nvPicPr>
+          <p:cNvPr id="15" name="図 14">
             <a:extLst>
               <a:ext uri="{FF2B5EF4-FFF2-40B4-BE49-F238E27FC236}">
-                <a16:creationId xmlns:a16="http://schemas.microsoft.com/office/drawing/2014/main" id="{D527D429-51DD-2D73-93EC-920483EE5D22}"/>
+                <a16:creationId xmlns:a16="http://schemas.microsoft.com/office/drawing/2014/main" id="{6F1E8657-84CB-7A0F-9A69-5F67C1AB8819}"/>
               </a:ext>
             </a:extLst>
           </p:cNvPr>
-          <p:cNvGrpSpPr/>
+          <p:cNvPicPr>
+            <a:picLocks noChangeAspect="1"/>
+          </p:cNvPicPr>
           <p:nvPr/>
-        </p:nvGrpSpPr>
-        <p:grpSpPr>
+        </p:nvPicPr>
+        <p:blipFill>
+          <a:blip r:embed="rId2"/>
+          <a:srcRect l="1615" t="12003" r="1473" b="10675"/>
+          <a:stretch>
+            <a:fillRect/>
+          </a:stretch>
+        </p:blipFill>
+        <p:spPr>
           <a:xfrm>
-            <a:off x="344127" y="2961609"/>
-            <a:ext cx="8455741" cy="881998"/>
-            <a:chOff x="344127" y="2961609"/>
-            <a:chExt cx="8455741" cy="881998"/>
+            <a:off x="344126" y="3218444"/>
+            <a:ext cx="8455741" cy="549364"/>
           </a:xfrm>
-        </p:grpSpPr>
-        <p:pic>
-          <p:nvPicPr>
-            <p:cNvPr id="16" name="図 15">
-              <a:extLst>
-                <a:ext uri="{FF2B5EF4-FFF2-40B4-BE49-F238E27FC236}">
-                  <a16:creationId xmlns:a16="http://schemas.microsoft.com/office/drawing/2014/main" id="{7E825DF8-B0BF-32AE-1600-D09EA48E46F1}"/>
-                </a:ext>
-              </a:extLst>
-            </p:cNvPr>
-            <p:cNvPicPr>
-              <a:picLocks noChangeAspect="1"/>
-            </p:cNvPicPr>
-            <p:nvPr/>
-          </p:nvPicPr>
-          <p:blipFill>
-            <a:blip r:embed="rId2"/>
-            <a:srcRect l="1615" t="12003" r="1473" b="10675"/>
-            <a:stretch>
-              <a:fillRect/>
-            </a:stretch>
-          </p:blipFill>
-          <p:spPr>
-            <a:xfrm>
-              <a:off x="344127" y="3294243"/>
-              <a:ext cx="8455741" cy="549364"/>
-            </a:xfrm>
-            <a:prstGeom prst="rect">
-              <a:avLst/>
-            </a:prstGeom>
-          </p:spPr>
-        </p:pic>
-        <p:sp>
-          <p:nvSpPr>
-            <p:cNvPr id="8" name="テキスト ボックス 7">
-              <a:extLst>
-                <a:ext uri="{FF2B5EF4-FFF2-40B4-BE49-F238E27FC236}">
-                  <a16:creationId xmlns:a16="http://schemas.microsoft.com/office/drawing/2014/main" id="{585D20F8-5DC8-8F91-D1A9-A07D6C2E5C1A}"/>
-                </a:ext>
-              </a:extLst>
-            </p:cNvPr>
-            <p:cNvSpPr txBox="1"/>
-            <p:nvPr/>
-          </p:nvSpPr>
-          <p:spPr>
-            <a:xfrm>
-              <a:off x="344129" y="2961609"/>
-              <a:ext cx="1632688" cy="333681"/>
-            </a:xfrm>
-            <a:prstGeom prst="rect">
-              <a:avLst/>
-            </a:prstGeom>
-            <a:noFill/>
-          </p:spPr>
-          <p:txBody>
-            <a:bodyPr wrap="square">
-              <a:spAutoFit/>
-            </a:bodyPr>
-            <a:lstStyle/>
-            <a:p>
-              <a:pPr marL="0" marR="0" lvl="0" indent="0" algn="l" defTabSz="457200" rtl="0" eaLnBrk="1" fontAlgn="auto" latinLnBrk="0" hangingPunct="1">
-                <a:lnSpc>
-                  <a:spcPts val="2020"/>
-                </a:lnSpc>
-                <a:spcBef>
-                  <a:spcPts val="0"/>
-                </a:spcBef>
-                <a:spcAft>
-                  <a:spcPts val="0"/>
-                </a:spcAft>
-                <a:buClrTx/>
-                <a:buSzTx/>
-                <a:buFontTx/>
-                <a:buNone/>
-                <a:tabLst/>
-                <a:defRPr/>
-              </a:pPr>
-              <a:r>
-                <a:rPr kumimoji="1" lang="ja-JP" altLang="en-US" sz="1400" b="1">
-                  <a:solidFill>
-                    <a:schemeClr val="bg2">
-                      <a:lumMod val="25000"/>
-                    </a:schemeClr>
-                  </a:solidFill>
-                  <a:latin typeface="源ノ角ゴシック JP" panose="020B0500000000000000" pitchFamily="34" charset="-128"/>
-                  <a:ea typeface="源ノ角ゴシック JP" panose="020B0500000000000000" pitchFamily="34" charset="-128"/>
-                </a:rPr>
-                <a:t>ローソン</a:t>
-              </a:r>
-              <a:endParaRPr kumimoji="1" lang="en-US" altLang="ja-JP" sz="1400" b="1" dirty="0">
-                <a:solidFill>
-                  <a:schemeClr val="bg2">
-                    <a:lumMod val="25000"/>
-                  </a:schemeClr>
-                </a:solidFill>
-                <a:latin typeface="源ノ角ゴシック JP" panose="020B0500000000000000" pitchFamily="34" charset="-128"/>
-                <a:ea typeface="源ノ角ゴシック JP" panose="020B0500000000000000" pitchFamily="34" charset="-128"/>
-              </a:endParaRPr>
-            </a:p>
-          </p:txBody>
-        </p:sp>
-      </p:grpSp>
-      <p:grpSp>
-        <p:nvGrpSpPr>
-          <p:cNvPr id="18" name="グループ化 17">
+          <a:prstGeom prst="rect">
+            <a:avLst/>
+          </a:prstGeom>
+        </p:spPr>
+      </p:pic>
+      <p:pic>
+        <p:nvPicPr>
+          <p:cNvPr id="2" name="図 1">
             <a:extLst>
               <a:ext uri="{FF2B5EF4-FFF2-40B4-BE49-F238E27FC236}">
-                <a16:creationId xmlns:a16="http://schemas.microsoft.com/office/drawing/2014/main" id="{2BBC5378-AF10-812E-4ACB-C47D4E8066F3}"/>
+                <a16:creationId xmlns:a16="http://schemas.microsoft.com/office/drawing/2014/main" id="{8E874A78-7D75-7194-1AE4-50A7F64245C5}"/>
               </a:ext>
             </a:extLst>
           </p:cNvPr>
-          <p:cNvGrpSpPr/>
+          <p:cNvPicPr>
+            <a:picLocks noChangeAspect="1"/>
+          </p:cNvPicPr>
           <p:nvPr/>
-        </p:nvGrpSpPr>
-        <p:grpSpPr>
+        </p:nvPicPr>
+        <p:blipFill>
+          <a:blip r:embed="rId2"/>
+          <a:srcRect l="1615" t="12003" r="1473" b="10675"/>
+          <a:stretch>
+            <a:fillRect/>
+          </a:stretch>
+        </p:blipFill>
+        <p:spPr>
           <a:xfrm>
-            <a:off x="344126" y="4172773"/>
-            <a:ext cx="8455741" cy="896457"/>
-            <a:chOff x="344126" y="4172773"/>
-            <a:chExt cx="8455741" cy="896457"/>
+            <a:off x="344127" y="2129676"/>
+            <a:ext cx="8455741" cy="549364"/>
           </a:xfrm>
-        </p:grpSpPr>
-        <p:pic>
-          <p:nvPicPr>
-            <p:cNvPr id="17" name="図 16">
-              <a:extLst>
-                <a:ext uri="{FF2B5EF4-FFF2-40B4-BE49-F238E27FC236}">
-                  <a16:creationId xmlns:a16="http://schemas.microsoft.com/office/drawing/2014/main" id="{C1CF37D4-1546-A7B8-F50E-EBCE6CF1DF0F}"/>
-                </a:ext>
-              </a:extLst>
-            </p:cNvPr>
-            <p:cNvPicPr>
-              <a:picLocks noChangeAspect="1"/>
-            </p:cNvPicPr>
-            <p:nvPr/>
-          </p:nvPicPr>
-          <p:blipFill>
-            <a:blip r:embed="rId2"/>
-            <a:srcRect l="1615" t="12003" r="1473" b="10675"/>
-            <a:stretch>
-              <a:fillRect/>
-            </a:stretch>
-          </p:blipFill>
-          <p:spPr>
-            <a:xfrm>
-              <a:off x="344126" y="4519866"/>
-              <a:ext cx="8455741" cy="549364"/>
-            </a:xfrm>
-            <a:prstGeom prst="rect">
-              <a:avLst/>
-            </a:prstGeom>
-          </p:spPr>
-        </p:pic>
-        <p:sp>
-          <p:nvSpPr>
-            <p:cNvPr id="9" name="テキスト ボックス 8">
-              <a:extLst>
-                <a:ext uri="{FF2B5EF4-FFF2-40B4-BE49-F238E27FC236}">
-                  <a16:creationId xmlns:a16="http://schemas.microsoft.com/office/drawing/2014/main" id="{616836E7-268F-433B-D56C-B79CE77683FD}"/>
-                </a:ext>
-              </a:extLst>
-            </p:cNvPr>
-            <p:cNvSpPr txBox="1"/>
-            <p:nvPr/>
-          </p:nvSpPr>
-          <p:spPr>
-            <a:xfrm>
-              <a:off x="344129" y="4172773"/>
-              <a:ext cx="1632688" cy="333681"/>
-            </a:xfrm>
-            <a:prstGeom prst="rect">
-              <a:avLst/>
-            </a:prstGeom>
-            <a:noFill/>
-          </p:spPr>
-          <p:txBody>
-            <a:bodyPr wrap="square">
-              <a:spAutoFit/>
-            </a:bodyPr>
-            <a:lstStyle/>
-            <a:p>
-              <a:pPr marL="0" marR="0" lvl="0" indent="0" algn="l" defTabSz="457200" rtl="0" eaLnBrk="1" fontAlgn="auto" latinLnBrk="0" hangingPunct="1">
-                <a:lnSpc>
-                  <a:spcPts val="2020"/>
-                </a:lnSpc>
-                <a:spcBef>
-                  <a:spcPts val="0"/>
-                </a:spcBef>
-                <a:spcAft>
-                  <a:spcPts val="0"/>
-                </a:spcAft>
-                <a:buClrTx/>
-                <a:buSzTx/>
-                <a:buFontTx/>
-                <a:buNone/>
-                <a:tabLst/>
-                <a:defRPr/>
-              </a:pPr>
-              <a:r>
-                <a:rPr kumimoji="1" lang="ja-JP" altLang="en-US" sz="1400" b="1">
-                  <a:solidFill>
-                    <a:schemeClr val="bg2">
-                      <a:lumMod val="25000"/>
-                    </a:schemeClr>
-                  </a:solidFill>
-                  <a:latin typeface="源ノ角ゴシック JP" panose="020B0500000000000000" pitchFamily="34" charset="-128"/>
-                  <a:ea typeface="源ノ角ゴシック JP" panose="020B0500000000000000" pitchFamily="34" charset="-128"/>
-                </a:rPr>
-                <a:t>ファミリーマート</a:t>
-              </a:r>
-              <a:endParaRPr kumimoji="1" lang="en-US" altLang="ja-JP" sz="1400" b="1" dirty="0">
-                <a:solidFill>
-                  <a:schemeClr val="bg2">
-                    <a:lumMod val="25000"/>
-                  </a:schemeClr>
-                </a:solidFill>
-                <a:latin typeface="源ノ角ゴシック JP" panose="020B0500000000000000" pitchFamily="34" charset="-128"/>
-                <a:ea typeface="源ノ角ゴシック JP" panose="020B0500000000000000" pitchFamily="34" charset="-128"/>
-              </a:endParaRPr>
-            </a:p>
-          </p:txBody>
-        </p:sp>
-      </p:grpSp>
+          <a:prstGeom prst="rect">
+            <a:avLst/>
+          </a:prstGeom>
+        </p:spPr>
+      </p:pic>
       <p:sp>
         <p:nvSpPr>
-          <p:cNvPr id="10" name="テキスト ボックス 9">
+          <p:cNvPr id="7" name="テキスト ボックス 6">
             <a:extLst>
               <a:ext uri="{FF2B5EF4-FFF2-40B4-BE49-F238E27FC236}">
-                <a16:creationId xmlns:a16="http://schemas.microsoft.com/office/drawing/2014/main" id="{3E473927-B90B-5525-BBD9-28C85F803817}"/>
+                <a16:creationId xmlns:a16="http://schemas.microsoft.com/office/drawing/2014/main" id="{309F2C21-FFD6-E4FA-0182-AFCC1EF8D497}"/>
               </a:ext>
             </a:extLst>
           </p:cNvPr>
@@ -33410,8 +32718,8 @@
         </p:nvSpPr>
         <p:spPr>
           <a:xfrm>
-            <a:off x="1759920" y="5731030"/>
-            <a:ext cx="5624152" cy="384785"/>
+            <a:off x="344127" y="1789444"/>
+            <a:ext cx="1632688" cy="333681"/>
           </a:xfrm>
           <a:prstGeom prst="rect">
             <a:avLst/>
@@ -33426,7 +32734,7 @@
           <a:p>
             <a:pPr marL="0" marR="0" lvl="0" indent="0" algn="l" defTabSz="457200" rtl="0" eaLnBrk="1" fontAlgn="auto" latinLnBrk="0" hangingPunct="1">
               <a:lnSpc>
-                <a:spcPts val="2480"/>
+                <a:spcPts val="2020"/>
               </a:lnSpc>
               <a:spcBef>
                 <a:spcPts val="0"/>
@@ -33442,51 +32750,35 @@
               <a:defRPr/>
             </a:pPr>
             <a:r>
-              <a:rPr kumimoji="1" lang="ja-JP" altLang="en-US" sz="1700" i="0" u="none" strike="noStrike" kern="1200" cap="none" spc="0" normalizeH="0" baseline="0" noProof="0">
-                <a:ln>
-                  <a:noFill/>
-                </a:ln>
-                <a:solidFill>
-                  <a:schemeClr val="tx1">
-                    <a:lumMod val="75000"/>
-                    <a:lumOff val="25000"/>
+              <a:rPr kumimoji="1" lang="ja-JP" altLang="en-US" sz="1400" b="1">
+                <a:solidFill>
+                  <a:schemeClr val="bg2">
+                    <a:lumMod val="25000"/>
                   </a:schemeClr>
                 </a:solidFill>
-                <a:effectLst/>
-                <a:uLnTx/>
-                <a:uFillTx/>
                 <a:latin typeface="源ノ角ゴシック JP" panose="020B0500000000000000" pitchFamily="34" charset="-128"/>
                 <a:ea typeface="源ノ角ゴシック JP" panose="020B0500000000000000" pitchFamily="34" charset="-128"/>
-                <a:cs typeface="+mn-cs"/>
               </a:rPr>
-              <a:t>セブンイレブンは、他社と比較して、大きな違いはない</a:t>
-            </a:r>
-            <a:endParaRPr kumimoji="1" lang="en-US" altLang="ja-JP" sz="1700" i="0" strike="noStrike" kern="1200" cap="none" spc="0" normalizeH="0" baseline="0" noProof="0" dirty="0">
-              <a:ln>
-                <a:noFill/>
-              </a:ln>
+              <a:t>セブンイレブン</a:t>
+            </a:r>
+            <a:endParaRPr kumimoji="1" lang="en-US" altLang="ja-JP" sz="1400" b="1" dirty="0">
               <a:solidFill>
-                <a:schemeClr val="tx1">
-                  <a:lumMod val="75000"/>
-                  <a:lumOff val="25000"/>
+                <a:schemeClr val="bg2">
+                  <a:lumMod val="25000"/>
                 </a:schemeClr>
               </a:solidFill>
-              <a:effectLst/>
-              <a:uLnTx/>
-              <a:uFillTx/>
               <a:latin typeface="源ノ角ゴシック JP" panose="020B0500000000000000" pitchFamily="34" charset="-128"/>
               <a:ea typeface="源ノ角ゴシック JP" panose="020B0500000000000000" pitchFamily="34" charset="-128"/>
-              <a:cs typeface="+mn-cs"/>
             </a:endParaRPr>
           </a:p>
         </p:txBody>
       </p:sp>
       <p:sp>
         <p:nvSpPr>
-          <p:cNvPr id="11" name="テキスト ボックス 10">
+          <p:cNvPr id="8" name="テキスト ボックス 7">
             <a:extLst>
               <a:ext uri="{FF2B5EF4-FFF2-40B4-BE49-F238E27FC236}">
-                <a16:creationId xmlns:a16="http://schemas.microsoft.com/office/drawing/2014/main" id="{5E6BC24B-B5D5-7D94-1335-9B2C9713A385}"/>
+                <a16:creationId xmlns:a16="http://schemas.microsoft.com/office/drawing/2014/main" id="{B7014402-F949-01FF-4CBB-F3AA77DAE992}"/>
               </a:ext>
             </a:extLst>
           </p:cNvPr>
@@ -33495,7 +32787,145 @@
         </p:nvSpPr>
         <p:spPr>
           <a:xfrm>
-            <a:off x="344129" y="1126271"/>
+            <a:off x="344127" y="2884763"/>
+            <a:ext cx="1632688" cy="333681"/>
+          </a:xfrm>
+          <a:prstGeom prst="rect">
+            <a:avLst/>
+          </a:prstGeom>
+          <a:noFill/>
+        </p:spPr>
+        <p:txBody>
+          <a:bodyPr wrap="square">
+            <a:spAutoFit/>
+          </a:bodyPr>
+          <a:lstStyle/>
+          <a:p>
+            <a:pPr marL="0" marR="0" lvl="0" indent="0" algn="l" defTabSz="457200" rtl="0" eaLnBrk="1" fontAlgn="auto" latinLnBrk="0" hangingPunct="1">
+              <a:lnSpc>
+                <a:spcPts val="2020"/>
+              </a:lnSpc>
+              <a:spcBef>
+                <a:spcPts val="0"/>
+              </a:spcBef>
+              <a:spcAft>
+                <a:spcPts val="0"/>
+              </a:spcAft>
+              <a:buClrTx/>
+              <a:buSzTx/>
+              <a:buFontTx/>
+              <a:buNone/>
+              <a:tabLst/>
+              <a:defRPr/>
+            </a:pPr>
+            <a:r>
+              <a:rPr kumimoji="1" lang="ja-JP" altLang="en-US" sz="1400" b="1">
+                <a:solidFill>
+                  <a:schemeClr val="bg2">
+                    <a:lumMod val="25000"/>
+                  </a:schemeClr>
+                </a:solidFill>
+                <a:latin typeface="源ノ角ゴシック JP" panose="020B0500000000000000" pitchFamily="34" charset="-128"/>
+                <a:ea typeface="源ノ角ゴシック JP" panose="020B0500000000000000" pitchFamily="34" charset="-128"/>
+              </a:rPr>
+              <a:t>ローソン</a:t>
+            </a:r>
+            <a:endParaRPr kumimoji="1" lang="en-US" altLang="ja-JP" sz="1400" b="1" dirty="0">
+              <a:solidFill>
+                <a:schemeClr val="bg2">
+                  <a:lumMod val="25000"/>
+                </a:schemeClr>
+              </a:solidFill>
+              <a:latin typeface="源ノ角ゴシック JP" panose="020B0500000000000000" pitchFamily="34" charset="-128"/>
+              <a:ea typeface="源ノ角ゴシック JP" panose="020B0500000000000000" pitchFamily="34" charset="-128"/>
+            </a:endParaRPr>
+          </a:p>
+        </p:txBody>
+      </p:sp>
+      <p:sp>
+        <p:nvSpPr>
+          <p:cNvPr id="9" name="テキスト ボックス 8">
+            <a:extLst>
+              <a:ext uri="{FF2B5EF4-FFF2-40B4-BE49-F238E27FC236}">
+                <a16:creationId xmlns:a16="http://schemas.microsoft.com/office/drawing/2014/main" id="{AD6267E3-B60F-F015-A3EF-CB0D987E119E}"/>
+              </a:ext>
+            </a:extLst>
+          </p:cNvPr>
+          <p:cNvSpPr txBox="1"/>
+          <p:nvPr/>
+        </p:nvSpPr>
+        <p:spPr>
+          <a:xfrm>
+            <a:off x="344127" y="3959072"/>
+            <a:ext cx="1632688" cy="333681"/>
+          </a:xfrm>
+          <a:prstGeom prst="rect">
+            <a:avLst/>
+          </a:prstGeom>
+          <a:noFill/>
+        </p:spPr>
+        <p:txBody>
+          <a:bodyPr wrap="square">
+            <a:spAutoFit/>
+          </a:bodyPr>
+          <a:lstStyle/>
+          <a:p>
+            <a:pPr marL="0" marR="0" lvl="0" indent="0" algn="l" defTabSz="457200" rtl="0" eaLnBrk="1" fontAlgn="auto" latinLnBrk="0" hangingPunct="1">
+              <a:lnSpc>
+                <a:spcPts val="2020"/>
+              </a:lnSpc>
+              <a:spcBef>
+                <a:spcPts val="0"/>
+              </a:spcBef>
+              <a:spcAft>
+                <a:spcPts val="0"/>
+              </a:spcAft>
+              <a:buClrTx/>
+              <a:buSzTx/>
+              <a:buFontTx/>
+              <a:buNone/>
+              <a:tabLst/>
+              <a:defRPr/>
+            </a:pPr>
+            <a:r>
+              <a:rPr kumimoji="1" lang="ja-JP" altLang="en-US" sz="1400" b="1">
+                <a:solidFill>
+                  <a:schemeClr val="bg2">
+                    <a:lumMod val="25000"/>
+                  </a:schemeClr>
+                </a:solidFill>
+                <a:latin typeface="源ノ角ゴシック JP" panose="020B0500000000000000" pitchFamily="34" charset="-128"/>
+                <a:ea typeface="源ノ角ゴシック JP" panose="020B0500000000000000" pitchFamily="34" charset="-128"/>
+              </a:rPr>
+              <a:t>ファミリーマート</a:t>
+            </a:r>
+            <a:endParaRPr kumimoji="1" lang="en-US" altLang="ja-JP" sz="1400" b="1" dirty="0">
+              <a:solidFill>
+                <a:schemeClr val="bg2">
+                  <a:lumMod val="25000"/>
+                </a:schemeClr>
+              </a:solidFill>
+              <a:latin typeface="源ノ角ゴシック JP" panose="020B0500000000000000" pitchFamily="34" charset="-128"/>
+              <a:ea typeface="源ノ角ゴシック JP" panose="020B0500000000000000" pitchFamily="34" charset="-128"/>
+            </a:endParaRPr>
+          </a:p>
+        </p:txBody>
+      </p:sp>
+      <p:sp>
+        <p:nvSpPr>
+          <p:cNvPr id="11" name="テキスト ボックス 10">
+            <a:extLst>
+              <a:ext uri="{FF2B5EF4-FFF2-40B4-BE49-F238E27FC236}">
+                <a16:creationId xmlns:a16="http://schemas.microsoft.com/office/drawing/2014/main" id="{87A1A1B0-BFC2-8C10-3016-4E1B73772983}"/>
+              </a:ext>
+            </a:extLst>
+          </p:cNvPr>
+          <p:cNvSpPr txBox="1"/>
+          <p:nvPr/>
+        </p:nvSpPr>
+        <p:spPr>
+          <a:xfrm>
+            <a:off x="344129" y="1337285"/>
             <a:ext cx="8632807" cy="340221"/>
           </a:xfrm>
           <a:prstGeom prst="rect">
@@ -33666,141 +33096,12 @@
           </a:p>
         </p:txBody>
       </p:sp>
-    </p:spTree>
-    <p:extLst>
-      <p:ext uri="{BB962C8B-B14F-4D97-AF65-F5344CB8AC3E}">
-        <p14:creationId xmlns:p14="http://schemas.microsoft.com/office/powerpoint/2010/main" val="3432977997"/>
-      </p:ext>
-    </p:extLst>
-  </p:cSld>
-  <p:clrMapOvr>
-    <a:masterClrMapping/>
-  </p:clrMapOvr>
-</p:sld>
-</file>
-
-<file path=ppt/slides/slide15.xml><?xml version="1.0" encoding="utf-8"?>
-<p:sld xmlns:a="http://schemas.openxmlformats.org/drawingml/2006/main" xmlns:r="http://schemas.openxmlformats.org/officeDocument/2006/relationships" xmlns:p="http://schemas.openxmlformats.org/presentationml/2006/main">
-  <p:cSld>
-    <p:spTree>
-      <p:nvGrpSpPr>
-        <p:cNvPr id="1" name="">
-          <a:extLst>
-            <a:ext uri="{FF2B5EF4-FFF2-40B4-BE49-F238E27FC236}">
-              <a16:creationId xmlns:a16="http://schemas.microsoft.com/office/drawing/2014/main" id="{05D7ED2F-CA42-A6B9-ECBD-2FFDFE2C8B70}"/>
-            </a:ext>
-          </a:extLst>
-        </p:cNvPr>
-        <p:cNvGrpSpPr/>
-        <p:nvPr/>
-      </p:nvGrpSpPr>
-      <p:grpSpPr>
-        <a:xfrm>
-          <a:off x="0" y="0"/>
-          <a:ext cx="0" cy="0"/>
-          <a:chOff x="0" y="0"/>
-          <a:chExt cx="0" cy="0"/>
-        </a:xfrm>
-      </p:grpSpPr>
-      <p:pic>
-        <p:nvPicPr>
-          <p:cNvPr id="6" name="図 5">
+      <p:sp>
+        <p:nvSpPr>
+          <p:cNvPr id="18" name="テキスト ボックス 17">
             <a:extLst>
               <a:ext uri="{FF2B5EF4-FFF2-40B4-BE49-F238E27FC236}">
-                <a16:creationId xmlns:a16="http://schemas.microsoft.com/office/drawing/2014/main" id="{AB851FAF-BE39-5513-95E8-82986B593B7C}"/>
-              </a:ext>
-            </a:extLst>
-          </p:cNvPr>
-          <p:cNvPicPr>
-            <a:picLocks noChangeAspect="1"/>
-          </p:cNvPicPr>
-          <p:nvPr/>
-        </p:nvPicPr>
-        <p:blipFill>
-          <a:blip r:embed="rId2"/>
-          <a:srcRect l="1354" t="11817" r="1789" b="19833"/>
-          <a:stretch>
-            <a:fillRect/>
-          </a:stretch>
-        </p:blipFill>
-        <p:spPr>
-          <a:xfrm>
-            <a:off x="344126" y="4514884"/>
-            <a:ext cx="8455740" cy="564853"/>
-          </a:xfrm>
-          <a:prstGeom prst="rect">
-            <a:avLst/>
-          </a:prstGeom>
-        </p:spPr>
-      </p:pic>
-      <p:pic>
-        <p:nvPicPr>
-          <p:cNvPr id="5" name="図 4">
-            <a:extLst>
-              <a:ext uri="{FF2B5EF4-FFF2-40B4-BE49-F238E27FC236}">
-                <a16:creationId xmlns:a16="http://schemas.microsoft.com/office/drawing/2014/main" id="{E9673AB7-DFAC-60F4-3743-2DB64900423F}"/>
-              </a:ext>
-            </a:extLst>
-          </p:cNvPr>
-          <p:cNvPicPr>
-            <a:picLocks noChangeAspect="1"/>
-          </p:cNvPicPr>
-          <p:nvPr/>
-        </p:nvPicPr>
-        <p:blipFill>
-          <a:blip r:embed="rId3"/>
-          <a:srcRect l="1056" t="9259" r="1407" b="11916"/>
-          <a:stretch>
-            <a:fillRect/>
-          </a:stretch>
-        </p:blipFill>
-        <p:spPr>
-          <a:xfrm>
-            <a:off x="344126" y="3284765"/>
-            <a:ext cx="8455740" cy="568319"/>
-          </a:xfrm>
-          <a:prstGeom prst="rect">
-            <a:avLst/>
-          </a:prstGeom>
-        </p:spPr>
-      </p:pic>
-      <p:pic>
-        <p:nvPicPr>
-          <p:cNvPr id="4" name="図 3">
-            <a:extLst>
-              <a:ext uri="{FF2B5EF4-FFF2-40B4-BE49-F238E27FC236}">
-                <a16:creationId xmlns:a16="http://schemas.microsoft.com/office/drawing/2014/main" id="{4163B95D-DA50-F4F3-3097-EA2DBAE379F9}"/>
-              </a:ext>
-            </a:extLst>
-          </p:cNvPr>
-          <p:cNvPicPr>
-            <a:picLocks noChangeAspect="1"/>
-          </p:cNvPicPr>
-          <p:nvPr/>
-        </p:nvPicPr>
-        <p:blipFill>
-          <a:blip r:embed="rId4"/>
-          <a:srcRect l="1327" t="9752" r="1347" b="18545"/>
-          <a:stretch>
-            <a:fillRect/>
-          </a:stretch>
-        </p:blipFill>
-        <p:spPr>
-          <a:xfrm>
-            <a:off x="344126" y="2083079"/>
-            <a:ext cx="8455740" cy="554302"/>
-          </a:xfrm>
-          <a:prstGeom prst="rect">
-            <a:avLst/>
-          </a:prstGeom>
-        </p:spPr>
-      </p:pic>
-      <p:sp>
-        <p:nvSpPr>
-          <p:cNvPr id="2" name="テキスト ボックス 1">
-            <a:extLst>
-              <a:ext uri="{FF2B5EF4-FFF2-40B4-BE49-F238E27FC236}">
-                <a16:creationId xmlns:a16="http://schemas.microsoft.com/office/drawing/2014/main" id="{DDCEEFB8-0875-221A-74E5-F7EF48B8DBA5}"/>
+                <a16:creationId xmlns:a16="http://schemas.microsoft.com/office/drawing/2014/main" id="{87CBC4A8-4ED1-5834-39B7-5ADF08B4D03A}"/>
               </a:ext>
             </a:extLst>
           </p:cNvPr>
@@ -33809,8 +33110,8 @@
         </p:nvSpPr>
         <p:spPr>
           <a:xfrm>
-            <a:off x="89935" y="568886"/>
-            <a:ext cx="8196146" cy="492230"/>
+            <a:off x="195442" y="604666"/>
+            <a:ext cx="8493995" cy="476842"/>
           </a:xfrm>
           <a:prstGeom prst="rect">
             <a:avLst/>
@@ -33873,7 +33174,7 @@
                 <a:ea typeface="源ノ角ゴシック JP" panose="020B0500000000000000" pitchFamily="34" charset="-128"/>
                 <a:cs typeface="+mn-cs"/>
               </a:rPr>
-              <a:t>「対応」の適切さを評価する</a:t>
+              <a:t>脂質への「対応」は、適切さを評価できなかった</a:t>
             </a:r>
             <a:endParaRPr kumimoji="0" lang="en-US" altLang="ja-JP" sz="2000" b="1" i="0" u="none" strike="noStrike" kern="1200" cap="none" spc="50" normalizeH="0" baseline="0" noProof="0" dirty="0">
               <a:ln>
@@ -33892,12 +33193,141 @@
           </a:p>
         </p:txBody>
       </p:sp>
+    </p:spTree>
+    <p:extLst>
+      <p:ext uri="{BB962C8B-B14F-4D97-AF65-F5344CB8AC3E}">
+        <p14:creationId xmlns:p14="http://schemas.microsoft.com/office/powerpoint/2010/main" val="2069700836"/>
+      </p:ext>
+    </p:extLst>
+  </p:cSld>
+  <p:clrMapOvr>
+    <a:masterClrMapping/>
+  </p:clrMapOvr>
+</p:sld>
+</file>
+
+<file path=ppt/slides/slide15.xml><?xml version="1.0" encoding="utf-8"?>
+<p:sld xmlns:a="http://schemas.openxmlformats.org/drawingml/2006/main" xmlns:r="http://schemas.openxmlformats.org/officeDocument/2006/relationships" xmlns:p="http://schemas.openxmlformats.org/presentationml/2006/main">
+  <p:cSld>
+    <p:spTree>
+      <p:nvGrpSpPr>
+        <p:cNvPr id="1" name="">
+          <a:extLst>
+            <a:ext uri="{FF2B5EF4-FFF2-40B4-BE49-F238E27FC236}">
+              <a16:creationId xmlns:a16="http://schemas.microsoft.com/office/drawing/2014/main" id="{CB71EB83-7656-D98D-0151-8A79399D1E1E}"/>
+            </a:ext>
+          </a:extLst>
+        </p:cNvPr>
+        <p:cNvGrpSpPr/>
+        <p:nvPr/>
+      </p:nvGrpSpPr>
+      <p:grpSpPr>
+        <a:xfrm>
+          <a:off x="0" y="0"/>
+          <a:ext cx="0" cy="0"/>
+          <a:chOff x="0" y="0"/>
+          <a:chExt cx="0" cy="0"/>
+        </a:xfrm>
+      </p:grpSpPr>
+      <p:pic>
+        <p:nvPicPr>
+          <p:cNvPr id="17" name="図 16">
+            <a:extLst>
+              <a:ext uri="{FF2B5EF4-FFF2-40B4-BE49-F238E27FC236}">
+                <a16:creationId xmlns:a16="http://schemas.microsoft.com/office/drawing/2014/main" id="{FB2FAE7F-E41A-77F1-35A1-10D111DBCD9E}"/>
+              </a:ext>
+            </a:extLst>
+          </p:cNvPr>
+          <p:cNvPicPr>
+            <a:picLocks noChangeAspect="1"/>
+          </p:cNvPicPr>
+          <p:nvPr/>
+        </p:nvPicPr>
+        <p:blipFill>
+          <a:blip r:embed="rId2"/>
+          <a:srcRect l="1354" t="11817" r="1789" b="19833"/>
+          <a:stretch>
+            <a:fillRect/>
+          </a:stretch>
+        </p:blipFill>
+        <p:spPr>
+          <a:xfrm>
+            <a:off x="344127" y="4292215"/>
+            <a:ext cx="8455740" cy="564853"/>
+          </a:xfrm>
+          <a:prstGeom prst="rect">
+            <a:avLst/>
+          </a:prstGeom>
+        </p:spPr>
+      </p:pic>
+      <p:pic>
+        <p:nvPicPr>
+          <p:cNvPr id="15" name="図 14">
+            <a:extLst>
+              <a:ext uri="{FF2B5EF4-FFF2-40B4-BE49-F238E27FC236}">
+                <a16:creationId xmlns:a16="http://schemas.microsoft.com/office/drawing/2014/main" id="{01A65E85-BA9F-A228-5EE2-D0D90239CD7E}"/>
+              </a:ext>
+            </a:extLst>
+          </p:cNvPr>
+          <p:cNvPicPr>
+            <a:picLocks noChangeAspect="1"/>
+          </p:cNvPicPr>
+          <p:nvPr/>
+        </p:nvPicPr>
+        <p:blipFill>
+          <a:blip r:embed="rId3"/>
+          <a:srcRect l="1056" t="9259" r="1407" b="11916"/>
+          <a:stretch>
+            <a:fillRect/>
+          </a:stretch>
+        </p:blipFill>
+        <p:spPr>
+          <a:xfrm>
+            <a:off x="344127" y="3201737"/>
+            <a:ext cx="8455740" cy="568319"/>
+          </a:xfrm>
+          <a:prstGeom prst="rect">
+            <a:avLst/>
+          </a:prstGeom>
+        </p:spPr>
+      </p:pic>
+      <p:pic>
+        <p:nvPicPr>
+          <p:cNvPr id="2" name="図 1">
+            <a:extLst>
+              <a:ext uri="{FF2B5EF4-FFF2-40B4-BE49-F238E27FC236}">
+                <a16:creationId xmlns:a16="http://schemas.microsoft.com/office/drawing/2014/main" id="{DE1D94EE-94AD-F743-2378-A5E4391696DB}"/>
+              </a:ext>
+            </a:extLst>
+          </p:cNvPr>
+          <p:cNvPicPr>
+            <a:picLocks noChangeAspect="1"/>
+          </p:cNvPicPr>
+          <p:nvPr/>
+        </p:nvPicPr>
+        <p:blipFill>
+          <a:blip r:embed="rId4"/>
+          <a:srcRect l="1327" t="9752" r="1347" b="18545"/>
+          <a:stretch>
+            <a:fillRect/>
+          </a:stretch>
+        </p:blipFill>
+        <p:spPr>
+          <a:xfrm>
+            <a:off x="344128" y="2108227"/>
+            <a:ext cx="8455740" cy="554302"/>
+          </a:xfrm>
+          <a:prstGeom prst="rect">
+            <a:avLst/>
+          </a:prstGeom>
+        </p:spPr>
+      </p:pic>
       <p:sp>
         <p:nvSpPr>
           <p:cNvPr id="7" name="テキスト ボックス 6">
             <a:extLst>
               <a:ext uri="{FF2B5EF4-FFF2-40B4-BE49-F238E27FC236}">
-                <a16:creationId xmlns:a16="http://schemas.microsoft.com/office/drawing/2014/main" id="{173C3E84-DF95-A3C9-A5AA-1DFC81474AF6}"/>
+                <a16:creationId xmlns:a16="http://schemas.microsoft.com/office/drawing/2014/main" id="{B292BB51-8E82-2830-9ED6-147D7FC7CB86}"/>
               </a:ext>
             </a:extLst>
           </p:cNvPr>
@@ -33906,7 +33336,7 @@
         </p:nvSpPr>
         <p:spPr>
           <a:xfrm>
-            <a:off x="344129" y="1729435"/>
+            <a:off x="344127" y="1789444"/>
             <a:ext cx="1632688" cy="333681"/>
           </a:xfrm>
           <a:prstGeom prst="rect">
@@ -33966,7 +33396,7 @@
           <p:cNvPr id="8" name="テキスト ボックス 7">
             <a:extLst>
               <a:ext uri="{FF2B5EF4-FFF2-40B4-BE49-F238E27FC236}">
-                <a16:creationId xmlns:a16="http://schemas.microsoft.com/office/drawing/2014/main" id="{57E97E66-DBF8-2499-DC7A-696134681274}"/>
+                <a16:creationId xmlns:a16="http://schemas.microsoft.com/office/drawing/2014/main" id="{6BFFA77A-F8CF-35BC-379A-19A4ADFF6088}"/>
               </a:ext>
             </a:extLst>
           </p:cNvPr>
@@ -33975,7 +33405,7 @@
         </p:nvSpPr>
         <p:spPr>
           <a:xfrm>
-            <a:off x="344129" y="2961609"/>
+            <a:off x="344127" y="2884763"/>
             <a:ext cx="1632688" cy="333681"/>
           </a:xfrm>
           <a:prstGeom prst="rect">
@@ -34035,7 +33465,7 @@
           <p:cNvPr id="9" name="テキスト ボックス 8">
             <a:extLst>
               <a:ext uri="{FF2B5EF4-FFF2-40B4-BE49-F238E27FC236}">
-                <a16:creationId xmlns:a16="http://schemas.microsoft.com/office/drawing/2014/main" id="{9CE2A43C-7CDD-7CC2-FD15-BC15D37AAE92}"/>
+                <a16:creationId xmlns:a16="http://schemas.microsoft.com/office/drawing/2014/main" id="{50F3363F-CC64-2060-C6AE-C21BC895478E}"/>
               </a:ext>
             </a:extLst>
           </p:cNvPr>
@@ -34044,7 +33474,7 @@
         </p:nvSpPr>
         <p:spPr>
           <a:xfrm>
-            <a:off x="344129" y="4172773"/>
+            <a:off x="344127" y="3959072"/>
             <a:ext cx="1632688" cy="333681"/>
           </a:xfrm>
           <a:prstGeom prst="rect">
@@ -34104,7 +33534,7 @@
           <p:cNvPr id="10" name="テキスト ボックス 9">
             <a:extLst>
               <a:ext uri="{FF2B5EF4-FFF2-40B4-BE49-F238E27FC236}">
-                <a16:creationId xmlns:a16="http://schemas.microsoft.com/office/drawing/2014/main" id="{0E9E6D6D-943E-9F8D-6EB7-63564FA9FC52}"/>
+                <a16:creationId xmlns:a16="http://schemas.microsoft.com/office/drawing/2014/main" id="{A2D7FE48-6A76-ED38-FA82-64175B64A043}"/>
               </a:ext>
             </a:extLst>
           </p:cNvPr>
@@ -34113,8 +33543,8 @@
         </p:nvSpPr>
         <p:spPr>
           <a:xfrm>
-            <a:off x="1759920" y="5731030"/>
-            <a:ext cx="5624152" cy="384785"/>
+            <a:off x="655034" y="5190211"/>
+            <a:ext cx="7833926" cy="705386"/>
           </a:xfrm>
           <a:prstGeom prst="rect">
             <a:avLst/>
@@ -34145,7 +33575,7 @@
               <a:defRPr/>
             </a:pPr>
             <a:r>
-              <a:rPr kumimoji="1" lang="ja-JP" altLang="en-US" sz="1700" i="0" u="none" strike="noStrike" kern="1200" cap="none" spc="0" normalizeH="0" baseline="0" noProof="0">
+              <a:rPr kumimoji="1" lang="ja-JP" altLang="en-US" sz="1600" i="0" u="none" strike="noStrike" kern="1200" cap="none" spc="0" normalizeH="0" baseline="0" noProof="0">
                 <a:ln>
                   <a:noFill/>
                 </a:ln>
@@ -34162,9 +33592,122 @@
                 <a:ea typeface="源ノ角ゴシック JP" panose="020B0500000000000000" pitchFamily="34" charset="-128"/>
                 <a:cs typeface="+mn-cs"/>
               </a:rPr>
-              <a:t>セブンイレブンは、他社と比較して、大きな違いはない</a:t>
-            </a:r>
-            <a:endParaRPr kumimoji="1" lang="en-US" altLang="ja-JP" sz="1700" i="0" strike="noStrike" kern="1200" cap="none" spc="0" normalizeH="0" baseline="0" noProof="0" dirty="0">
+              <a:t>セブンイレブンでは、特に</a:t>
+            </a:r>
+            <a:r>
+              <a:rPr kumimoji="1" lang="en-US" altLang="ja-JP" sz="1600" i="0" u="none" strike="noStrike" kern="1200" cap="none" spc="0" normalizeH="0" baseline="0" noProof="0" dirty="0">
+                <a:ln>
+                  <a:noFill/>
+                </a:ln>
+                <a:solidFill>
+                  <a:schemeClr val="tx1">
+                    <a:lumMod val="75000"/>
+                    <a:lumOff val="25000"/>
+                  </a:schemeClr>
+                </a:solidFill>
+                <a:effectLst/>
+                <a:uLnTx/>
+                <a:uFillTx/>
+                <a:latin typeface="源ノ角ゴシック JP" panose="020B0500000000000000" pitchFamily="34" charset="-128"/>
+                <a:ea typeface="源ノ角ゴシック JP" panose="020B0500000000000000" pitchFamily="34" charset="-128"/>
+                <a:cs typeface="+mn-cs"/>
+              </a:rPr>
+              <a:t>20~30</a:t>
+            </a:r>
+            <a:r>
+              <a:rPr kumimoji="1" lang="ja-JP" altLang="en-US" sz="1600" i="0" u="none" strike="noStrike" kern="1200" cap="none" spc="0" normalizeH="0" baseline="0" noProof="0">
+                <a:ln>
+                  <a:noFill/>
+                </a:ln>
+                <a:solidFill>
+                  <a:schemeClr val="tx1">
+                    <a:lumMod val="75000"/>
+                    <a:lumOff val="25000"/>
+                  </a:schemeClr>
+                </a:solidFill>
+                <a:effectLst/>
+                <a:uLnTx/>
+                <a:uFillTx/>
+                <a:latin typeface="源ノ角ゴシック JP" panose="020B0500000000000000" pitchFamily="34" charset="-128"/>
+                <a:ea typeface="源ノ角ゴシック JP" panose="020B0500000000000000" pitchFamily="34" charset="-128"/>
+                <a:cs typeface="+mn-cs"/>
+              </a:rPr>
+              <a:t>代において、</a:t>
+            </a:r>
+            <a:r>
+              <a:rPr kumimoji="1" lang="ja-JP" altLang="en-US" sz="1600" b="1" i="0" u="none" strike="noStrike" kern="1200" cap="none" spc="0" normalizeH="0" baseline="0" noProof="0">
+                <a:ln>
+                  <a:noFill/>
+                </a:ln>
+                <a:solidFill>
+                  <a:schemeClr val="tx1">
+                    <a:lumMod val="75000"/>
+                    <a:lumOff val="25000"/>
+                  </a:schemeClr>
+                </a:solidFill>
+                <a:effectLst/>
+                <a:uLnTx/>
+                <a:uFillTx/>
+                <a:latin typeface="源ノ角ゴシック JP" panose="020B0500000000000000" pitchFamily="34" charset="-128"/>
+                <a:ea typeface="源ノ角ゴシック JP" panose="020B0500000000000000" pitchFamily="34" charset="-128"/>
+                <a:cs typeface="+mn-cs"/>
+              </a:rPr>
+              <a:t>「エネルギーを減らしたい」ニーズ</a:t>
+            </a:r>
+            <a:r>
+              <a:rPr kumimoji="1" lang="ja-JP" altLang="en-US" sz="1600" i="0" u="none" strike="noStrike" kern="1200" cap="none" spc="0" normalizeH="0" baseline="0" noProof="0">
+                <a:ln>
+                  <a:noFill/>
+                </a:ln>
+                <a:solidFill>
+                  <a:schemeClr val="tx1">
+                    <a:lumMod val="75000"/>
+                    <a:lumOff val="25000"/>
+                  </a:schemeClr>
+                </a:solidFill>
+                <a:effectLst/>
+                <a:uLnTx/>
+                <a:uFillTx/>
+                <a:latin typeface="源ノ角ゴシック JP" panose="020B0500000000000000" pitchFamily="34" charset="-128"/>
+                <a:ea typeface="源ノ角ゴシック JP" panose="020B0500000000000000" pitchFamily="34" charset="-128"/>
+                <a:cs typeface="+mn-cs"/>
+              </a:rPr>
+              <a:t>を解決する</a:t>
+            </a:r>
+            <a:r>
+              <a:rPr kumimoji="1" lang="ja-JP" altLang="en-US" sz="1600">
+                <a:solidFill>
+                  <a:schemeClr val="tx1">
+                    <a:lumMod val="75000"/>
+                    <a:lumOff val="25000"/>
+                  </a:schemeClr>
+                </a:solidFill>
+                <a:latin typeface="源ノ角ゴシック JP" panose="020B0500000000000000" pitchFamily="34" charset="-128"/>
+                <a:ea typeface="源ノ角ゴシック JP" panose="020B0500000000000000" pitchFamily="34" charset="-128"/>
+              </a:rPr>
+              <a:t>ための</a:t>
+            </a:r>
+            <a:r>
+              <a:rPr kumimoji="1" lang="ja-JP" altLang="en-US" sz="1600" i="0" u="none" strike="noStrike" kern="1200" cap="none" spc="0" normalizeH="0" baseline="0" noProof="0">
+                <a:ln>
+                  <a:noFill/>
+                </a:ln>
+                <a:solidFill>
+                  <a:schemeClr val="tx1">
+                    <a:lumMod val="75000"/>
+                    <a:lumOff val="25000"/>
+                  </a:schemeClr>
+                </a:solidFill>
+                <a:effectLst/>
+                <a:uLnTx/>
+                <a:uFillTx/>
+                <a:latin typeface="源ノ角ゴシック JP" panose="020B0500000000000000" pitchFamily="34" charset="-128"/>
+                <a:ea typeface="源ノ角ゴシック JP" panose="020B0500000000000000" pitchFamily="34" charset="-128"/>
+                <a:cs typeface="+mn-cs"/>
+              </a:rPr>
+              <a:t>「対応」が適切ではない</a:t>
+            </a:r>
+            <a:endParaRPr kumimoji="1" lang="en-US" altLang="ja-JP" sz="1600" i="0" strike="noStrike" kern="1200" cap="none" spc="0" normalizeH="0" baseline="0" noProof="0" dirty="0">
               <a:ln>
                 <a:noFill/>
               </a:ln>
@@ -34189,7 +33732,7 @@
           <p:cNvPr id="11" name="テキスト ボックス 10">
             <a:extLst>
               <a:ext uri="{FF2B5EF4-FFF2-40B4-BE49-F238E27FC236}">
-                <a16:creationId xmlns:a16="http://schemas.microsoft.com/office/drawing/2014/main" id="{D3F9245C-04CC-E200-8C9D-EEFE5055DE22}"/>
+                <a16:creationId xmlns:a16="http://schemas.microsoft.com/office/drawing/2014/main" id="{310020D7-4AD2-AD4D-8AED-3BEE35047CC4}"/>
               </a:ext>
             </a:extLst>
           </p:cNvPr>
@@ -34198,7 +33741,7 @@
         </p:nvSpPr>
         <p:spPr>
           <a:xfrm>
-            <a:off x="344129" y="1126271"/>
+            <a:off x="344129" y="1337285"/>
             <a:ext cx="8632807" cy="340221"/>
           </a:xfrm>
           <a:prstGeom prst="rect">
@@ -34369,10 +33912,192 @@
           </a:p>
         </p:txBody>
       </p:sp>
+      <p:sp>
+        <p:nvSpPr>
+          <p:cNvPr id="3" name="テキスト ボックス 2">
+            <a:extLst>
+              <a:ext uri="{FF2B5EF4-FFF2-40B4-BE49-F238E27FC236}">
+                <a16:creationId xmlns:a16="http://schemas.microsoft.com/office/drawing/2014/main" id="{88B0F8ED-1F1C-BB5F-4756-B2664B8BC7A1}"/>
+              </a:ext>
+            </a:extLst>
+          </p:cNvPr>
+          <p:cNvSpPr txBox="1"/>
+          <p:nvPr/>
+        </p:nvSpPr>
+        <p:spPr>
+          <a:xfrm>
+            <a:off x="195442" y="437954"/>
+            <a:ext cx="8148157" cy="810266"/>
+          </a:xfrm>
+          <a:prstGeom prst="rect">
+            <a:avLst/>
+          </a:prstGeom>
+          <a:noFill/>
+          <a:ln w="25400" cap="flat">
+            <a:noFill/>
+            <a:miter lim="400000"/>
+          </a:ln>
+          <a:effectLst/>
+          <a:sp3d/>
+        </p:spPr>
+        <p:style>
+          <a:lnRef idx="0">
+            <a:scrgbClr r="0" g="0" b="0"/>
+          </a:lnRef>
+          <a:fillRef idx="0">
+            <a:scrgbClr r="0" g="0" b="0"/>
+          </a:fillRef>
+          <a:effectRef idx="0">
+            <a:scrgbClr r="0" g="0" b="0"/>
+          </a:effectRef>
+          <a:fontRef idx="none"/>
+        </p:style>
+        <p:txBody>
+          <a:bodyPr rot="0" spcFirstLastPara="1" vertOverflow="overflow" horzOverflow="overflow" vert="horz" wrap="square" lIns="83715" tIns="83715" rIns="83715" bIns="83715" numCol="1" spcCol="38100" rtlCol="0" anchor="ctr">
+            <a:spAutoFit/>
+          </a:bodyPr>
+          <a:lstStyle/>
+          <a:p>
+            <a:pPr lvl="0" indent="66714" defTabSz="438410" hangingPunct="0">
+              <a:lnSpc>
+                <a:spcPts val="2460"/>
+              </a:lnSpc>
+              <a:defRPr/>
+            </a:pPr>
+            <a:r>
+              <a:rPr lang="ja-JP" altLang="en-US" b="1" spc="50">
+                <a:solidFill>
+                  <a:srgbClr val="42557A"/>
+                </a:solidFill>
+                <a:latin typeface="源ノ角ゴシック JP" panose="020B0500000000000000" pitchFamily="34" charset="-128"/>
+                <a:ea typeface="源ノ角ゴシック JP" panose="020B0500000000000000" pitchFamily="34" charset="-128"/>
+              </a:rPr>
+              <a:t>セブンイレブンでは、若いの属性において、エネルギーへの「対応」の</a:t>
+            </a:r>
+            <a:endParaRPr lang="en-US" altLang="ja-JP" b="1" spc="50" dirty="0">
+              <a:solidFill>
+                <a:srgbClr val="42557A"/>
+              </a:solidFill>
+              <a:latin typeface="源ノ角ゴシック JP" panose="020B0500000000000000" pitchFamily="34" charset="-128"/>
+              <a:ea typeface="源ノ角ゴシック JP" panose="020B0500000000000000" pitchFamily="34" charset="-128"/>
+            </a:endParaRPr>
+          </a:p>
+          <a:p>
+            <a:pPr lvl="0" indent="66714" defTabSz="438410" hangingPunct="0">
+              <a:lnSpc>
+                <a:spcPts val="2460"/>
+              </a:lnSpc>
+              <a:defRPr/>
+            </a:pPr>
+            <a:r>
+              <a:rPr lang="ja-JP" altLang="en-US" b="1" spc="50">
+                <a:solidFill>
+                  <a:srgbClr val="42557A"/>
+                </a:solidFill>
+                <a:latin typeface="源ノ角ゴシック JP" panose="020B0500000000000000" pitchFamily="34" charset="-128"/>
+                <a:ea typeface="源ノ角ゴシック JP" panose="020B0500000000000000" pitchFamily="34" charset="-128"/>
+              </a:rPr>
+              <a:t>適切さが低い</a:t>
+            </a:r>
+            <a:endParaRPr kumimoji="0" lang="en-US" altLang="ja-JP" b="1" i="0" u="none" strike="noStrike" kern="1200" cap="none" spc="50" normalizeH="0" baseline="0" noProof="0" dirty="0">
+              <a:ln>
+                <a:noFill/>
+              </a:ln>
+              <a:solidFill>
+                <a:srgbClr val="42557A"/>
+              </a:solidFill>
+              <a:effectLst/>
+              <a:uLnTx/>
+              <a:uFillTx/>
+              <a:latin typeface="源ノ角ゴシック JP" panose="020B0500000000000000" pitchFamily="34" charset="-128"/>
+              <a:ea typeface="源ノ角ゴシック JP" panose="020B0500000000000000" pitchFamily="34" charset="-128"/>
+              <a:cs typeface="+mn-cs"/>
+            </a:endParaRPr>
+          </a:p>
+        </p:txBody>
+      </p:sp>
+      <p:sp>
+        <p:nvSpPr>
+          <p:cNvPr id="16" name="テキスト ボックス 15">
+            <a:extLst>
+              <a:ext uri="{FF2B5EF4-FFF2-40B4-BE49-F238E27FC236}">
+                <a16:creationId xmlns:a16="http://schemas.microsoft.com/office/drawing/2014/main" id="{47DA2321-95FC-33C3-31AA-DE947DEA87C2}"/>
+              </a:ext>
+            </a:extLst>
+          </p:cNvPr>
+          <p:cNvSpPr txBox="1"/>
+          <p:nvPr/>
+        </p:nvSpPr>
+        <p:spPr>
+          <a:xfrm>
+            <a:off x="672867" y="5997572"/>
+            <a:ext cx="7377658" cy="362472"/>
+          </a:xfrm>
+          <a:prstGeom prst="rect">
+            <a:avLst/>
+          </a:prstGeom>
+          <a:noFill/>
+        </p:spPr>
+        <p:txBody>
+          <a:bodyPr wrap="square">
+            <a:spAutoFit/>
+          </a:bodyPr>
+          <a:lstStyle/>
+          <a:p>
+            <a:pPr marL="0" marR="0" lvl="0" indent="0" algn="l" defTabSz="457200" rtl="0" eaLnBrk="1" fontAlgn="auto" latinLnBrk="0" hangingPunct="1">
+              <a:lnSpc>
+                <a:spcPts val="2280"/>
+              </a:lnSpc>
+              <a:spcBef>
+                <a:spcPts val="0"/>
+              </a:spcBef>
+              <a:spcAft>
+                <a:spcPts val="0"/>
+              </a:spcAft>
+              <a:buClrTx/>
+              <a:buSzTx/>
+              <a:buFontTx/>
+              <a:buNone/>
+              <a:tabLst/>
+              <a:defRPr/>
+            </a:pPr>
+            <a:r>
+              <a:rPr kumimoji="1" lang="ja-JP" altLang="en-US" sz="1600">
+                <a:solidFill>
+                  <a:schemeClr val="tx1">
+                    <a:lumMod val="85000"/>
+                    <a:lumOff val="15000"/>
+                  </a:schemeClr>
+                </a:solidFill>
+                <a:latin typeface="源ノ角ゴシック JP" panose="020B0500000000000000" pitchFamily="34" charset="-128"/>
+                <a:ea typeface="源ノ角ゴシック JP" panose="020B0500000000000000" pitchFamily="34" charset="-128"/>
+              </a:rPr>
+              <a:t>→ 一方で、他社においても同様の傾向が確認された</a:t>
+            </a:r>
+            <a:endParaRPr kumimoji="1" lang="en-US" altLang="ja-JP" sz="1600" i="0" strike="noStrike" kern="1200" cap="none" spc="0" normalizeH="0" baseline="0" noProof="0" dirty="0">
+              <a:ln>
+                <a:noFill/>
+              </a:ln>
+              <a:solidFill>
+                <a:schemeClr val="tx1">
+                  <a:lumMod val="85000"/>
+                  <a:lumOff val="15000"/>
+                </a:schemeClr>
+              </a:solidFill>
+              <a:effectLst/>
+              <a:uLnTx/>
+              <a:uFillTx/>
+              <a:latin typeface="源ノ角ゴシック JP" panose="020B0500000000000000" pitchFamily="34" charset="-128"/>
+              <a:ea typeface="源ノ角ゴシック JP" panose="020B0500000000000000" pitchFamily="34" charset="-128"/>
+              <a:cs typeface="+mn-cs"/>
+            </a:endParaRPr>
+          </a:p>
+        </p:txBody>
+      </p:sp>
     </p:spTree>
     <p:extLst>
       <p:ext uri="{BB962C8B-B14F-4D97-AF65-F5344CB8AC3E}">
-        <p14:creationId xmlns:p14="http://schemas.microsoft.com/office/powerpoint/2010/main" val="13059539"/>
+        <p14:creationId xmlns:p14="http://schemas.microsoft.com/office/powerpoint/2010/main" val="3970453959"/>
       </p:ext>
     </p:extLst>
   </p:cSld>
@@ -34405,103 +34130,6 @@
           <a:chExt cx="0" cy="0"/>
         </a:xfrm>
       </p:grpSpPr>
-      <p:sp>
-        <p:nvSpPr>
-          <p:cNvPr id="2" name="テキスト ボックス 1">
-            <a:extLst>
-              <a:ext uri="{FF2B5EF4-FFF2-40B4-BE49-F238E27FC236}">
-                <a16:creationId xmlns:a16="http://schemas.microsoft.com/office/drawing/2014/main" id="{89211355-B924-8AD7-2B3A-19A79F3E3CBC}"/>
-              </a:ext>
-            </a:extLst>
-          </p:cNvPr>
-          <p:cNvSpPr txBox="1"/>
-          <p:nvPr/>
-        </p:nvSpPr>
-        <p:spPr>
-          <a:xfrm>
-            <a:off x="89935" y="568886"/>
-            <a:ext cx="8196146" cy="492230"/>
-          </a:xfrm>
-          <a:prstGeom prst="rect">
-            <a:avLst/>
-          </a:prstGeom>
-          <a:noFill/>
-          <a:ln w="25400" cap="flat">
-            <a:noFill/>
-            <a:miter lim="400000"/>
-          </a:ln>
-          <a:effectLst/>
-          <a:sp3d/>
-        </p:spPr>
-        <p:style>
-          <a:lnRef idx="0">
-            <a:scrgbClr r="0" g="0" b="0"/>
-          </a:lnRef>
-          <a:fillRef idx="0">
-            <a:scrgbClr r="0" g="0" b="0"/>
-          </a:fillRef>
-          <a:effectRef idx="0">
-            <a:scrgbClr r="0" g="0" b="0"/>
-          </a:effectRef>
-          <a:fontRef idx="none"/>
-        </p:style>
-        <p:txBody>
-          <a:bodyPr rot="0" spcFirstLastPara="1" vertOverflow="overflow" horzOverflow="overflow" vert="horz" wrap="square" lIns="83715" tIns="83715" rIns="83715" bIns="83715" numCol="1" spcCol="38100" rtlCol="0" anchor="ctr">
-            <a:spAutoFit/>
-          </a:bodyPr>
-          <a:lstStyle/>
-          <a:p>
-            <a:pPr marL="0" marR="0" lvl="0" indent="66714" algn="l" defTabSz="438410" rtl="0" eaLnBrk="1" fontAlgn="auto" latinLnBrk="0" hangingPunct="0">
-              <a:lnSpc>
-                <a:spcPct val="100000"/>
-              </a:lnSpc>
-              <a:spcBef>
-                <a:spcPts val="0"/>
-              </a:spcBef>
-              <a:spcAft>
-                <a:spcPts val="0"/>
-              </a:spcAft>
-              <a:buClrTx/>
-              <a:buSzTx/>
-              <a:buFontTx/>
-              <a:buNone/>
-              <a:tabLst/>
-              <a:defRPr/>
-            </a:pPr>
-            <a:r>
-              <a:rPr kumimoji="0" lang="ja-JP" altLang="en-US" sz="2000" b="1" i="0" u="none" strike="noStrike" kern="1200" cap="none" spc="50" normalizeH="0" baseline="0" noProof="0">
-                <a:ln>
-                  <a:noFill/>
-                </a:ln>
-                <a:solidFill>
-                  <a:srgbClr val="42557A"/>
-                </a:solidFill>
-                <a:effectLst/>
-                <a:uLnTx/>
-                <a:uFillTx/>
-                <a:latin typeface="源ノ角ゴシック JP" panose="020B0500000000000000" pitchFamily="34" charset="-128"/>
-                <a:ea typeface="源ノ角ゴシック JP" panose="020B0500000000000000" pitchFamily="34" charset="-128"/>
-                <a:cs typeface="+mn-cs"/>
-              </a:rPr>
-              <a:t>問題を特定する</a:t>
-            </a:r>
-            <a:endParaRPr kumimoji="0" lang="en-US" altLang="ja-JP" sz="2000" b="1" i="0" u="none" strike="noStrike" kern="1200" cap="none" spc="50" normalizeH="0" baseline="0" noProof="0" dirty="0">
-              <a:ln>
-                <a:noFill/>
-              </a:ln>
-              <a:solidFill>
-                <a:srgbClr val="42557A"/>
-              </a:solidFill>
-              <a:effectLst/>
-              <a:uLnTx/>
-              <a:uFillTx/>
-              <a:latin typeface="源ノ角ゴシック JP" panose="020B0500000000000000" pitchFamily="34" charset="-128"/>
-              <a:ea typeface="源ノ角ゴシック JP" panose="020B0500000000000000" pitchFamily="34" charset="-128"/>
-              <a:cs typeface="+mn-cs"/>
-            </a:endParaRPr>
-          </a:p>
-        </p:txBody>
-      </p:sp>
       <p:pic>
         <p:nvPicPr>
           <p:cNvPr id="3" name="図 2">
@@ -35300,6 +34928,103 @@
           </p:txBody>
         </p:sp>
       </p:grpSp>
+      <p:sp>
+        <p:nvSpPr>
+          <p:cNvPr id="5" name="テキスト ボックス 4">
+            <a:extLst>
+              <a:ext uri="{FF2B5EF4-FFF2-40B4-BE49-F238E27FC236}">
+                <a16:creationId xmlns:a16="http://schemas.microsoft.com/office/drawing/2014/main" id="{C156B59E-63F6-2AE4-3FDA-EC070244F943}"/>
+              </a:ext>
+            </a:extLst>
+          </p:cNvPr>
+          <p:cNvSpPr txBox="1"/>
+          <p:nvPr/>
+        </p:nvSpPr>
+        <p:spPr>
+          <a:xfrm>
+            <a:off x="148550" y="620055"/>
+            <a:ext cx="8493995" cy="446064"/>
+          </a:xfrm>
+          <a:prstGeom prst="rect">
+            <a:avLst/>
+          </a:prstGeom>
+          <a:noFill/>
+          <a:ln w="25400" cap="flat">
+            <a:noFill/>
+            <a:miter lim="400000"/>
+          </a:ln>
+          <a:effectLst/>
+          <a:sp3d/>
+        </p:spPr>
+        <p:style>
+          <a:lnRef idx="0">
+            <a:scrgbClr r="0" g="0" b="0"/>
+          </a:lnRef>
+          <a:fillRef idx="0">
+            <a:scrgbClr r="0" g="0" b="0"/>
+          </a:fillRef>
+          <a:effectRef idx="0">
+            <a:scrgbClr r="0" g="0" b="0"/>
+          </a:effectRef>
+          <a:fontRef idx="none"/>
+        </p:style>
+        <p:txBody>
+          <a:bodyPr rot="0" spcFirstLastPara="1" vertOverflow="overflow" horzOverflow="overflow" vert="horz" wrap="square" lIns="83715" tIns="83715" rIns="83715" bIns="83715" numCol="1" spcCol="38100" rtlCol="0" anchor="ctr">
+            <a:spAutoFit/>
+          </a:bodyPr>
+          <a:lstStyle/>
+          <a:p>
+            <a:pPr marL="0" marR="0" lvl="0" indent="66714" algn="l" defTabSz="438410" rtl="0" eaLnBrk="1" fontAlgn="auto" latinLnBrk="0" hangingPunct="0">
+              <a:lnSpc>
+                <a:spcPct val="100000"/>
+              </a:lnSpc>
+              <a:spcBef>
+                <a:spcPts val="0"/>
+              </a:spcBef>
+              <a:spcAft>
+                <a:spcPts val="0"/>
+              </a:spcAft>
+              <a:buClrTx/>
+              <a:buSzTx/>
+              <a:buFontTx/>
+              <a:buNone/>
+              <a:tabLst/>
+              <a:defRPr/>
+            </a:pPr>
+            <a:r>
+              <a:rPr kumimoji="0" lang="ja-JP" altLang="en-US" b="1" i="0" u="none" strike="noStrike" kern="1200" cap="none" spc="50" normalizeH="0" baseline="0" noProof="0">
+                <a:ln>
+                  <a:noFill/>
+                </a:ln>
+                <a:solidFill>
+                  <a:srgbClr val="42557A"/>
+                </a:solidFill>
+                <a:effectLst/>
+                <a:uLnTx/>
+                <a:uFillTx/>
+                <a:latin typeface="源ノ角ゴシック JP" panose="020B0500000000000000" pitchFamily="34" charset="-128"/>
+                <a:ea typeface="源ノ角ゴシック JP" panose="020B0500000000000000" pitchFamily="34" charset="-128"/>
+                <a:cs typeface="+mn-cs"/>
+              </a:rPr>
+              <a:t>健康ニーズに対するセブンイレブン「対応」について、３つの問題を特定した</a:t>
+            </a:r>
+            <a:endParaRPr kumimoji="0" lang="en-US" altLang="ja-JP" b="1" i="0" u="none" strike="noStrike" kern="1200" cap="none" spc="50" normalizeH="0" baseline="0" noProof="0" dirty="0">
+              <a:ln>
+                <a:noFill/>
+              </a:ln>
+              <a:solidFill>
+                <a:srgbClr val="42557A"/>
+              </a:solidFill>
+              <a:effectLst/>
+              <a:uLnTx/>
+              <a:uFillTx/>
+              <a:latin typeface="源ノ角ゴシック JP" panose="020B0500000000000000" pitchFamily="34" charset="-128"/>
+              <a:ea typeface="源ノ角ゴシック JP" panose="020B0500000000000000" pitchFamily="34" charset="-128"/>
+              <a:cs typeface="+mn-cs"/>
+            </a:endParaRPr>
+          </a:p>
+        </p:txBody>
+      </p:sp>
     </p:spTree>
     <p:extLst>
       <p:ext uri="{BB962C8B-B14F-4D97-AF65-F5344CB8AC3E}">
@@ -35363,103 +35088,6 @@
       </p:pic>
       <p:sp>
         <p:nvSpPr>
-          <p:cNvPr id="2" name="テキスト ボックス 1">
-            <a:extLst>
-              <a:ext uri="{FF2B5EF4-FFF2-40B4-BE49-F238E27FC236}">
-                <a16:creationId xmlns:a16="http://schemas.microsoft.com/office/drawing/2014/main" id="{B9D5AA45-1D42-F2F4-D1C1-86AEAD8AFF65}"/>
-              </a:ext>
-            </a:extLst>
-          </p:cNvPr>
-          <p:cNvSpPr txBox="1"/>
-          <p:nvPr/>
-        </p:nvSpPr>
-        <p:spPr>
-          <a:xfrm>
-            <a:off x="89935" y="568886"/>
-            <a:ext cx="8196146" cy="492230"/>
-          </a:xfrm>
-          <a:prstGeom prst="rect">
-            <a:avLst/>
-          </a:prstGeom>
-          <a:noFill/>
-          <a:ln w="25400" cap="flat">
-            <a:noFill/>
-            <a:miter lim="400000"/>
-          </a:ln>
-          <a:effectLst/>
-          <a:sp3d/>
-        </p:spPr>
-        <p:style>
-          <a:lnRef idx="0">
-            <a:scrgbClr r="0" g="0" b="0"/>
-          </a:lnRef>
-          <a:fillRef idx="0">
-            <a:scrgbClr r="0" g="0" b="0"/>
-          </a:fillRef>
-          <a:effectRef idx="0">
-            <a:scrgbClr r="0" g="0" b="0"/>
-          </a:effectRef>
-          <a:fontRef idx="none"/>
-        </p:style>
-        <p:txBody>
-          <a:bodyPr rot="0" spcFirstLastPara="1" vertOverflow="overflow" horzOverflow="overflow" vert="horz" wrap="square" lIns="83715" tIns="83715" rIns="83715" bIns="83715" numCol="1" spcCol="38100" rtlCol="0" anchor="ctr">
-            <a:spAutoFit/>
-          </a:bodyPr>
-          <a:lstStyle/>
-          <a:p>
-            <a:pPr marL="0" marR="0" lvl="0" indent="66714" algn="l" defTabSz="438410" rtl="0" eaLnBrk="1" fontAlgn="auto" latinLnBrk="0" hangingPunct="0">
-              <a:lnSpc>
-                <a:spcPct val="100000"/>
-              </a:lnSpc>
-              <a:spcBef>
-                <a:spcPts val="0"/>
-              </a:spcBef>
-              <a:spcAft>
-                <a:spcPts val="0"/>
-              </a:spcAft>
-              <a:buClrTx/>
-              <a:buSzTx/>
-              <a:buFontTx/>
-              <a:buNone/>
-              <a:tabLst/>
-              <a:defRPr/>
-            </a:pPr>
-            <a:r>
-              <a:rPr kumimoji="0" lang="ja-JP" altLang="en-US" sz="2000" b="1" i="0" u="none" strike="noStrike" kern="1200" cap="none" spc="50" normalizeH="0" baseline="0" noProof="0">
-                <a:ln>
-                  <a:noFill/>
-                </a:ln>
-                <a:solidFill>
-                  <a:srgbClr val="42557A"/>
-                </a:solidFill>
-                <a:effectLst/>
-                <a:uLnTx/>
-                <a:uFillTx/>
-                <a:latin typeface="源ノ角ゴシック JP" panose="020B0500000000000000" pitchFamily="34" charset="-128"/>
-                <a:ea typeface="源ノ角ゴシック JP" panose="020B0500000000000000" pitchFamily="34" charset="-128"/>
-                <a:cs typeface="+mn-cs"/>
-              </a:rPr>
-              <a:t>問題を特定する</a:t>
-            </a:r>
-            <a:endParaRPr kumimoji="0" lang="en-US" altLang="ja-JP" sz="2000" b="1" i="0" u="none" strike="noStrike" kern="1200" cap="none" spc="50" normalizeH="0" baseline="0" noProof="0" dirty="0">
-              <a:ln>
-                <a:noFill/>
-              </a:ln>
-              <a:solidFill>
-                <a:srgbClr val="42557A"/>
-              </a:solidFill>
-              <a:effectLst/>
-              <a:uLnTx/>
-              <a:uFillTx/>
-              <a:latin typeface="源ノ角ゴシック JP" panose="020B0500000000000000" pitchFamily="34" charset="-128"/>
-              <a:ea typeface="源ノ角ゴシック JP" panose="020B0500000000000000" pitchFamily="34" charset="-128"/>
-              <a:cs typeface="+mn-cs"/>
-            </a:endParaRPr>
-          </a:p>
-        </p:txBody>
-      </p:sp>
-      <p:sp>
-        <p:nvSpPr>
           <p:cNvPr id="4" name="テキスト ボックス 3">
             <a:extLst>
               <a:ext uri="{FF2B5EF4-FFF2-40B4-BE49-F238E27FC236}">
@@ -35523,6 +35151,82 @@
               </a:solidFill>
               <a:latin typeface="源ノ角ゴシック JP" panose="020B0500000000000000" pitchFamily="34" charset="-128"/>
               <a:ea typeface="源ノ角ゴシック JP" panose="020B0500000000000000" pitchFamily="34" charset="-128"/>
+            </a:endParaRPr>
+          </a:p>
+        </p:txBody>
+      </p:sp>
+      <p:sp>
+        <p:nvSpPr>
+          <p:cNvPr id="3" name="テキスト ボックス 2">
+            <a:extLst>
+              <a:ext uri="{FF2B5EF4-FFF2-40B4-BE49-F238E27FC236}">
+                <a16:creationId xmlns:a16="http://schemas.microsoft.com/office/drawing/2014/main" id="{DBA1D8C1-7A5D-1E85-3A4D-FFEA9CD41B0A}"/>
+              </a:ext>
+            </a:extLst>
+          </p:cNvPr>
+          <p:cNvSpPr txBox="1"/>
+          <p:nvPr/>
+        </p:nvSpPr>
+        <p:spPr>
+          <a:xfrm>
+            <a:off x="222898" y="635799"/>
+            <a:ext cx="3077533" cy="333681"/>
+          </a:xfrm>
+          <a:prstGeom prst="rect">
+            <a:avLst/>
+          </a:prstGeom>
+          <a:noFill/>
+        </p:spPr>
+        <p:txBody>
+          <a:bodyPr wrap="square">
+            <a:spAutoFit/>
+          </a:bodyPr>
+          <a:lstStyle/>
+          <a:p>
+            <a:pPr marL="0" marR="0" lvl="0" indent="0" algn="l" defTabSz="457200" rtl="0" eaLnBrk="1" fontAlgn="auto" latinLnBrk="0" hangingPunct="1">
+              <a:lnSpc>
+                <a:spcPts val="2020"/>
+              </a:lnSpc>
+              <a:spcBef>
+                <a:spcPts val="0"/>
+              </a:spcBef>
+              <a:spcAft>
+                <a:spcPts val="0"/>
+              </a:spcAft>
+              <a:buClrTx/>
+              <a:buSzTx/>
+              <a:buFontTx/>
+              <a:buNone/>
+              <a:tabLst/>
+              <a:defRPr/>
+            </a:pPr>
+            <a:r>
+              <a:rPr kumimoji="1" lang="ja-JP" altLang="en-US" sz="1600" b="1">
+                <a:solidFill>
+                  <a:schemeClr val="bg2">
+                    <a:lumMod val="25000"/>
+                  </a:schemeClr>
+                </a:solidFill>
+                <a:latin typeface="源ノ角ゴシック JP" panose="020B0500000000000000" pitchFamily="34" charset="-128"/>
+                <a:ea typeface="源ノ角ゴシック JP" panose="020B0500000000000000" pitchFamily="34" charset="-128"/>
+              </a:rPr>
+              <a:t>問題の特定</a:t>
+            </a:r>
+            <a:endParaRPr kumimoji="1" lang="en-US" altLang="ja-JP" sz="1600" b="1" i="0" u="none" strike="noStrike" kern="1200" cap="none" spc="0" normalizeH="0" baseline="0" noProof="0" dirty="0">
+              <a:ln>
+                <a:noFill/>
+              </a:ln>
+              <a:solidFill>
+                <a:schemeClr val="bg2">
+                  <a:lumMod val="25000"/>
+                </a:schemeClr>
+              </a:solidFill>
+              <a:effectLst/>
+              <a:uLnTx/>
+              <a:uFillTx/>
+              <a:latin typeface="源ノ角ゴシック JP" panose="020B0500000000000000" pitchFamily="34" charset="-128"/>
+              <a:ea typeface="源ノ角ゴシック JP" panose="020B0500000000000000" pitchFamily="34" charset="-128"/>
+              <a:cs typeface="+mn-cs"/>
             </a:endParaRPr>
           </a:p>
         </p:txBody>
@@ -35596,103 +35300,6 @@
       </p:pic>
       <p:sp>
         <p:nvSpPr>
-          <p:cNvPr id="2" name="テキスト ボックス 1">
-            <a:extLst>
-              <a:ext uri="{FF2B5EF4-FFF2-40B4-BE49-F238E27FC236}">
-                <a16:creationId xmlns:a16="http://schemas.microsoft.com/office/drawing/2014/main" id="{CA56EEE8-8D76-E74E-5F05-99A8E16AEBE3}"/>
-              </a:ext>
-            </a:extLst>
-          </p:cNvPr>
-          <p:cNvSpPr txBox="1"/>
-          <p:nvPr/>
-        </p:nvSpPr>
-        <p:spPr>
-          <a:xfrm>
-            <a:off x="89935" y="568886"/>
-            <a:ext cx="8196146" cy="492230"/>
-          </a:xfrm>
-          <a:prstGeom prst="rect">
-            <a:avLst/>
-          </a:prstGeom>
-          <a:noFill/>
-          <a:ln w="25400" cap="flat">
-            <a:noFill/>
-            <a:miter lim="400000"/>
-          </a:ln>
-          <a:effectLst/>
-          <a:sp3d/>
-        </p:spPr>
-        <p:style>
-          <a:lnRef idx="0">
-            <a:scrgbClr r="0" g="0" b="0"/>
-          </a:lnRef>
-          <a:fillRef idx="0">
-            <a:scrgbClr r="0" g="0" b="0"/>
-          </a:fillRef>
-          <a:effectRef idx="0">
-            <a:scrgbClr r="0" g="0" b="0"/>
-          </a:effectRef>
-          <a:fontRef idx="none"/>
-        </p:style>
-        <p:txBody>
-          <a:bodyPr rot="0" spcFirstLastPara="1" vertOverflow="overflow" horzOverflow="overflow" vert="horz" wrap="square" lIns="83715" tIns="83715" rIns="83715" bIns="83715" numCol="1" spcCol="38100" rtlCol="0" anchor="ctr">
-            <a:spAutoFit/>
-          </a:bodyPr>
-          <a:lstStyle/>
-          <a:p>
-            <a:pPr marL="0" marR="0" lvl="0" indent="66714" algn="l" defTabSz="438410" rtl="0" eaLnBrk="1" fontAlgn="auto" latinLnBrk="0" hangingPunct="0">
-              <a:lnSpc>
-                <a:spcPct val="100000"/>
-              </a:lnSpc>
-              <a:spcBef>
-                <a:spcPts val="0"/>
-              </a:spcBef>
-              <a:spcAft>
-                <a:spcPts val="0"/>
-              </a:spcAft>
-              <a:buClrTx/>
-              <a:buSzTx/>
-              <a:buFontTx/>
-              <a:buNone/>
-              <a:tabLst/>
-              <a:defRPr/>
-            </a:pPr>
-            <a:r>
-              <a:rPr kumimoji="0" lang="ja-JP" altLang="en-US" sz="2000" b="1" i="0" u="none" strike="noStrike" kern="1200" cap="none" spc="50" normalizeH="0" baseline="0" noProof="0">
-                <a:ln>
-                  <a:noFill/>
-                </a:ln>
-                <a:solidFill>
-                  <a:srgbClr val="42557A"/>
-                </a:solidFill>
-                <a:effectLst/>
-                <a:uLnTx/>
-                <a:uFillTx/>
-                <a:latin typeface="源ノ角ゴシック JP" panose="020B0500000000000000" pitchFamily="34" charset="-128"/>
-                <a:ea typeface="源ノ角ゴシック JP" panose="020B0500000000000000" pitchFamily="34" charset="-128"/>
-                <a:cs typeface="+mn-cs"/>
-              </a:rPr>
-              <a:t>問題を特定する</a:t>
-            </a:r>
-            <a:endParaRPr kumimoji="0" lang="en-US" altLang="ja-JP" sz="2000" b="1" i="0" u="none" strike="noStrike" kern="1200" cap="none" spc="50" normalizeH="0" baseline="0" noProof="0" dirty="0">
-              <a:ln>
-                <a:noFill/>
-              </a:ln>
-              <a:solidFill>
-                <a:srgbClr val="42557A"/>
-              </a:solidFill>
-              <a:effectLst/>
-              <a:uLnTx/>
-              <a:uFillTx/>
-              <a:latin typeface="源ノ角ゴシック JP" panose="020B0500000000000000" pitchFamily="34" charset="-128"/>
-              <a:ea typeface="源ノ角ゴシック JP" panose="020B0500000000000000" pitchFamily="34" charset="-128"/>
-              <a:cs typeface="+mn-cs"/>
-            </a:endParaRPr>
-          </a:p>
-        </p:txBody>
-      </p:sp>
-      <p:sp>
-        <p:nvSpPr>
           <p:cNvPr id="4" name="テキスト ボックス 3">
             <a:extLst>
               <a:ext uri="{FF2B5EF4-FFF2-40B4-BE49-F238E27FC236}">
@@ -35756,6 +35363,82 @@
               </a:solidFill>
               <a:latin typeface="源ノ角ゴシック JP" panose="020B0500000000000000" pitchFamily="34" charset="-128"/>
               <a:ea typeface="源ノ角ゴシック JP" panose="020B0500000000000000" pitchFamily="34" charset="-128"/>
+            </a:endParaRPr>
+          </a:p>
+        </p:txBody>
+      </p:sp>
+      <p:sp>
+        <p:nvSpPr>
+          <p:cNvPr id="5" name="テキスト ボックス 4">
+            <a:extLst>
+              <a:ext uri="{FF2B5EF4-FFF2-40B4-BE49-F238E27FC236}">
+                <a16:creationId xmlns:a16="http://schemas.microsoft.com/office/drawing/2014/main" id="{D4EF9169-BC28-55D8-4056-2EAF638D36C3}"/>
+              </a:ext>
+            </a:extLst>
+          </p:cNvPr>
+          <p:cNvSpPr txBox="1"/>
+          <p:nvPr/>
+        </p:nvSpPr>
+        <p:spPr>
+          <a:xfrm>
+            <a:off x="222898" y="635799"/>
+            <a:ext cx="3077533" cy="333681"/>
+          </a:xfrm>
+          <a:prstGeom prst="rect">
+            <a:avLst/>
+          </a:prstGeom>
+          <a:noFill/>
+        </p:spPr>
+        <p:txBody>
+          <a:bodyPr wrap="square">
+            <a:spAutoFit/>
+          </a:bodyPr>
+          <a:lstStyle/>
+          <a:p>
+            <a:pPr marL="0" marR="0" lvl="0" indent="0" algn="l" defTabSz="457200" rtl="0" eaLnBrk="1" fontAlgn="auto" latinLnBrk="0" hangingPunct="1">
+              <a:lnSpc>
+                <a:spcPts val="2020"/>
+              </a:lnSpc>
+              <a:spcBef>
+                <a:spcPts val="0"/>
+              </a:spcBef>
+              <a:spcAft>
+                <a:spcPts val="0"/>
+              </a:spcAft>
+              <a:buClrTx/>
+              <a:buSzTx/>
+              <a:buFontTx/>
+              <a:buNone/>
+              <a:tabLst/>
+              <a:defRPr/>
+            </a:pPr>
+            <a:r>
+              <a:rPr kumimoji="1" lang="ja-JP" altLang="en-US" sz="1600" b="1">
+                <a:solidFill>
+                  <a:schemeClr val="bg2">
+                    <a:lumMod val="25000"/>
+                  </a:schemeClr>
+                </a:solidFill>
+                <a:latin typeface="源ノ角ゴシック JP" panose="020B0500000000000000" pitchFamily="34" charset="-128"/>
+                <a:ea typeface="源ノ角ゴシック JP" panose="020B0500000000000000" pitchFamily="34" charset="-128"/>
+              </a:rPr>
+              <a:t>問題の特定</a:t>
+            </a:r>
+            <a:endParaRPr kumimoji="1" lang="en-US" altLang="ja-JP" sz="1600" b="1" i="0" u="none" strike="noStrike" kern="1200" cap="none" spc="0" normalizeH="0" baseline="0" noProof="0" dirty="0">
+              <a:ln>
+                <a:noFill/>
+              </a:ln>
+              <a:solidFill>
+                <a:schemeClr val="bg2">
+                  <a:lumMod val="25000"/>
+                </a:schemeClr>
+              </a:solidFill>
+              <a:effectLst/>
+              <a:uLnTx/>
+              <a:uFillTx/>
+              <a:latin typeface="源ノ角ゴシック JP" panose="020B0500000000000000" pitchFamily="34" charset="-128"/>
+              <a:ea typeface="源ノ角ゴシック JP" panose="020B0500000000000000" pitchFamily="34" charset="-128"/>
+              <a:cs typeface="+mn-cs"/>
             </a:endParaRPr>
           </a:p>
         </p:txBody>
@@ -35870,8 +35553,8 @@
         </p:nvSpPr>
         <p:spPr>
           <a:xfrm>
-            <a:off x="89935" y="568886"/>
-            <a:ext cx="8196146" cy="492230"/>
+            <a:off x="195442" y="604666"/>
+            <a:ext cx="8493995" cy="476842"/>
           </a:xfrm>
           <a:prstGeom prst="rect">
             <a:avLst/>
@@ -35934,7 +35617,41 @@
                 <a:ea typeface="源ノ角ゴシック JP" panose="020B0500000000000000" pitchFamily="34" charset="-128"/>
                 <a:cs typeface="+mn-cs"/>
               </a:rPr>
-              <a:t>「健康ニーズ」の大きさと変化を捉えるセグメント表を作成した</a:t>
+              <a:t>健康ニーズを「詳細ニーズ</a:t>
+            </a:r>
+            <a:r>
+              <a:rPr kumimoji="0" lang="en-US" altLang="ja-JP" sz="2000" b="1" i="0" u="none" strike="noStrike" kern="1200" cap="none" spc="50" normalizeH="0" baseline="0" noProof="0" dirty="0">
+                <a:ln>
+                  <a:noFill/>
+                </a:ln>
+                <a:solidFill>
+                  <a:srgbClr val="42557A"/>
+                </a:solidFill>
+                <a:effectLst/>
+                <a:uLnTx/>
+                <a:uFillTx/>
+                <a:latin typeface="源ノ角ゴシック JP" panose="020B0500000000000000" pitchFamily="34" charset="-128"/>
+                <a:ea typeface="源ノ角ゴシック JP" panose="020B0500000000000000" pitchFamily="34" charset="-128"/>
+                <a:cs typeface="+mn-cs"/>
+              </a:rPr>
+              <a:t> × </a:t>
+            </a:r>
+            <a:r>
+              <a:rPr kumimoji="0" lang="ja-JP" altLang="en-US" sz="2000" b="1" i="0" u="none" strike="noStrike" kern="1200" cap="none" spc="50" normalizeH="0" baseline="0" noProof="0">
+                <a:ln>
+                  <a:noFill/>
+                </a:ln>
+                <a:solidFill>
+                  <a:srgbClr val="42557A"/>
+                </a:solidFill>
+                <a:effectLst/>
+                <a:uLnTx/>
+                <a:uFillTx/>
+                <a:latin typeface="源ノ角ゴシック JP" panose="020B0500000000000000" pitchFamily="34" charset="-128"/>
+                <a:ea typeface="源ノ角ゴシック JP" panose="020B0500000000000000" pitchFamily="34" charset="-128"/>
+                <a:cs typeface="+mn-cs"/>
+              </a:rPr>
+              <a:t>属性」で捉え、大きさと変化を評価する</a:t>
             </a:r>
             <a:endParaRPr kumimoji="0" lang="en-US" altLang="ja-JP" sz="2000" b="1" i="0" u="none" strike="noStrike" kern="1200" cap="none" spc="50" normalizeH="0" baseline="0" noProof="0" dirty="0">
               <a:ln>
@@ -38438,7 +38155,7 @@
         </p:nvSpPr>
         <p:spPr>
           <a:xfrm>
-            <a:off x="412030" y="1125403"/>
+            <a:off x="492040" y="1139016"/>
             <a:ext cx="3754427" cy="321435"/>
           </a:xfrm>
           <a:prstGeom prst="rect">
@@ -38612,7 +38329,7 @@
         </p:nvSpPr>
         <p:spPr>
           <a:xfrm>
-            <a:off x="412030" y="1503666"/>
+            <a:off x="492040" y="1503119"/>
             <a:ext cx="3884900" cy="579454"/>
           </a:xfrm>
           <a:prstGeom prst="rect">
@@ -38787,7 +38504,7 @@
         </p:nvSpPr>
         <p:spPr>
           <a:xfrm>
-            <a:off x="412030" y="746002"/>
+            <a:off x="492040" y="756786"/>
             <a:ext cx="3077533" cy="333681"/>
           </a:xfrm>
           <a:prstGeom prst="rect">
@@ -40764,103 +40481,6 @@
           <a:chExt cx="0" cy="0"/>
         </a:xfrm>
       </p:grpSpPr>
-      <p:sp>
-        <p:nvSpPr>
-          <p:cNvPr id="2" name="テキスト ボックス 1">
-            <a:extLst>
-              <a:ext uri="{FF2B5EF4-FFF2-40B4-BE49-F238E27FC236}">
-                <a16:creationId xmlns:a16="http://schemas.microsoft.com/office/drawing/2014/main" id="{FE967D66-88D2-21AF-4D3A-3023BCE181CA}"/>
-              </a:ext>
-            </a:extLst>
-          </p:cNvPr>
-          <p:cNvSpPr txBox="1"/>
-          <p:nvPr/>
-        </p:nvSpPr>
-        <p:spPr>
-          <a:xfrm>
-            <a:off x="147085" y="568886"/>
-            <a:ext cx="8356836" cy="492230"/>
-          </a:xfrm>
-          <a:prstGeom prst="rect">
-            <a:avLst/>
-          </a:prstGeom>
-          <a:noFill/>
-          <a:ln w="25400" cap="flat">
-            <a:noFill/>
-            <a:miter lim="400000"/>
-          </a:ln>
-          <a:effectLst/>
-          <a:sp3d/>
-        </p:spPr>
-        <p:style>
-          <a:lnRef idx="0">
-            <a:scrgbClr r="0" g="0" b="0"/>
-          </a:lnRef>
-          <a:fillRef idx="0">
-            <a:scrgbClr r="0" g="0" b="0"/>
-          </a:fillRef>
-          <a:effectRef idx="0">
-            <a:scrgbClr r="0" g="0" b="0"/>
-          </a:effectRef>
-          <a:fontRef idx="none"/>
-        </p:style>
-        <p:txBody>
-          <a:bodyPr rot="0" spcFirstLastPara="1" vertOverflow="overflow" horzOverflow="overflow" vert="horz" wrap="square" lIns="83715" tIns="83715" rIns="83715" bIns="83715" numCol="1" spcCol="38100" rtlCol="0" anchor="ctr">
-            <a:spAutoFit/>
-          </a:bodyPr>
-          <a:lstStyle/>
-          <a:p>
-            <a:pPr marL="0" marR="0" lvl="0" indent="66714" algn="l" defTabSz="438410" rtl="0" eaLnBrk="1" fontAlgn="auto" latinLnBrk="0" hangingPunct="0">
-              <a:lnSpc>
-                <a:spcPct val="100000"/>
-              </a:lnSpc>
-              <a:spcBef>
-                <a:spcPts val="0"/>
-              </a:spcBef>
-              <a:spcAft>
-                <a:spcPts val="0"/>
-              </a:spcAft>
-              <a:buClrTx/>
-              <a:buSzTx/>
-              <a:buFontTx/>
-              <a:buNone/>
-              <a:tabLst/>
-              <a:defRPr/>
-            </a:pPr>
-            <a:r>
-              <a:rPr kumimoji="0" lang="ja-JP" altLang="en-US" sz="2000" b="1" i="0" u="none" strike="noStrike" kern="1200" cap="none" spc="50" normalizeH="0" baseline="0" noProof="0">
-                <a:ln>
-                  <a:noFill/>
-                </a:ln>
-                <a:solidFill>
-                  <a:srgbClr val="42557A"/>
-                </a:solidFill>
-                <a:effectLst/>
-                <a:uLnTx/>
-                <a:uFillTx/>
-                <a:latin typeface="源ノ角ゴシック JP" panose="020B0500000000000000" pitchFamily="34" charset="-128"/>
-                <a:ea typeface="源ノ角ゴシック JP" panose="020B0500000000000000" pitchFamily="34" charset="-128"/>
-                <a:cs typeface="+mn-cs"/>
-              </a:rPr>
-              <a:t>現在のニーズが大きく、過去から増加しているセグメントを特定した</a:t>
-            </a:r>
-            <a:endParaRPr kumimoji="0" lang="en-US" altLang="ja-JP" sz="2000" b="1" i="0" u="none" strike="noStrike" kern="1200" cap="none" spc="50" normalizeH="0" baseline="0" noProof="0" dirty="0">
-              <a:ln>
-                <a:noFill/>
-              </a:ln>
-              <a:solidFill>
-                <a:srgbClr val="42557A"/>
-              </a:solidFill>
-              <a:effectLst/>
-              <a:uLnTx/>
-              <a:uFillTx/>
-              <a:latin typeface="源ノ角ゴシック JP" panose="020B0500000000000000" pitchFamily="34" charset="-128"/>
-              <a:ea typeface="源ノ角ゴシック JP" panose="020B0500000000000000" pitchFamily="34" charset="-128"/>
-              <a:cs typeface="+mn-cs"/>
-            </a:endParaRPr>
-          </a:p>
-        </p:txBody>
-      </p:sp>
       <p:grpSp>
         <p:nvGrpSpPr>
           <p:cNvPr id="55" name="グループ化 54">
@@ -42335,6 +41955,103 @@
           </p:txBody>
         </p:sp>
       </p:grpSp>
+      <p:sp>
+        <p:nvSpPr>
+          <p:cNvPr id="4" name="テキスト ボックス 3">
+            <a:extLst>
+              <a:ext uri="{FF2B5EF4-FFF2-40B4-BE49-F238E27FC236}">
+                <a16:creationId xmlns:a16="http://schemas.microsoft.com/office/drawing/2014/main" id="{E203D16A-9C10-5882-9C23-DFBA0A1A383F}"/>
+              </a:ext>
+            </a:extLst>
+          </p:cNvPr>
+          <p:cNvSpPr txBox="1"/>
+          <p:nvPr/>
+        </p:nvSpPr>
+        <p:spPr>
+          <a:xfrm>
+            <a:off x="195442" y="604666"/>
+            <a:ext cx="8493995" cy="476842"/>
+          </a:xfrm>
+          <a:prstGeom prst="rect">
+            <a:avLst/>
+          </a:prstGeom>
+          <a:noFill/>
+          <a:ln w="25400" cap="flat">
+            <a:noFill/>
+            <a:miter lim="400000"/>
+          </a:ln>
+          <a:effectLst/>
+          <a:sp3d/>
+        </p:spPr>
+        <p:style>
+          <a:lnRef idx="0">
+            <a:scrgbClr r="0" g="0" b="0"/>
+          </a:lnRef>
+          <a:fillRef idx="0">
+            <a:scrgbClr r="0" g="0" b="0"/>
+          </a:fillRef>
+          <a:effectRef idx="0">
+            <a:scrgbClr r="0" g="0" b="0"/>
+          </a:effectRef>
+          <a:fontRef idx="none"/>
+        </p:style>
+        <p:txBody>
+          <a:bodyPr rot="0" spcFirstLastPara="1" vertOverflow="overflow" horzOverflow="overflow" vert="horz" wrap="square" lIns="83715" tIns="83715" rIns="83715" bIns="83715" numCol="1" spcCol="38100" rtlCol="0" anchor="ctr">
+            <a:spAutoFit/>
+          </a:bodyPr>
+          <a:lstStyle/>
+          <a:p>
+            <a:pPr marL="0" marR="0" lvl="0" indent="66714" algn="l" defTabSz="438410" rtl="0" eaLnBrk="1" fontAlgn="auto" latinLnBrk="0" hangingPunct="0">
+              <a:lnSpc>
+                <a:spcPct val="100000"/>
+              </a:lnSpc>
+              <a:spcBef>
+                <a:spcPts val="0"/>
+              </a:spcBef>
+              <a:spcAft>
+                <a:spcPts val="0"/>
+              </a:spcAft>
+              <a:buClrTx/>
+              <a:buSzTx/>
+              <a:buFontTx/>
+              <a:buNone/>
+              <a:tabLst/>
+              <a:defRPr/>
+            </a:pPr>
+            <a:r>
+              <a:rPr kumimoji="0" lang="ja-JP" altLang="en-US" sz="2000" b="1" i="0" u="none" strike="noStrike" kern="1200" cap="none" spc="50" normalizeH="0" baseline="0" noProof="0">
+                <a:ln>
+                  <a:noFill/>
+                </a:ln>
+                <a:solidFill>
+                  <a:srgbClr val="42557A"/>
+                </a:solidFill>
+                <a:effectLst/>
+                <a:uLnTx/>
+                <a:uFillTx/>
+                <a:latin typeface="源ノ角ゴシック JP" panose="020B0500000000000000" pitchFamily="34" charset="-128"/>
+                <a:ea typeface="源ノ角ゴシック JP" panose="020B0500000000000000" pitchFamily="34" charset="-128"/>
+                <a:cs typeface="+mn-cs"/>
+              </a:rPr>
+              <a:t>現在のニーズが大きく、過去から増加した３つに対象を絞った</a:t>
+            </a:r>
+            <a:endParaRPr kumimoji="0" lang="en-US" altLang="ja-JP" sz="2000" b="1" i="0" u="none" strike="noStrike" kern="1200" cap="none" spc="50" normalizeH="0" baseline="0" noProof="0" dirty="0">
+              <a:ln>
+                <a:noFill/>
+              </a:ln>
+              <a:solidFill>
+                <a:srgbClr val="42557A"/>
+              </a:solidFill>
+              <a:effectLst/>
+              <a:uLnTx/>
+              <a:uFillTx/>
+              <a:latin typeface="源ノ角ゴシック JP" panose="020B0500000000000000" pitchFamily="34" charset="-128"/>
+              <a:ea typeface="源ノ角ゴシック JP" panose="020B0500000000000000" pitchFamily="34" charset="-128"/>
+              <a:cs typeface="+mn-cs"/>
+            </a:endParaRPr>
+          </a:p>
+        </p:txBody>
+      </p:sp>
     </p:spTree>
     <p:extLst>
       <p:ext uri="{BB962C8B-B14F-4D97-AF65-F5344CB8AC3E}">
@@ -42365,103 +42082,6 @@
           <a:chExt cx="0" cy="0"/>
         </a:xfrm>
       </p:grpSpPr>
-      <p:sp>
-        <p:nvSpPr>
-          <p:cNvPr id="2" name="テキスト ボックス 1">
-            <a:extLst>
-              <a:ext uri="{FF2B5EF4-FFF2-40B4-BE49-F238E27FC236}">
-                <a16:creationId xmlns:a16="http://schemas.microsoft.com/office/drawing/2014/main" id="{CAA530E1-5E0D-5573-68F1-EA6D66A986F5}"/>
-              </a:ext>
-            </a:extLst>
-          </p:cNvPr>
-          <p:cNvSpPr txBox="1"/>
-          <p:nvPr/>
-        </p:nvSpPr>
-        <p:spPr>
-          <a:xfrm>
-            <a:off x="89935" y="568886"/>
-            <a:ext cx="8196146" cy="492230"/>
-          </a:xfrm>
-          <a:prstGeom prst="rect">
-            <a:avLst/>
-          </a:prstGeom>
-          <a:noFill/>
-          <a:ln w="25400" cap="flat">
-            <a:noFill/>
-            <a:miter lim="400000"/>
-          </a:ln>
-          <a:effectLst/>
-          <a:sp3d/>
-        </p:spPr>
-        <p:style>
-          <a:lnRef idx="0">
-            <a:scrgbClr r="0" g="0" b="0"/>
-          </a:lnRef>
-          <a:fillRef idx="0">
-            <a:scrgbClr r="0" g="0" b="0"/>
-          </a:fillRef>
-          <a:effectRef idx="0">
-            <a:scrgbClr r="0" g="0" b="0"/>
-          </a:effectRef>
-          <a:fontRef idx="none"/>
-        </p:style>
-        <p:txBody>
-          <a:bodyPr rot="0" spcFirstLastPara="1" vertOverflow="overflow" horzOverflow="overflow" vert="horz" wrap="square" lIns="83715" tIns="83715" rIns="83715" bIns="83715" numCol="1" spcCol="38100" rtlCol="0" anchor="ctr">
-            <a:spAutoFit/>
-          </a:bodyPr>
-          <a:lstStyle/>
-          <a:p>
-            <a:pPr marL="0" marR="0" lvl="0" indent="66714" algn="l" defTabSz="438410" rtl="0" eaLnBrk="1" fontAlgn="auto" latinLnBrk="0" hangingPunct="0">
-              <a:lnSpc>
-                <a:spcPct val="100000"/>
-              </a:lnSpc>
-              <a:spcBef>
-                <a:spcPts val="0"/>
-              </a:spcBef>
-              <a:spcAft>
-                <a:spcPts val="0"/>
-              </a:spcAft>
-              <a:buClrTx/>
-              <a:buSzTx/>
-              <a:buFontTx/>
-              <a:buNone/>
-              <a:tabLst/>
-              <a:defRPr/>
-            </a:pPr>
-            <a:r>
-              <a:rPr kumimoji="0" lang="ja-JP" altLang="en-US" sz="2000" b="1" i="0" u="none" strike="noStrike" kern="1200" cap="none" spc="50" normalizeH="0" baseline="0" noProof="0">
-                <a:ln>
-                  <a:noFill/>
-                </a:ln>
-                <a:solidFill>
-                  <a:srgbClr val="42557A"/>
-                </a:solidFill>
-                <a:effectLst/>
-                <a:uLnTx/>
-                <a:uFillTx/>
-                <a:latin typeface="源ノ角ゴシック JP" panose="020B0500000000000000" pitchFamily="34" charset="-128"/>
-                <a:ea typeface="源ノ角ゴシック JP" panose="020B0500000000000000" pitchFamily="34" charset="-128"/>
-                <a:cs typeface="+mn-cs"/>
-              </a:rPr>
-              <a:t>「対応」の実施量を評価する</a:t>
-            </a:r>
-            <a:endParaRPr kumimoji="0" lang="en-US" altLang="ja-JP" sz="2000" b="1" i="0" u="none" strike="noStrike" kern="1200" cap="none" spc="50" normalizeH="0" baseline="0" noProof="0" dirty="0">
-              <a:ln>
-                <a:noFill/>
-              </a:ln>
-              <a:solidFill>
-                <a:srgbClr val="42557A"/>
-              </a:solidFill>
-              <a:effectLst/>
-              <a:uLnTx/>
-              <a:uFillTx/>
-              <a:latin typeface="源ノ角ゴシック JP" panose="020B0500000000000000" pitchFamily="34" charset="-128"/>
-              <a:ea typeface="源ノ角ゴシック JP" panose="020B0500000000000000" pitchFamily="34" charset="-128"/>
-              <a:cs typeface="+mn-cs"/>
-            </a:endParaRPr>
-          </a:p>
-        </p:txBody>
-      </p:sp>
       <p:grpSp>
         <p:nvGrpSpPr>
           <p:cNvPr id="18" name="グループ化 17">
@@ -43798,6 +43418,103 @@
           </a:prstGeom>
         </p:spPr>
       </p:pic>
+      <p:sp>
+        <p:nvSpPr>
+          <p:cNvPr id="13" name="テキスト ボックス 12">
+            <a:extLst>
+              <a:ext uri="{FF2B5EF4-FFF2-40B4-BE49-F238E27FC236}">
+                <a16:creationId xmlns:a16="http://schemas.microsoft.com/office/drawing/2014/main" id="{456020EE-B7A9-A63F-F06A-F49BC9B6730A}"/>
+              </a:ext>
+            </a:extLst>
+          </p:cNvPr>
+          <p:cNvSpPr txBox="1"/>
+          <p:nvPr/>
+        </p:nvSpPr>
+        <p:spPr>
+          <a:xfrm>
+            <a:off x="195442" y="604666"/>
+            <a:ext cx="8493995" cy="476842"/>
+          </a:xfrm>
+          <a:prstGeom prst="rect">
+            <a:avLst/>
+          </a:prstGeom>
+          <a:noFill/>
+          <a:ln w="25400" cap="flat">
+            <a:noFill/>
+            <a:miter lim="400000"/>
+          </a:ln>
+          <a:effectLst/>
+          <a:sp3d/>
+        </p:spPr>
+        <p:style>
+          <a:lnRef idx="0">
+            <a:scrgbClr r="0" g="0" b="0"/>
+          </a:lnRef>
+          <a:fillRef idx="0">
+            <a:scrgbClr r="0" g="0" b="0"/>
+          </a:fillRef>
+          <a:effectRef idx="0">
+            <a:scrgbClr r="0" g="0" b="0"/>
+          </a:effectRef>
+          <a:fontRef idx="none"/>
+        </p:style>
+        <p:txBody>
+          <a:bodyPr rot="0" spcFirstLastPara="1" vertOverflow="overflow" horzOverflow="overflow" vert="horz" wrap="square" lIns="83715" tIns="83715" rIns="83715" bIns="83715" numCol="1" spcCol="38100" rtlCol="0" anchor="ctr">
+            <a:spAutoFit/>
+          </a:bodyPr>
+          <a:lstStyle/>
+          <a:p>
+            <a:pPr marL="0" marR="0" lvl="0" indent="66714" algn="l" defTabSz="438410" rtl="0" eaLnBrk="1" fontAlgn="auto" latinLnBrk="0" hangingPunct="0">
+              <a:lnSpc>
+                <a:spcPct val="100000"/>
+              </a:lnSpc>
+              <a:spcBef>
+                <a:spcPts val="0"/>
+              </a:spcBef>
+              <a:spcAft>
+                <a:spcPts val="0"/>
+              </a:spcAft>
+              <a:buClrTx/>
+              <a:buSzTx/>
+              <a:buFontTx/>
+              <a:buNone/>
+              <a:tabLst/>
+              <a:defRPr/>
+            </a:pPr>
+            <a:r>
+              <a:rPr kumimoji="0" lang="ja-JP" altLang="en-US" sz="2000" b="1" i="0" u="none" strike="noStrike" kern="1200" cap="none" spc="50" normalizeH="0" baseline="0" noProof="0">
+                <a:ln>
+                  <a:noFill/>
+                </a:ln>
+                <a:solidFill>
+                  <a:srgbClr val="42557A"/>
+                </a:solidFill>
+                <a:effectLst/>
+                <a:uLnTx/>
+                <a:uFillTx/>
+                <a:latin typeface="源ノ角ゴシック JP" panose="020B0500000000000000" pitchFamily="34" charset="-128"/>
+                <a:ea typeface="源ノ角ゴシック JP" panose="020B0500000000000000" pitchFamily="34" charset="-128"/>
+                <a:cs typeface="+mn-cs"/>
+              </a:rPr>
+              <a:t>ニーズを満たすコンビニオリジナル商品を抽出する</a:t>
+            </a:r>
+            <a:endParaRPr kumimoji="0" lang="en-US" altLang="ja-JP" sz="2000" b="1" i="0" u="none" strike="noStrike" kern="1200" cap="none" spc="50" normalizeH="0" baseline="0" noProof="0" dirty="0">
+              <a:ln>
+                <a:noFill/>
+              </a:ln>
+              <a:solidFill>
+                <a:srgbClr val="42557A"/>
+              </a:solidFill>
+              <a:effectLst/>
+              <a:uLnTx/>
+              <a:uFillTx/>
+              <a:latin typeface="源ノ角ゴシック JP" panose="020B0500000000000000" pitchFamily="34" charset="-128"/>
+              <a:ea typeface="源ノ角ゴシック JP" panose="020B0500000000000000" pitchFamily="34" charset="-128"/>
+              <a:cs typeface="+mn-cs"/>
+            </a:endParaRPr>
+          </a:p>
+        </p:txBody>
+      </p:sp>
     </p:spTree>
     <p:extLst>
       <p:ext uri="{BB962C8B-B14F-4D97-AF65-F5344CB8AC3E}">
@@ -43857,7 +43574,7 @@
         </p:blipFill>
         <p:spPr>
           <a:xfrm>
-            <a:off x="1339297" y="813019"/>
+            <a:off x="1352293" y="1191705"/>
             <a:ext cx="6439414" cy="1728640"/>
           </a:xfrm>
           <a:prstGeom prst="rect">
@@ -43888,7 +43605,7 @@
         </p:blipFill>
         <p:spPr>
           <a:xfrm>
-            <a:off x="1352293" y="2872940"/>
+            <a:off x="1352293" y="3142571"/>
             <a:ext cx="6439414" cy="3172041"/>
           </a:xfrm>
           <a:prstGeom prst="rect">
@@ -43896,6 +43613,89 @@
           </a:prstGeom>
         </p:spPr>
       </p:pic>
+      <p:sp>
+        <p:nvSpPr>
+          <p:cNvPr id="3" name="テキスト ボックス 2">
+            <a:extLst>
+              <a:ext uri="{FF2B5EF4-FFF2-40B4-BE49-F238E27FC236}">
+                <a16:creationId xmlns:a16="http://schemas.microsoft.com/office/drawing/2014/main" id="{5D432E43-2FD5-19BB-83BD-B4883404A3F9}"/>
+              </a:ext>
+            </a:extLst>
+          </p:cNvPr>
+          <p:cNvSpPr txBox="1"/>
+          <p:nvPr/>
+        </p:nvSpPr>
+        <p:spPr>
+          <a:xfrm>
+            <a:off x="269790" y="635799"/>
+            <a:ext cx="3469872" cy="333681"/>
+          </a:xfrm>
+          <a:prstGeom prst="rect">
+            <a:avLst/>
+          </a:prstGeom>
+          <a:noFill/>
+        </p:spPr>
+        <p:txBody>
+          <a:bodyPr wrap="square">
+            <a:spAutoFit/>
+          </a:bodyPr>
+          <a:lstStyle/>
+          <a:p>
+            <a:pPr marL="0" marR="0" lvl="0" indent="0" algn="l" defTabSz="457200" rtl="0" eaLnBrk="1" fontAlgn="auto" latinLnBrk="0" hangingPunct="1">
+              <a:lnSpc>
+                <a:spcPts val="2020"/>
+              </a:lnSpc>
+              <a:spcBef>
+                <a:spcPts val="0"/>
+              </a:spcBef>
+              <a:spcAft>
+                <a:spcPts val="0"/>
+              </a:spcAft>
+              <a:buClrTx/>
+              <a:buSzTx/>
+              <a:buFontTx/>
+              <a:buNone/>
+              <a:tabLst/>
+              <a:defRPr/>
+            </a:pPr>
+            <a:r>
+              <a:rPr kumimoji="1" lang="ja-JP" altLang="en-US" sz="1600" b="1" i="0" u="none" strike="noStrike" kern="1200" cap="none" spc="0" normalizeH="0" baseline="0" noProof="0">
+                <a:ln>
+                  <a:noFill/>
+                </a:ln>
+                <a:solidFill>
+                  <a:schemeClr val="bg2">
+                    <a:lumMod val="25000"/>
+                  </a:schemeClr>
+                </a:solidFill>
+                <a:effectLst/>
+                <a:uLnTx/>
+                <a:uFillTx/>
+                <a:latin typeface="源ノ角ゴシック JP" panose="020B0500000000000000" pitchFamily="34" charset="-128"/>
+                <a:ea typeface="源ノ角ゴシック JP" panose="020B0500000000000000" pitchFamily="34" charset="-128"/>
+                <a:cs typeface="+mn-cs"/>
+              </a:rPr>
+              <a:t>「当てはまり度」の詳細な判定基準</a:t>
+            </a:r>
+            <a:endParaRPr kumimoji="1" lang="en-US" altLang="ja-JP" sz="1600" b="1" i="0" u="none" strike="noStrike" kern="1200" cap="none" spc="0" normalizeH="0" baseline="0" noProof="0" dirty="0">
+              <a:ln>
+                <a:noFill/>
+              </a:ln>
+              <a:solidFill>
+                <a:schemeClr val="bg2">
+                  <a:lumMod val="25000"/>
+                </a:schemeClr>
+              </a:solidFill>
+              <a:effectLst/>
+              <a:uLnTx/>
+              <a:uFillTx/>
+              <a:latin typeface="源ノ角ゴシック JP" panose="020B0500000000000000" pitchFamily="34" charset="-128"/>
+              <a:ea typeface="源ノ角ゴシック JP" panose="020B0500000000000000" pitchFamily="34" charset="-128"/>
+              <a:cs typeface="+mn-cs"/>
+            </a:endParaRPr>
+          </a:p>
+        </p:txBody>
+      </p:sp>
     </p:spTree>
     <p:extLst>
       <p:ext uri="{BB962C8B-B14F-4D97-AF65-F5344CB8AC3E}">
@@ -43926,103 +43726,6 @@
           <a:chExt cx="0" cy="0"/>
         </a:xfrm>
       </p:grpSpPr>
-      <p:sp>
-        <p:nvSpPr>
-          <p:cNvPr id="4" name="テキスト ボックス 3">
-            <a:extLst>
-              <a:ext uri="{FF2B5EF4-FFF2-40B4-BE49-F238E27FC236}">
-                <a16:creationId xmlns:a16="http://schemas.microsoft.com/office/drawing/2014/main" id="{AB393E06-8378-6DA9-7D29-C9ABAB4A5B06}"/>
-              </a:ext>
-            </a:extLst>
-          </p:cNvPr>
-          <p:cNvSpPr txBox="1"/>
-          <p:nvPr/>
-        </p:nvSpPr>
-        <p:spPr>
-          <a:xfrm>
-            <a:off x="89935" y="576580"/>
-            <a:ext cx="8196146" cy="476842"/>
-          </a:xfrm>
-          <a:prstGeom prst="rect">
-            <a:avLst/>
-          </a:prstGeom>
-          <a:noFill/>
-          <a:ln w="25400" cap="flat">
-            <a:noFill/>
-            <a:miter lim="400000"/>
-          </a:ln>
-          <a:effectLst/>
-          <a:sp3d/>
-        </p:spPr>
-        <p:style>
-          <a:lnRef idx="0">
-            <a:scrgbClr r="0" g="0" b="0"/>
-          </a:lnRef>
-          <a:fillRef idx="0">
-            <a:scrgbClr r="0" g="0" b="0"/>
-          </a:fillRef>
-          <a:effectRef idx="0">
-            <a:scrgbClr r="0" g="0" b="0"/>
-          </a:effectRef>
-          <a:fontRef idx="none"/>
-        </p:style>
-        <p:txBody>
-          <a:bodyPr rot="0" spcFirstLastPara="1" vertOverflow="overflow" horzOverflow="overflow" vert="horz" wrap="square" lIns="83715" tIns="83715" rIns="83715" bIns="83715" numCol="1" spcCol="38100" rtlCol="0" anchor="ctr">
-            <a:spAutoFit/>
-          </a:bodyPr>
-          <a:lstStyle/>
-          <a:p>
-            <a:pPr marL="0" marR="0" lvl="0" indent="66714" algn="l" defTabSz="438410" rtl="0" eaLnBrk="1" fontAlgn="auto" latinLnBrk="0" hangingPunct="0">
-              <a:lnSpc>
-                <a:spcPct val="100000"/>
-              </a:lnSpc>
-              <a:spcBef>
-                <a:spcPts val="0"/>
-              </a:spcBef>
-              <a:spcAft>
-                <a:spcPts val="0"/>
-              </a:spcAft>
-              <a:buClrTx/>
-              <a:buSzTx/>
-              <a:buFontTx/>
-              <a:buNone/>
-              <a:tabLst/>
-              <a:defRPr/>
-            </a:pPr>
-            <a:r>
-              <a:rPr kumimoji="0" lang="ja-JP" altLang="en-US" sz="2000" b="1" i="0" u="none" strike="noStrike" kern="1200" cap="none" spc="50" normalizeH="0" baseline="0" noProof="0">
-                <a:ln>
-                  <a:noFill/>
-                </a:ln>
-                <a:solidFill>
-                  <a:srgbClr val="42557A"/>
-                </a:solidFill>
-                <a:effectLst/>
-                <a:uLnTx/>
-                <a:uFillTx/>
-                <a:latin typeface="源ノ角ゴシック JP" panose="020B0500000000000000" pitchFamily="34" charset="-128"/>
-                <a:ea typeface="源ノ角ゴシック JP" panose="020B0500000000000000" pitchFamily="34" charset="-128"/>
-                <a:cs typeface="+mn-cs"/>
-              </a:rPr>
-              <a:t>セブンイレブンでは健康ニーズ間で抽出された商品数に差があった</a:t>
-            </a:r>
-            <a:endParaRPr kumimoji="0" lang="en-US" altLang="ja-JP" sz="2000" b="1" i="0" u="none" strike="noStrike" kern="1200" cap="none" spc="50" normalizeH="0" baseline="0" noProof="0" dirty="0">
-              <a:ln>
-                <a:noFill/>
-              </a:ln>
-              <a:solidFill>
-                <a:srgbClr val="42557A"/>
-              </a:solidFill>
-              <a:effectLst/>
-              <a:uLnTx/>
-              <a:uFillTx/>
-              <a:latin typeface="源ノ角ゴシック JP" panose="020B0500000000000000" pitchFamily="34" charset="-128"/>
-              <a:ea typeface="源ノ角ゴシック JP" panose="020B0500000000000000" pitchFamily="34" charset="-128"/>
-              <a:cs typeface="+mn-cs"/>
-            </a:endParaRPr>
-          </a:p>
-        </p:txBody>
-      </p:sp>
       <p:pic>
         <p:nvPicPr>
           <p:cNvPr id="7" name="図 6">
@@ -44054,6 +43757,137 @@
           </a:prstGeom>
         </p:spPr>
       </p:pic>
+      <p:sp>
+        <p:nvSpPr>
+          <p:cNvPr id="2" name="テキスト ボックス 1">
+            <a:extLst>
+              <a:ext uri="{FF2B5EF4-FFF2-40B4-BE49-F238E27FC236}">
+                <a16:creationId xmlns:a16="http://schemas.microsoft.com/office/drawing/2014/main" id="{89D386DC-0835-5CB7-0108-49283D7DB46F}"/>
+              </a:ext>
+            </a:extLst>
+          </p:cNvPr>
+          <p:cNvSpPr txBox="1"/>
+          <p:nvPr/>
+        </p:nvSpPr>
+        <p:spPr>
+          <a:xfrm>
+            <a:off x="195442" y="604666"/>
+            <a:ext cx="8493995" cy="476842"/>
+          </a:xfrm>
+          <a:prstGeom prst="rect">
+            <a:avLst/>
+          </a:prstGeom>
+          <a:noFill/>
+          <a:ln w="25400" cap="flat">
+            <a:noFill/>
+            <a:miter lim="400000"/>
+          </a:ln>
+          <a:effectLst/>
+          <a:sp3d/>
+        </p:spPr>
+        <p:style>
+          <a:lnRef idx="0">
+            <a:scrgbClr r="0" g="0" b="0"/>
+          </a:lnRef>
+          <a:fillRef idx="0">
+            <a:scrgbClr r="0" g="0" b="0"/>
+          </a:fillRef>
+          <a:effectRef idx="0">
+            <a:scrgbClr r="0" g="0" b="0"/>
+          </a:effectRef>
+          <a:fontRef idx="none"/>
+        </p:style>
+        <p:txBody>
+          <a:bodyPr rot="0" spcFirstLastPara="1" vertOverflow="overflow" horzOverflow="overflow" vert="horz" wrap="square" lIns="83715" tIns="83715" rIns="83715" bIns="83715" numCol="1" spcCol="38100" rtlCol="0" anchor="ctr">
+            <a:spAutoFit/>
+          </a:bodyPr>
+          <a:lstStyle/>
+          <a:p>
+            <a:pPr marL="0" marR="0" lvl="0" indent="66714" algn="l" defTabSz="438410" rtl="0" eaLnBrk="1" fontAlgn="auto" latinLnBrk="0" hangingPunct="0">
+              <a:lnSpc>
+                <a:spcPct val="100000"/>
+              </a:lnSpc>
+              <a:spcBef>
+                <a:spcPts val="0"/>
+              </a:spcBef>
+              <a:spcAft>
+                <a:spcPts val="0"/>
+              </a:spcAft>
+              <a:buClrTx/>
+              <a:buSzTx/>
+              <a:buFontTx/>
+              <a:buNone/>
+              <a:tabLst/>
+              <a:defRPr/>
+            </a:pPr>
+            <a:r>
+              <a:rPr kumimoji="0" lang="ja-JP" altLang="en-US" sz="2000" b="1" i="0" u="none" strike="noStrike" kern="1200" cap="none" spc="50" normalizeH="0" baseline="0" noProof="0">
+                <a:ln>
+                  <a:noFill/>
+                </a:ln>
+                <a:solidFill>
+                  <a:srgbClr val="42557A"/>
+                </a:solidFill>
+                <a:effectLst/>
+                <a:uLnTx/>
+                <a:uFillTx/>
+                <a:latin typeface="源ノ角ゴシック JP" panose="020B0500000000000000" pitchFamily="34" charset="-128"/>
+                <a:ea typeface="源ノ角ゴシック JP" panose="020B0500000000000000" pitchFamily="34" charset="-128"/>
+                <a:cs typeface="+mn-cs"/>
+              </a:rPr>
+              <a:t>セブンイレブンでは、脂質への「対応」に該当する商品は</a:t>
+            </a:r>
+            <a:r>
+              <a:rPr kumimoji="0" lang="en-US" altLang="ja-JP" sz="2000" b="1" i="0" u="none" strike="noStrike" kern="1200" cap="none" spc="50" normalizeH="0" baseline="0" noProof="0" dirty="0">
+                <a:ln>
+                  <a:noFill/>
+                </a:ln>
+                <a:solidFill>
+                  <a:srgbClr val="42557A"/>
+                </a:solidFill>
+                <a:effectLst/>
+                <a:uLnTx/>
+                <a:uFillTx/>
+                <a:latin typeface="源ノ角ゴシック JP" panose="020B0500000000000000" pitchFamily="34" charset="-128"/>
+                <a:ea typeface="源ノ角ゴシック JP" panose="020B0500000000000000" pitchFamily="34" charset="-128"/>
+                <a:cs typeface="+mn-cs"/>
+              </a:rPr>
+              <a:t>0</a:t>
+            </a:r>
+            <a:r>
+              <a:rPr kumimoji="0" lang="ja-JP" altLang="en-US" sz="2000" b="1" i="0" u="none" strike="noStrike" kern="1200" cap="none" spc="50" normalizeH="0" baseline="0" noProof="0">
+                <a:ln>
+                  <a:noFill/>
+                </a:ln>
+                <a:solidFill>
+                  <a:srgbClr val="42557A"/>
+                </a:solidFill>
+                <a:effectLst/>
+                <a:uLnTx/>
+                <a:uFillTx/>
+                <a:latin typeface="源ノ角ゴシック JP" panose="020B0500000000000000" pitchFamily="34" charset="-128"/>
+                <a:ea typeface="源ノ角ゴシック JP" panose="020B0500000000000000" pitchFamily="34" charset="-128"/>
+                <a:cs typeface="+mn-cs"/>
+              </a:rPr>
+              <a:t>だった</a:t>
+            </a:r>
+            <a:endParaRPr kumimoji="0" lang="en-US" altLang="ja-JP" sz="2000" b="1" i="0" u="none" strike="noStrike" kern="1200" cap="none" spc="50" normalizeH="0" baseline="0" noProof="0" dirty="0">
+              <a:ln>
+                <a:noFill/>
+              </a:ln>
+              <a:solidFill>
+                <a:srgbClr val="42557A"/>
+              </a:solidFill>
+              <a:effectLst/>
+              <a:uLnTx/>
+              <a:uFillTx/>
+              <a:latin typeface="源ノ角ゴシック JP" panose="020B0500000000000000" pitchFamily="34" charset="-128"/>
+              <a:ea typeface="源ノ角ゴシック JP" panose="020B0500000000000000" pitchFamily="34" charset="-128"/>
+              <a:cs typeface="+mn-cs"/>
+            </a:endParaRPr>
+          </a:p>
+        </p:txBody>
+      </p:sp>
     </p:spTree>
     <p:extLst>
       <p:ext uri="{BB962C8B-B14F-4D97-AF65-F5344CB8AC3E}">
